--- a/satalia-take-home-challenge-papadias.pptx
+++ b/satalia-take-home-challenge-papadias.pptx
@@ -1,28 +1,28 @@
 
 <file path=ppt/presentation.xml><?xml version="1.0" encoding="utf-8"?>
-<p:presentation xmlns:a="http://schemas.openxmlformats.org/drawingml/2006/main" xmlns:r="http://schemas.openxmlformats.org/officeDocument/2006/relationships" xmlns:p="http://schemas.openxmlformats.org/presentationml/2006/main" saveSubsetFonts="1">
+<p:presentation xmlns:a="http://schemas.openxmlformats.org/drawingml/2006/main" xmlns:r="http://schemas.openxmlformats.org/officeDocument/2006/relationships" xmlns:p="http://schemas.openxmlformats.org/presentationml/2006/main" saveSubsetFonts="1" autoCompressPictures="0">
   <p:sldMasterIdLst>
-    <p:sldMasterId id="2147483660" r:id="rId1"/>
+    <p:sldMasterId id="2147483648" r:id="rId1"/>
   </p:sldMasterIdLst>
   <p:sldIdLst>
-    <p:sldId id="257" r:id="rId2"/>
-    <p:sldId id="258" r:id="rId3"/>
-    <p:sldId id="259" r:id="rId4"/>
-    <p:sldId id="260" r:id="rId5"/>
-    <p:sldId id="261" r:id="rId6"/>
-    <p:sldId id="262" r:id="rId7"/>
-    <p:sldId id="263" r:id="rId8"/>
-    <p:sldId id="265" r:id="rId9"/>
-    <p:sldId id="264" r:id="rId10"/>
-    <p:sldId id="266" r:id="rId11"/>
+    <p:sldId id="256" r:id="rId7"/>
+    <p:sldId id="257" r:id="rId9"/>
+    <p:sldId id="258" r:id="rId10"/>
+    <p:sldId id="259" r:id="rId11"/>
+    <p:sldId id="260" r:id="rId12"/>
+    <p:sldId id="261" r:id="rId13"/>
+    <p:sldId id="262" r:id="rId14"/>
+    <p:sldId id="263" r:id="rId15"/>
+    <p:sldId id="264" r:id="rId16"/>
+    <p:sldId id="265" r:id="rId17"/>
   </p:sldIdLst>
-  <p:sldSz cx="12192000" cy="6858000"/>
+  <p:sldSz cx="12191695" cy="6858000" type="screen4x3"/>
   <p:notesSz cx="6858000" cy="9144000"/>
   <p:defaultTextStyle>
     <a:defPPr>
       <a:defRPr lang="en-US"/>
     </a:defPPr>
-    <a:lvl1pPr marL="0" algn="l" defTabSz="914400" rtl="0" eaLnBrk="1" latinLnBrk="0" hangingPunct="1">
+    <a:lvl1pPr marL="0" algn="l" defTabSz="457200" rtl="0" eaLnBrk="1" latinLnBrk="0" hangingPunct="1">
       <a:defRPr sz="1800" kern="1200">
         <a:solidFill>
           <a:schemeClr val="tx1"/>
@@ -32,7 +32,7 @@
         <a:cs typeface="+mn-cs"/>
       </a:defRPr>
     </a:lvl1pPr>
-    <a:lvl2pPr marL="457200" algn="l" defTabSz="914400" rtl="0" eaLnBrk="1" latinLnBrk="0" hangingPunct="1">
+    <a:lvl2pPr marL="457200" algn="l" defTabSz="457200" rtl="0" eaLnBrk="1" latinLnBrk="0" hangingPunct="1">
       <a:defRPr sz="1800" kern="1200">
         <a:solidFill>
           <a:schemeClr val="tx1"/>
@@ -42,7 +42,7 @@
         <a:cs typeface="+mn-cs"/>
       </a:defRPr>
     </a:lvl2pPr>
-    <a:lvl3pPr marL="914400" algn="l" defTabSz="914400" rtl="0" eaLnBrk="1" latinLnBrk="0" hangingPunct="1">
+    <a:lvl3pPr marL="914400" algn="l" defTabSz="457200" rtl="0" eaLnBrk="1" latinLnBrk="0" hangingPunct="1">
       <a:defRPr sz="1800" kern="1200">
         <a:solidFill>
           <a:schemeClr val="tx1"/>
@@ -52,7 +52,7 @@
         <a:cs typeface="+mn-cs"/>
       </a:defRPr>
     </a:lvl3pPr>
-    <a:lvl4pPr marL="1371600" algn="l" defTabSz="914400" rtl="0" eaLnBrk="1" latinLnBrk="0" hangingPunct="1">
+    <a:lvl4pPr marL="1371600" algn="l" defTabSz="457200" rtl="0" eaLnBrk="1" latinLnBrk="0" hangingPunct="1">
       <a:defRPr sz="1800" kern="1200">
         <a:solidFill>
           <a:schemeClr val="tx1"/>
@@ -62,7 +62,7 @@
         <a:cs typeface="+mn-cs"/>
       </a:defRPr>
     </a:lvl4pPr>
-    <a:lvl5pPr marL="1828800" algn="l" defTabSz="914400" rtl="0" eaLnBrk="1" latinLnBrk="0" hangingPunct="1">
+    <a:lvl5pPr marL="1828800" algn="l" defTabSz="457200" rtl="0" eaLnBrk="1" latinLnBrk="0" hangingPunct="1">
       <a:defRPr sz="1800" kern="1200">
         <a:solidFill>
           <a:schemeClr val="tx1"/>
@@ -72,7 +72,7 @@
         <a:cs typeface="+mn-cs"/>
       </a:defRPr>
     </a:lvl5pPr>
-    <a:lvl6pPr marL="2286000" algn="l" defTabSz="914400" rtl="0" eaLnBrk="1" latinLnBrk="0" hangingPunct="1">
+    <a:lvl6pPr marL="2286000" algn="l" defTabSz="457200" rtl="0" eaLnBrk="1" latinLnBrk="0" hangingPunct="1">
       <a:defRPr sz="1800" kern="1200">
         <a:solidFill>
           <a:schemeClr val="tx1"/>
@@ -82,7 +82,7 @@
         <a:cs typeface="+mn-cs"/>
       </a:defRPr>
     </a:lvl6pPr>
-    <a:lvl7pPr marL="2743200" algn="l" defTabSz="914400" rtl="0" eaLnBrk="1" latinLnBrk="0" hangingPunct="1">
+    <a:lvl7pPr marL="2743200" algn="l" defTabSz="457200" rtl="0" eaLnBrk="1" latinLnBrk="0" hangingPunct="1">
       <a:defRPr sz="1800" kern="1200">
         <a:solidFill>
           <a:schemeClr val="tx1"/>
@@ -92,7 +92,7 @@
         <a:cs typeface="+mn-cs"/>
       </a:defRPr>
     </a:lvl7pPr>
-    <a:lvl8pPr marL="3200400" algn="l" defTabSz="914400" rtl="0" eaLnBrk="1" latinLnBrk="0" hangingPunct="1">
+    <a:lvl8pPr marL="3200400" algn="l" defTabSz="457200" rtl="0" eaLnBrk="1" latinLnBrk="0" hangingPunct="1">
       <a:defRPr sz="1800" kern="1200">
         <a:solidFill>
           <a:schemeClr val="tx1"/>
@@ -102,7 +102,7 @@
         <a:cs typeface="+mn-cs"/>
       </a:defRPr>
     </a:lvl8pPr>
-    <a:lvl9pPr marL="3657600" algn="l" defTabSz="914400" rtl="0" eaLnBrk="1" latinLnBrk="0" hangingPunct="1">
+    <a:lvl9pPr marL="3657600" algn="l" defTabSz="457200" rtl="0" eaLnBrk="1" latinLnBrk="0" hangingPunct="1">
       <a:defRPr sz="1800" kern="1200">
         <a:solidFill>
           <a:schemeClr val="tx1"/>
@@ -113,20 +113,7 @@
       </a:defRPr>
     </a:lvl9pPr>
   </p:defaultTextStyle>
-  <p:extLst>
-    <p:ext uri="{EFAFB233-063F-42B5-8137-9DF3F51BA10A}">
-      <p15:sldGuideLst xmlns:p15="http://schemas.microsoft.com/office/powerpoint/2012/main"/>
-    </p:ext>
-  </p:extLst>
 </p:presentation>
-</file>
-
-<file path=ppt/revisionInfo.xml><?xml version="1.0" encoding="utf-8"?>
-<p1510:revInfo xmlns:a="http://schemas.openxmlformats.org/drawingml/2006/main" xmlns:r="http://schemas.openxmlformats.org/officeDocument/2006/relationships" xmlns:p1510="http://schemas.microsoft.com/office/powerpoint/2015/10/main">
-  <p1510:revLst>
-    <p1510:client id="{F17470C1-3E80-A9EB-2638-C1DF581F1D5D}" v="1285" dt="2026-06-25T22:51:42.851"/>
-  </p1510:revLst>
-</p1510:revInfo>
 </file>
 
 <file path=ppt/notesMasters/notesMaster1.xml><?xml version="1.0" encoding="utf-8"?>
@@ -524,13 +511,643 @@
           <a:lstStyle/>
           <a:p>
             <a:r>
-              <a:t>SFT overconfidence: the fine-tune is trained to emit a single hard True/False token, which pushes its raw probabilities toward 0/1 — so raw confidence is systematically overconfident (raw ECE 0.280 on test). Temperature scaling = divide the model's logits by one scalar T (fit on the validation split) before the softmax; T&gt;1 softens the distribution and removes the overconfidence. It is monotonic, so it never changes which class wins — accuracy is unchanged; only the confidence numbers become honest. Here it cuts ECE ~10x: 0.280 → 0.027. I fit several calibrators on validation and selected the best (temperature won). Why not isotonic? It needs more data and would overfit ~1,900 rows. Say it cold: calibration doesn't change the answer or the accuracy — it makes the confidence number trustworthy.</a:t>
+              <a:t>How do you know the ceiling? Published benchmarks cluster there; my results landed in the same band. 65% sounds weak? Floor is 50% for balanced binary, so it's real signal but task-capped — the responsible response is calibrated confidence and abstention. This slide sets expectations for every modest number later.</a:t>
+            </a:r>
+          </a:p>
+        </p:txBody>
+      </p:sp>
+      <p:sp>
+        <p:nvSpPr>
+          <p:cNvPr id="4" name="Slide Number Placeholder 3"/>
+          <p:cNvSpPr>
+            <a:spLocks noGrp="1"/>
+          </p:cNvSpPr>
+          <p:nvPr>
+            <p:ph type="sldNum" idx="5" sz="quarter"/>
+          </p:nvPr>
+        </p:nvSpPr>
+        <p:spPr/>
+      </p:sp>
+    </p:spTree>
+  </p:cSld>
+  <p:clrMapOvr>
+    <a:masterClrMapping/>
+  </p:clrMapOvr>
+</p:notes>
+</file>
+
+<file path=ppt/notesSlides/notesSlide10.xml><?xml version="1.0" encoding="utf-8"?>
+<p:notes xmlns:a="http://schemas.openxmlformats.org/drawingml/2006/main" xmlns:p="http://schemas.openxmlformats.org/presentationml/2006/main" xmlns:r="http://schemas.openxmlformats.org/officeDocument/2006/relationships">
+  <p:cSld>
+    <p:spTree>
+      <p:nvGrpSpPr>
+        <p:cNvPr id="1" name=""/>
+        <p:cNvGrpSpPr/>
+        <p:nvPr/>
+      </p:nvGrpSpPr>
+      <p:grpSpPr>
+        <a:xfrm>
+          <a:off x="0" y="0"/>
+          <a:ext cx="0" cy="0"/>
+          <a:chOff x="0" y="0"/>
+          <a:chExt cx="0" cy="0"/>
+        </a:xfrm>
+      </p:grpSpPr>
+      <p:sp>
+        <p:nvSpPr>
+          <p:cNvPr id="2" name="Slide Image Placeholder 1"/>
+          <p:cNvSpPr>
+            <a:spLocks noGrp="1"/>
+          </p:cNvSpPr>
+          <p:nvPr>
+            <p:ph type="sldImg" idx="2"/>
+          </p:nvPr>
+        </p:nvSpPr>
+        <p:spPr/>
+      </p:sp>
+      <p:sp>
+        <p:nvSpPr>
+          <p:cNvPr id="3" name="Notes Placeholder 2"/>
+          <p:cNvSpPr>
+            <a:spLocks noGrp="1"/>
+          </p:cNvSpPr>
+          <p:nvPr>
+            <p:ph type="body" idx="3" sz="quarter"/>
+          </p:nvPr>
+        </p:nvSpPr>
+        <p:spPr/>
+        <p:txBody>
+          <a:bodyPr/>
+          <a:lstStyle/>
+          <a:p>
+            <a:r>
+              <a:t>Another week? Push abstention into a selective-prediction system on the calibrated confidence; ensemble both predictors; resist chasing accuracy past the ceiling. One thing to remember: accuracy and trustworthiness are different axes — fine-tuning's real value was honest confidence, and every claim is reproducible from the code. Closes the loop to slide 1.</a:t>
+            </a:r>
+          </a:p>
+        </p:txBody>
+      </p:sp>
+      <p:sp>
+        <p:nvSpPr>
+          <p:cNvPr id="4" name="Slide Number Placeholder 3"/>
+          <p:cNvSpPr>
+            <a:spLocks noGrp="1"/>
+          </p:cNvSpPr>
+          <p:nvPr>
+            <p:ph type="sldNum" idx="5" sz="quarter"/>
+          </p:nvPr>
+        </p:nvSpPr>
+        <p:spPr/>
+      </p:sp>
+    </p:spTree>
+  </p:cSld>
+  <p:clrMapOvr>
+    <a:masterClrMapping/>
+  </p:clrMapOvr>
+</p:notes>
+</file>
+
+<file path=ppt/notesSlides/notesSlide2.xml><?xml version="1.0" encoding="utf-8"?>
+<p:notes xmlns:a="http://schemas.openxmlformats.org/drawingml/2006/main" xmlns:p="http://schemas.openxmlformats.org/presentationml/2006/main" xmlns:r="http://schemas.openxmlformats.org/officeDocument/2006/relationships">
+  <p:cSld>
+    <p:spTree>
+      <p:nvGrpSpPr>
+        <p:cNvPr id="1" name=""/>
+        <p:cNvGrpSpPr/>
+        <p:nvPr/>
+      </p:nvGrpSpPr>
+      <p:grpSpPr>
+        <a:xfrm>
+          <a:off x="0" y="0"/>
+          <a:ext cx="0" cy="0"/>
+          <a:chOff x="0" y="0"/>
+          <a:chExt cx="0" cy="0"/>
+        </a:xfrm>
+      </p:grpSpPr>
+      <p:sp>
+        <p:nvSpPr>
+          <p:cNvPr id="2" name="Slide Image Placeholder 1"/>
+          <p:cNvSpPr>
+            <a:spLocks noGrp="1"/>
+          </p:cNvSpPr>
+          <p:nvPr>
+            <p:ph type="sldImg" idx="2"/>
+          </p:nvPr>
+        </p:nvSpPr>
+        <p:spPr/>
+      </p:sp>
+      <p:sp>
+        <p:nvSpPr>
+          <p:cNvPr id="3" name="Notes Placeholder 2"/>
+          <p:cNvSpPr>
+            <a:spLocks noGrp="1"/>
+          </p:cNvSpPr>
+          <p:nvPr>
+            <p:ph type="body" idx="3" sz="quarter"/>
+          </p:nvPr>
+        </p:nvSpPr>
+        <p:spPr/>
+        <p:txBody>
+          <a:bodyPr/>
+          <a:lstStyle/>
+          <a:p>
+            <a:r>
+              <a:t>Why not drop the middle / 2-vs-4? Dropping shrinks a small set; imbalance makes accuracy misleading; middle split is balanced and conventional. Half-true really True? Hardest call — placed True for balance, but sensitivity check shows robustness either way. Sensitivity check = re-run the whole eval with one debatable decision flipped.</a:t>
+            </a:r>
+          </a:p>
+        </p:txBody>
+      </p:sp>
+      <p:sp>
+        <p:nvSpPr>
+          <p:cNvPr id="4" name="Slide Number Placeholder 3"/>
+          <p:cNvSpPr>
+            <a:spLocks noGrp="1"/>
+          </p:cNvSpPr>
+          <p:nvPr>
+            <p:ph type="sldNum" idx="5" sz="quarter"/>
+          </p:nvPr>
+        </p:nvSpPr>
+        <p:spPr/>
+      </p:sp>
+    </p:spTree>
+  </p:cSld>
+  <p:clrMapOvr>
+    <a:masterClrMapping/>
+  </p:clrMapOvr>
+</p:notes>
+</file>
+
+<file path=ppt/notesSlides/notesSlide3.xml><?xml version="1.0" encoding="utf-8"?>
+<p:notes xmlns:a="http://schemas.openxmlformats.org/drawingml/2006/main" xmlns:p="http://schemas.openxmlformats.org/presentationml/2006/main" xmlns:r="http://schemas.openxmlformats.org/officeDocument/2006/relationships">
+  <p:cSld>
+    <p:spTree>
+      <p:nvGrpSpPr>
+        <p:cNvPr id="1" name=""/>
+        <p:cNvGrpSpPr/>
+        <p:nvPr/>
+      </p:nvGrpSpPr>
+      <p:grpSpPr>
+        <a:xfrm>
+          <a:off x="0" y="0"/>
+          <a:ext cx="0" cy="0"/>
+          <a:chOff x="0" y="0"/>
+          <a:chExt cx="0" cy="0"/>
+        </a:xfrm>
+      </p:grpSpPr>
+      <p:sp>
+        <p:nvSpPr>
+          <p:cNvPr id="2" name="Slide Image Placeholder 1"/>
+          <p:cNvSpPr>
+            <a:spLocks noGrp="1"/>
+          </p:cNvSpPr>
+          <p:nvPr>
+            <p:ph type="sldImg" idx="2"/>
+          </p:nvPr>
+        </p:nvSpPr>
+        <p:spPr/>
+      </p:sp>
+      <p:sp>
+        <p:nvSpPr>
+          <p:cNvPr id="3" name="Notes Placeholder 2"/>
+          <p:cNvSpPr>
+            <a:spLocks noGrp="1"/>
+          </p:cNvSpPr>
+          <p:nvPr>
+            <p:ph type="body" idx="3" sz="quarter"/>
+          </p:nvPr>
+        </p:nvSpPr>
+        <p:spPr/>
+        <p:txBody>
+          <a:bodyPr/>
+          <a:lstStyle/>
+          <a:p>
+            <a:r>
+              <a:t>Why speaker leakage matters: it's a shortcut; my explainer later quantifies it's real and hurts accuracy — which is why I split to prevent it. Union-find: merges linked items (shared speaker or near-dup text) into clusters assigned whole to one split; guarantees no link crosses train/test. Strongest methodology slide — most candidates random-split and miss this.</a:t>
+            </a:r>
+          </a:p>
+        </p:txBody>
+      </p:sp>
+      <p:sp>
+        <p:nvSpPr>
+          <p:cNvPr id="4" name="Slide Number Placeholder 3"/>
+          <p:cNvSpPr>
+            <a:spLocks noGrp="1"/>
+          </p:cNvSpPr>
+          <p:nvPr>
+            <p:ph type="sldNum" idx="5" sz="quarter"/>
+          </p:nvPr>
+        </p:nvSpPr>
+        <p:spPr/>
+      </p:sp>
+    </p:spTree>
+  </p:cSld>
+  <p:clrMapOvr>
+    <a:masterClrMapping/>
+  </p:clrMapOvr>
+</p:notes>
+</file>
+
+<file path=ppt/notesSlides/notesSlide4.xml><?xml version="1.0" encoding="utf-8"?>
+<p:notes xmlns:a="http://schemas.openxmlformats.org/drawingml/2006/main" xmlns:p="http://schemas.openxmlformats.org/presentationml/2006/main" xmlns:r="http://schemas.openxmlformats.org/officeDocument/2006/relationships">
+  <p:cSld>
+    <p:spTree>
+      <p:nvGrpSpPr>
+        <p:cNvPr id="1" name=""/>
+        <p:cNvGrpSpPr/>
+        <p:nvPr/>
+      </p:nvGrpSpPr>
+      <p:grpSpPr>
+        <a:xfrm>
+          <a:off x="0" y="0"/>
+          <a:ext cx="0" cy="0"/>
+          <a:chOff x="0" y="0"/>
+          <a:chExt cx="0" cy="0"/>
+        </a:xfrm>
+      </p:grpSpPr>
+      <p:sp>
+        <p:nvSpPr>
+          <p:cNvPr id="2" name="Slide Image Placeholder 1"/>
+          <p:cNvSpPr>
+            <a:spLocks noGrp="1"/>
+          </p:cNvSpPr>
+          <p:nvPr>
+            <p:ph type="sldImg" idx="2"/>
+          </p:nvPr>
+        </p:nvSpPr>
+        <p:spPr/>
+      </p:sp>
+      <p:sp>
+        <p:nvSpPr>
+          <p:cNvPr id="3" name="Notes Placeholder 2"/>
+          <p:cNvSpPr>
+            <a:spLocks noGrp="1"/>
+          </p:cNvSpPr>
+          <p:nvPr>
+            <p:ph type="body" idx="3" sz="quarter"/>
+          </p:nvPr>
+        </p:nvSpPr>
+        <p:spPr/>
+        <p:txBody>
+          <a:bodyPr/>
+          <a:lstStyle/>
+          <a:p>
+            <a:r>
+              <a:t>Why ECE/Brier? System acts on confidence; a model can be accurate yet overconfident. Why val-fit/test-report? Tuning on test = peeking = inflated; this keeps numbers out-of-sample. Definitions — balanced acc: average per-class accuracy. Macro-F1: per-class F1 averaged. Brier: mean squared error of probability vs outcome. ECE: groups by stated confidence, checks if "80% sure" is right 80% — lower = trustworthy. McNemar: paired test on the cases where two models disagree.</a:t>
+            </a:r>
+          </a:p>
+        </p:txBody>
+      </p:sp>
+      <p:sp>
+        <p:nvSpPr>
+          <p:cNvPr id="4" name="Slide Number Placeholder 3"/>
+          <p:cNvSpPr>
+            <a:spLocks noGrp="1"/>
+          </p:cNvSpPr>
+          <p:nvPr>
+            <p:ph type="sldNum" idx="5" sz="quarter"/>
+          </p:nvPr>
+        </p:nvSpPr>
+        <p:spPr/>
+      </p:sp>
+    </p:spTree>
+  </p:cSld>
+  <p:clrMapOvr>
+    <a:masterClrMapping/>
+  </p:clrMapOvr>
+</p:notes>
+</file>
+
+<file path=ppt/notesSlides/notesSlide5.xml><?xml version="1.0" encoding="utf-8"?>
+<p:notes xmlns:a="http://schemas.openxmlformats.org/drawingml/2006/main" xmlns:p="http://schemas.openxmlformats.org/presentationml/2006/main" xmlns:r="http://schemas.openxmlformats.org/officeDocument/2006/relationships">
+  <p:cSld>
+    <p:spTree>
+      <p:nvGrpSpPr>
+        <p:cNvPr id="1" name=""/>
+        <p:cNvGrpSpPr/>
+        <p:nvPr/>
+      </p:nvGrpSpPr>
+      <p:grpSpPr>
+        <a:xfrm>
+          <a:off x="0" y="0"/>
+          <a:ext cx="0" cy="0"/>
+          <a:chOff x="0" y="0"/>
+          <a:chExt cx="0" cy="0"/>
+        </a:xfrm>
+      </p:grpSpPr>
+      <p:sp>
+        <p:nvSpPr>
+          <p:cNvPr id="2" name="Slide Image Placeholder 1"/>
+          <p:cNvSpPr>
+            <a:spLocks noGrp="1"/>
+          </p:cNvSpPr>
+          <p:nvPr>
+            <p:ph type="sldImg" idx="2"/>
+          </p:nvPr>
+        </p:nvSpPr>
+        <p:spPr/>
+      </p:sp>
+      <p:sp>
+        <p:nvSpPr>
+          <p:cNvPr id="3" name="Notes Placeholder 2"/>
+          <p:cNvSpPr>
+            <a:spLocks noGrp="1"/>
+          </p:cNvSpPr>
+          <p:nvPr>
+            <p:ph type="body" idx="3" sz="quarter"/>
+          </p:nvPr>
+        </p:nvSpPr>
+        <p:spPr/>
+        <p:txBody>
+          <a:bodyPr/>
+          <a:lstStyle/>
+          <a:p>
+            <a:r>
+              <a:t>Why this model? Scale-tested candidates; a 9B Qwen and Gemma hit the literature range, OpenAI 20B/120B sat at chance; Gemma won the full-set comparison and is the one base that's both serverless and fine-tunable under one id — so no model-swap confound. Logprobs: the API exposes the probability the model assigned its chosen token; exp(logprob) = real confidence, not a performed number.</a:t>
+            </a:r>
+          </a:p>
+        </p:txBody>
+      </p:sp>
+      <p:sp>
+        <p:nvSpPr>
+          <p:cNvPr id="4" name="Slide Number Placeholder 3"/>
+          <p:cNvSpPr>
+            <a:spLocks noGrp="1"/>
+          </p:cNvSpPr>
+          <p:nvPr>
+            <p:ph type="sldNum" idx="5" sz="quarter"/>
+          </p:nvPr>
+        </p:nvSpPr>
+        <p:spPr/>
+      </p:sp>
+    </p:spTree>
+  </p:cSld>
+  <p:clrMapOvr>
+    <a:masterClrMapping/>
+  </p:clrMapOvr>
+</p:notes>
+</file>
+
+<file path=ppt/notesSlides/notesSlide6.xml><?xml version="1.0" encoding="utf-8"?>
+<p:notes xmlns:a="http://schemas.openxmlformats.org/drawingml/2006/main" xmlns:p="http://schemas.openxmlformats.org/presentationml/2006/main" xmlns:r="http://schemas.openxmlformats.org/officeDocument/2006/relationships">
+  <p:cSld>
+    <p:spTree>
+      <p:nvGrpSpPr>
+        <p:cNvPr id="1" name=""/>
+        <p:cNvGrpSpPr/>
+        <p:nvPr/>
+      </p:nvGrpSpPr>
+      <p:grpSpPr>
+        <a:xfrm>
+          <a:off x="0" y="0"/>
+          <a:ext cx="0" cy="0"/>
+          <a:chOff x="0" y="0"/>
+          <a:chExt cx="0" cy="0"/>
+        </a:xfrm>
+      </p:grpSpPr>
+      <p:sp>
+        <p:nvSpPr>
+          <p:cNvPr id="2" name="Slide Image Placeholder 1"/>
+          <p:cNvSpPr>
+            <a:spLocks noGrp="1"/>
+          </p:cNvSpPr>
+          <p:nvPr>
+            <p:ph type="sldImg" idx="2"/>
+          </p:nvPr>
+        </p:nvSpPr>
+        <p:spPr/>
+      </p:sp>
+      <p:sp>
+        <p:nvSpPr>
+          <p:cNvPr id="3" name="Notes Placeholder 2"/>
+          <p:cNvSpPr>
+            <a:spLocks noGrp="1"/>
+          </p:cNvSpPr>
+          <p:nvPr>
+            <p:ph type="body" idx="3" sz="quarter"/>
+          </p:nvPr>
+        </p:nvSpPr>
+        <p:spPr/>
+        <p:txBody>
+          <a:bodyPr/>
+          <a:lstStyle/>
+          <a:p>
+            <a:r>
+              <a:t>LoRA = trains small low-rank adapters on top of a frozen base; cheap, fast, enough to shift behaviour. Why label-token-only? Learn to produce the answer, not echo the prompt. Why an endpoint now? Base served serverless, but fine-tuned Gemma can't; endpoint only for eval, deleted in a guaranteed-teardown block. Low train loss = learned the signal; whether it transfers is what the disjoint test answers. Eval-loss 0.32 → 0.199 is from the fine-tuning job's training log (3 epochs).</a:t>
+            </a:r>
+          </a:p>
+        </p:txBody>
+      </p:sp>
+      <p:sp>
+        <p:nvSpPr>
+          <p:cNvPr id="4" name="Slide Number Placeholder 3"/>
+          <p:cNvSpPr>
+            <a:spLocks noGrp="1"/>
+          </p:cNvSpPr>
+          <p:nvPr>
+            <p:ph type="sldNum" idx="5" sz="quarter"/>
+          </p:nvPr>
+        </p:nvSpPr>
+        <p:spPr/>
+      </p:sp>
+    </p:spTree>
+  </p:cSld>
+  <p:clrMapOvr>
+    <a:masterClrMapping/>
+  </p:clrMapOvr>
+</p:notes>
+</file>
+
+<file path=ppt/notesSlides/notesSlide7.xml><?xml version="1.0" encoding="utf-8"?>
+<p:notes xmlns:a="http://schemas.openxmlformats.org/drawingml/2006/main" xmlns:p="http://schemas.openxmlformats.org/presentationml/2006/main" xmlns:r="http://schemas.openxmlformats.org/officeDocument/2006/relationships">
+  <p:cSld>
+    <p:spTree>
+      <p:nvGrpSpPr>
+        <p:cNvPr id="1" name=""/>
+        <p:cNvGrpSpPr/>
+        <p:nvPr/>
+      </p:nvGrpSpPr>
+      <p:grpSpPr>
+        <a:xfrm>
+          <a:off x="0" y="0"/>
+          <a:ext cx="0" cy="0"/>
+          <a:chOff x="0" y="0"/>
+          <a:chExt cx="0" cy="0"/>
+        </a:xfrm>
+      </p:grpSpPr>
+      <p:sp>
+        <p:nvSpPr>
+          <p:cNvPr id="2" name="Slide Image Placeholder 1"/>
+          <p:cNvSpPr>
+            <a:spLocks noGrp="1"/>
+          </p:cNvSpPr>
+          <p:nvPr>
+            <p:ph type="sldImg" idx="2"/>
+          </p:nvPr>
+        </p:nvSpPr>
+        <p:spPr/>
+      </p:sp>
+      <p:sp>
+        <p:nvSpPr>
+          <p:cNvPr id="3" name="Notes Placeholder 2"/>
+          <p:cNvSpPr>
+            <a:spLocks noGrp="1"/>
+          </p:cNvSpPr>
+          <p:nvPr>
+            <p:ph type="body" idx="3" sz="quarter"/>
+          </p:nvPr>
+        </p:nvSpPr>
+        <p:spPr/>
+        <p:txBody>
+          <a:bodyPr/>
+          <a:lstStyle/>
+          <a:p>
+            <a:r>
+              <a:t>Only 3.1 points? On a ~65% ceiling, a significant gain over a matched baseline is meaningful — accuracy is capped on this task. Note what did NOT move: the ECE difference vs the matched baseline is +0.0097 [-0.0057, +0.0270], which straddles zero, so fine-tuning buys accuracy and not calibration. Why show score-mode? It's the contrast that proves accuracy ≠ calibration. Frame: train fine-tunes; val fits calibrator+threshold for both; test scored once identically — only fine-tuning differs.</a:t>
             </a:r>
           </a:p>
           <a:p/>
           <a:p>
             <a:r>
-              <a:t>Secondary cross-model point: even after both are calibrated, the fine-tuned model is better calibrated than the zero-shot baseline (ECE 0.027 vs 0.053).</a:t>
+              <a:t>Variance caveat: results vary slightly run-to-run due to non-deterministic inference even at temperature 0; the fine-tuning effect is +0.031 [+0.019, +0.043], McNemar p=6.3e-07. A live refetch of the same prompts reproduced every metric to within 0.003.</a:t>
+            </a:r>
+          </a:p>
+        </p:txBody>
+      </p:sp>
+      <p:sp>
+        <p:nvSpPr>
+          <p:cNvPr id="4" name="Slide Number Placeholder 3"/>
+          <p:cNvSpPr>
+            <a:spLocks noGrp="1"/>
+          </p:cNvSpPr>
+          <p:nvPr>
+            <p:ph type="sldNum" idx="5" sz="quarter"/>
+          </p:nvPr>
+        </p:nvSpPr>
+        <p:spPr/>
+      </p:sp>
+    </p:spTree>
+  </p:cSld>
+  <p:clrMapOvr>
+    <a:masterClrMapping/>
+  </p:clrMapOvr>
+</p:notes>
+</file>
+
+<file path=ppt/notesSlides/notesSlide8.xml><?xml version="1.0" encoding="utf-8"?>
+<p:notes xmlns:a="http://schemas.openxmlformats.org/drawingml/2006/main" xmlns:p="http://schemas.openxmlformats.org/presentationml/2006/main" xmlns:r="http://schemas.openxmlformats.org/officeDocument/2006/relationships">
+  <p:cSld>
+    <p:spTree>
+      <p:nvGrpSpPr>
+        <p:cNvPr id="1" name=""/>
+        <p:cNvGrpSpPr/>
+        <p:nvPr/>
+      </p:nvGrpSpPr>
+      <p:grpSpPr>
+        <a:xfrm>
+          <a:off x="0" y="0"/>
+          <a:ext cx="0" cy="0"/>
+          <a:chOff x="0" y="0"/>
+          <a:chExt cx="0" cy="0"/>
+        </a:xfrm>
+      </p:grpSpPr>
+      <p:sp>
+        <p:nvSpPr>
+          <p:cNvPr id="2" name="Slide Image Placeholder 1"/>
+          <p:cNvSpPr>
+            <a:spLocks noGrp="1"/>
+          </p:cNvSpPr>
+          <p:nvPr>
+            <p:ph type="sldImg" idx="2"/>
+          </p:nvPr>
+        </p:nvSpPr>
+        <p:spPr/>
+      </p:sp>
+      <p:sp>
+        <p:nvSpPr>
+          <p:cNvPr id="3" name="Notes Placeholder 2"/>
+          <p:cNvSpPr>
+            <a:spLocks noGrp="1"/>
+          </p:cNvSpPr>
+          <p:nvPr>
+            <p:ph type="body" idx="3" sz="quarter"/>
+          </p:nvPr>
+        </p:nvSpPr>
+        <p:spPr/>
+        <p:txBody>
+          <a:bodyPr/>
+          <a:lstStyle/>
+          <a:p>
+            <a:r>
+              <a:t>Temperature/Platt = simple post-hoc corrections fit on held-out data remapping raw probabilities so stated confidence matches real frequency; I fit several on validation and selected the best. Why not isotonic? Needs more data, overfits ~1,900 rows — future work. Say cold: calibration doesn't change the answer or accuracy — it makes the confidence number honest. The diagram shows both calibrated models on test; the fine-tuned curve sits closest to the diagonal (lowest ECE).</a:t>
+            </a:r>
+          </a:p>
+        </p:txBody>
+      </p:sp>
+      <p:sp>
+        <p:nvSpPr>
+          <p:cNvPr id="4" name="Slide Number Placeholder 3"/>
+          <p:cNvSpPr>
+            <a:spLocks noGrp="1"/>
+          </p:cNvSpPr>
+          <p:nvPr>
+            <p:ph type="sldNum" idx="5" sz="quarter"/>
+          </p:nvPr>
+        </p:nvSpPr>
+        <p:spPr/>
+      </p:sp>
+    </p:spTree>
+  </p:cSld>
+  <p:clrMapOvr>
+    <a:masterClrMapping/>
+  </p:clrMapOvr>
+</p:notes>
+</file>
+
+<file path=ppt/notesSlides/notesSlide9.xml><?xml version="1.0" encoding="utf-8"?>
+<p:notes xmlns:a="http://schemas.openxmlformats.org/drawingml/2006/main" xmlns:p="http://schemas.openxmlformats.org/presentationml/2006/main" xmlns:r="http://schemas.openxmlformats.org/officeDocument/2006/relationships">
+  <p:cSld>
+    <p:spTree>
+      <p:nvGrpSpPr>
+        <p:cNvPr id="1" name=""/>
+        <p:cNvGrpSpPr/>
+        <p:nvPr/>
+      </p:nvGrpSpPr>
+      <p:grpSpPr>
+        <a:xfrm>
+          <a:off x="0" y="0"/>
+          <a:ext cx="0" cy="0"/>
+          <a:chOff x="0" y="0"/>
+          <a:chExt cx="0" cy="0"/>
+        </a:xfrm>
+      </p:grpSpPr>
+      <p:sp>
+        <p:nvSpPr>
+          <p:cNvPr id="2" name="Slide Image Placeholder 1"/>
+          <p:cNvSpPr>
+            <a:spLocks noGrp="1"/>
+          </p:cNvSpPr>
+          <p:nvPr>
+            <p:ph type="sldImg" idx="2"/>
+          </p:nvPr>
+        </p:nvSpPr>
+        <p:spPr/>
+      </p:sp>
+      <p:sp>
+        <p:nvSpPr>
+          <p:cNvPr id="3" name="Notes Placeholder 2"/>
+          <p:cNvSpPr>
+            <a:spLocks noGrp="1"/>
+          </p:cNvSpPr>
+          <p:nvPr>
+            <p:ph type="body" idx="3" sz="quarter"/>
+          </p:nvPr>
+        </p:nvSpPr>
+        <p:spPr/>
+        <p:txBody>
+          <a:bodyPr/>
+          <a:lstStyle/>
+          <a:p>
+            <a:r>
+              <a:t>Why two methods? Occlusion is causal — change input, watch real output; rationale is readable but unverified, so I lead with occlusion and treat rationales as hypotheses. On agreement: 0.457 looks like a moderate faithfulness rate, but the permutation null is 0.436 (p=0.19) — the categories overlap and a rationale cites 1.6 of 5 on average, so the chance floor is high. The honest reading is that rationales carry no DETECTABLE signal about the true driver, which is evidence of absent signal rather than a measured faithfulness rate. Shortcut helps or hurts? Speaker-driven predictions land at their subset's majority-class rate (0.564 vs 0.564) — no signal beyond the class prior — while statement-driven sit +0.215 above theirs. Causal confirmation of slide 3's leakage risk. n=78 for the speaker subset, so the interval is wide; this rules in 'no better than the prior' without ruling out a small effect.</a:t>
             </a:r>
           </a:p>
         </p:txBody>
@@ -584,23 +1201,19 @@
         </p:nvSpPr>
         <p:spPr>
           <a:xfrm>
-            <a:off x="1524000" y="1122363"/>
-            <a:ext cx="9144000" cy="2387600"/>
+            <a:off x="685800" y="2130425"/>
+            <a:ext cx="7772400" cy="1470025"/>
           </a:xfrm>
         </p:spPr>
         <p:txBody>
-          <a:bodyPr anchor="b"/>
-          <a:lstStyle>
-            <a:lvl1pPr algn="ctr">
-              <a:defRPr sz="6000"/>
-            </a:lvl1pPr>
-          </a:lstStyle>
-          <a:p>
-            <a:r>
-              <a:rPr lang="en-US"/>
+          <a:bodyPr/>
+          <a:lstStyle/>
+          <a:p>
+            <a:r>
+              <a:rPr lang="en-US" smtClean="0"/>
               <a:t>Click to edit Master title style</a:t>
             </a:r>
-            <a:endParaRPr lang="en-US" dirty="0"/>
+            <a:endParaRPr lang="en-US"/>
           </a:p>
         </p:txBody>
       </p:sp>
@@ -616,8 +1229,8 @@
         </p:nvSpPr>
         <p:spPr>
           <a:xfrm>
-            <a:off x="1524000" y="3602038"/>
-            <a:ext cx="9144000" cy="1655762"/>
+            <a:off x="1371600" y="3886200"/>
+            <a:ext cx="6400800" cy="1752600"/>
           </a:xfrm>
         </p:spPr>
         <p:txBody>
@@ -625,47 +1238,101 @@
           <a:lstStyle>
             <a:lvl1pPr marL="0" indent="0" algn="ctr">
               <a:buNone/>
-              <a:defRPr sz="2400"/>
+              <a:defRPr>
+                <a:solidFill>
+                  <a:schemeClr val="tx1">
+                    <a:tint val="75000"/>
+                  </a:schemeClr>
+                </a:solidFill>
+              </a:defRPr>
             </a:lvl1pPr>
             <a:lvl2pPr marL="457200" indent="0" algn="ctr">
               <a:buNone/>
-              <a:defRPr sz="2000"/>
+              <a:defRPr>
+                <a:solidFill>
+                  <a:schemeClr val="tx1">
+                    <a:tint val="75000"/>
+                  </a:schemeClr>
+                </a:solidFill>
+              </a:defRPr>
             </a:lvl2pPr>
             <a:lvl3pPr marL="914400" indent="0" algn="ctr">
               <a:buNone/>
-              <a:defRPr sz="1800"/>
+              <a:defRPr>
+                <a:solidFill>
+                  <a:schemeClr val="tx1">
+                    <a:tint val="75000"/>
+                  </a:schemeClr>
+                </a:solidFill>
+              </a:defRPr>
             </a:lvl3pPr>
             <a:lvl4pPr marL="1371600" indent="0" algn="ctr">
               <a:buNone/>
-              <a:defRPr sz="1600"/>
+              <a:defRPr>
+                <a:solidFill>
+                  <a:schemeClr val="tx1">
+                    <a:tint val="75000"/>
+                  </a:schemeClr>
+                </a:solidFill>
+              </a:defRPr>
             </a:lvl4pPr>
             <a:lvl5pPr marL="1828800" indent="0" algn="ctr">
               <a:buNone/>
-              <a:defRPr sz="1600"/>
+              <a:defRPr>
+                <a:solidFill>
+                  <a:schemeClr val="tx1">
+                    <a:tint val="75000"/>
+                  </a:schemeClr>
+                </a:solidFill>
+              </a:defRPr>
             </a:lvl5pPr>
             <a:lvl6pPr marL="2286000" indent="0" algn="ctr">
               <a:buNone/>
-              <a:defRPr sz="1600"/>
+              <a:defRPr>
+                <a:solidFill>
+                  <a:schemeClr val="tx1">
+                    <a:tint val="75000"/>
+                  </a:schemeClr>
+                </a:solidFill>
+              </a:defRPr>
             </a:lvl6pPr>
             <a:lvl7pPr marL="2743200" indent="0" algn="ctr">
               <a:buNone/>
-              <a:defRPr sz="1600"/>
+              <a:defRPr>
+                <a:solidFill>
+                  <a:schemeClr val="tx1">
+                    <a:tint val="75000"/>
+                  </a:schemeClr>
+                </a:solidFill>
+              </a:defRPr>
             </a:lvl7pPr>
             <a:lvl8pPr marL="3200400" indent="0" algn="ctr">
               <a:buNone/>
-              <a:defRPr sz="1600"/>
+              <a:defRPr>
+                <a:solidFill>
+                  <a:schemeClr val="tx1">
+                    <a:tint val="75000"/>
+                  </a:schemeClr>
+                </a:solidFill>
+              </a:defRPr>
             </a:lvl8pPr>
             <a:lvl9pPr marL="3657600" indent="0" algn="ctr">
               <a:buNone/>
-              <a:defRPr sz="1600"/>
+              <a:defRPr>
+                <a:solidFill>
+                  <a:schemeClr val="tx1">
+                    <a:tint val="75000"/>
+                  </a:schemeClr>
+                </a:solidFill>
+              </a:defRPr>
             </a:lvl9pPr>
           </a:lstStyle>
           <a:p>
             <a:r>
-              <a:rPr lang="en-US"/>
+              <a:rPr lang="en-US" smtClean="0"/>
               <a:t>Click to edit Master subtitle style</a:t>
             </a:r>
-            <a:endParaRPr lang="en-US" dirty="0"/>
+            <a:endParaRPr lang="en-US"/>
           </a:p>
         </p:txBody>
       </p:sp>
@@ -684,9 +1351,9 @@
           <a:bodyPr/>
           <a:lstStyle/>
           <a:p>
-            <a:fld id="{846CE7D5-CF57-46EF-B807-FDD0502418D4}" type="datetimeFigureOut">
-              <a:rPr lang="en-US" smtClean="0"/>
-              <a:t>6/25/2026</a:t>
+            <a:fld id="{5BCAD085-E8A6-8845-BD4E-CB4CCA059FC4}" type="datetimeFigureOut">
+              <a:rPr lang="en-US" smtClean="0"/>
+              <a:t>1/27/13</a:t>
             </a:fld>
             <a:endParaRPr lang="en-US"/>
           </a:p>
@@ -726,7 +1393,7 @@
           <a:bodyPr/>
           <a:lstStyle/>
           <a:p>
-            <a:fld id="{330EA680-D336-4FF7-8B7A-9848BB0A1C32}" type="slidenum">
+            <a:fld id="{C1FF6DA9-008F-8B48-92A6-B652298478BF}" type="slidenum">
               <a:rPr lang="en-US" smtClean="0"/>
               <a:t>‹#›</a:t>
             </a:fld>
@@ -737,7 +1404,7 @@
     </p:spTree>
     <p:extLst>
       <p:ext uri="{BB962C8B-B14F-4D97-AF65-F5344CB8AC3E}">
-        <p14:creationId xmlns:p14="http://schemas.microsoft.com/office/powerpoint/2010/main" val="2385387890"/>
+        <p14:creationId xmlns:p14="http://schemas.microsoft.com/office/powerpoint/2010/main" val="3168075583"/>
       </p:ext>
     </p:extLst>
   </p:cSld>
@@ -780,10 +1447,10 @@
           <a:lstStyle/>
           <a:p>
             <a:r>
-              <a:rPr lang="en-US"/>
+              <a:rPr lang="en-US" smtClean="0"/>
               <a:t>Click to edit Master title style</a:t>
             </a:r>
-            <a:endParaRPr lang="en-US" dirty="0"/>
+            <a:endParaRPr lang="en-US"/>
           </a:p>
         </p:txBody>
       </p:sp>
@@ -804,38 +1471,38 @@
           <a:p>
             <a:pPr lvl="0"/>
             <a:r>
-              <a:rPr lang="en-US"/>
+              <a:rPr lang="en-US" smtClean="0"/>
               <a:t>Click to edit Master text styles</a:t>
             </a:r>
           </a:p>
           <a:p>
             <a:pPr lvl="1"/>
             <a:r>
-              <a:rPr lang="en-US"/>
+              <a:rPr lang="en-US" smtClean="0"/>
               <a:t>Second level</a:t>
             </a:r>
           </a:p>
           <a:p>
             <a:pPr lvl="2"/>
             <a:r>
-              <a:rPr lang="en-US"/>
+              <a:rPr lang="en-US" smtClean="0"/>
               <a:t>Third level</a:t>
             </a:r>
           </a:p>
           <a:p>
             <a:pPr lvl="3"/>
             <a:r>
-              <a:rPr lang="en-US"/>
+              <a:rPr lang="en-US" smtClean="0"/>
               <a:t>Fourth level</a:t>
             </a:r>
           </a:p>
           <a:p>
             <a:pPr lvl="4"/>
             <a:r>
-              <a:rPr lang="en-US"/>
+              <a:rPr lang="en-US" smtClean="0"/>
               <a:t>Fifth level</a:t>
             </a:r>
-            <a:endParaRPr lang="en-US" dirty="0"/>
+            <a:endParaRPr lang="en-US"/>
           </a:p>
         </p:txBody>
       </p:sp>
@@ -854,9 +1521,9 @@
           <a:bodyPr/>
           <a:lstStyle/>
           <a:p>
-            <a:fld id="{846CE7D5-CF57-46EF-B807-FDD0502418D4}" type="datetimeFigureOut">
-              <a:rPr lang="en-US" smtClean="0"/>
-              <a:t>6/25/2026</a:t>
+            <a:fld id="{5BCAD085-E8A6-8845-BD4E-CB4CCA059FC4}" type="datetimeFigureOut">
+              <a:rPr lang="en-US" smtClean="0"/>
+              <a:t>1/27/13</a:t>
             </a:fld>
             <a:endParaRPr lang="en-US"/>
           </a:p>
@@ -896,7 +1563,7 @@
           <a:bodyPr/>
           <a:lstStyle/>
           <a:p>
-            <a:fld id="{330EA680-D336-4FF7-8B7A-9848BB0A1C32}" type="slidenum">
+            <a:fld id="{C1FF6DA9-008F-8B48-92A6-B652298478BF}" type="slidenum">
               <a:rPr lang="en-US" smtClean="0"/>
               <a:t>‹#›</a:t>
             </a:fld>
@@ -907,7 +1574,7 @@
     </p:spTree>
     <p:extLst>
       <p:ext uri="{BB962C8B-B14F-4D97-AF65-F5344CB8AC3E}">
-        <p14:creationId xmlns:p14="http://schemas.microsoft.com/office/powerpoint/2010/main" val="2202905451"/>
+        <p14:creationId xmlns:p14="http://schemas.microsoft.com/office/powerpoint/2010/main" val="2910927964"/>
       </p:ext>
     </p:extLst>
   </p:cSld>
@@ -946,8 +1613,8 @@
         </p:nvSpPr>
         <p:spPr>
           <a:xfrm>
-            <a:off x="8724900" y="365125"/>
-            <a:ext cx="2628900" cy="5811838"/>
+            <a:off x="6629400" y="274638"/>
+            <a:ext cx="2057400" cy="5851525"/>
           </a:xfrm>
         </p:spPr>
         <p:txBody>
@@ -955,10 +1622,10 @@
           <a:lstStyle/>
           <a:p>
             <a:r>
-              <a:rPr lang="en-US"/>
+              <a:rPr lang="en-US" smtClean="0"/>
               <a:t>Click to edit Master title style</a:t>
             </a:r>
-            <a:endParaRPr lang="en-US" dirty="0"/>
+            <a:endParaRPr lang="en-US"/>
           </a:p>
         </p:txBody>
       </p:sp>
@@ -974,8 +1641,8 @@
         </p:nvSpPr>
         <p:spPr>
           <a:xfrm>
-            <a:off x="838200" y="365125"/>
-            <a:ext cx="7734300" cy="5811838"/>
+            <a:off x="457200" y="274638"/>
+            <a:ext cx="6019800" cy="5851525"/>
           </a:xfrm>
         </p:spPr>
         <p:txBody>
@@ -984,38 +1651,38 @@
           <a:p>
             <a:pPr lvl="0"/>
             <a:r>
-              <a:rPr lang="en-US"/>
+              <a:rPr lang="en-US" smtClean="0"/>
               <a:t>Click to edit Master text styles</a:t>
             </a:r>
           </a:p>
           <a:p>
             <a:pPr lvl="1"/>
             <a:r>
-              <a:rPr lang="en-US"/>
+              <a:rPr lang="en-US" smtClean="0"/>
               <a:t>Second level</a:t>
             </a:r>
           </a:p>
           <a:p>
             <a:pPr lvl="2"/>
             <a:r>
-              <a:rPr lang="en-US"/>
+              <a:rPr lang="en-US" smtClean="0"/>
               <a:t>Third level</a:t>
             </a:r>
           </a:p>
           <a:p>
             <a:pPr lvl="3"/>
             <a:r>
-              <a:rPr lang="en-US"/>
+              <a:rPr lang="en-US" smtClean="0"/>
               <a:t>Fourth level</a:t>
             </a:r>
           </a:p>
           <a:p>
             <a:pPr lvl="4"/>
             <a:r>
-              <a:rPr lang="en-US"/>
+              <a:rPr lang="en-US" smtClean="0"/>
               <a:t>Fifth level</a:t>
             </a:r>
-            <a:endParaRPr lang="en-US" dirty="0"/>
+            <a:endParaRPr lang="en-US"/>
           </a:p>
         </p:txBody>
       </p:sp>
@@ -1034,9 +1701,9 @@
           <a:bodyPr/>
           <a:lstStyle/>
           <a:p>
-            <a:fld id="{846CE7D5-CF57-46EF-B807-FDD0502418D4}" type="datetimeFigureOut">
-              <a:rPr lang="en-US" smtClean="0"/>
-              <a:t>6/25/2026</a:t>
+            <a:fld id="{5BCAD085-E8A6-8845-BD4E-CB4CCA059FC4}" type="datetimeFigureOut">
+              <a:rPr lang="en-US" smtClean="0"/>
+              <a:t>1/27/13</a:t>
             </a:fld>
             <a:endParaRPr lang="en-US"/>
           </a:p>
@@ -1076,7 +1743,7 @@
           <a:bodyPr/>
           <a:lstStyle/>
           <a:p>
-            <a:fld id="{330EA680-D336-4FF7-8B7A-9848BB0A1C32}" type="slidenum">
+            <a:fld id="{C1FF6DA9-008F-8B48-92A6-B652298478BF}" type="slidenum">
               <a:rPr lang="en-US" smtClean="0"/>
               <a:t>‹#›</a:t>
             </a:fld>
@@ -1087,7 +1754,7 @@
     </p:spTree>
     <p:extLst>
       <p:ext uri="{BB962C8B-B14F-4D97-AF65-F5344CB8AC3E}">
-        <p14:creationId xmlns:p14="http://schemas.microsoft.com/office/powerpoint/2010/main" val="3479445657"/>
+        <p14:creationId xmlns:p14="http://schemas.microsoft.com/office/powerpoint/2010/main" val="3612223792"/>
       </p:ext>
     </p:extLst>
   </p:cSld>
@@ -1130,10 +1797,10 @@
           <a:lstStyle/>
           <a:p>
             <a:r>
-              <a:rPr lang="en-US"/>
+              <a:rPr lang="en-US" smtClean="0"/>
               <a:t>Click to edit Master title style</a:t>
             </a:r>
-            <a:endParaRPr lang="en-US" dirty="0"/>
+            <a:endParaRPr lang="en-US"/>
           </a:p>
         </p:txBody>
       </p:sp>
@@ -1154,38 +1821,38 @@
           <a:p>
             <a:pPr lvl="0"/>
             <a:r>
-              <a:rPr lang="en-US"/>
+              <a:rPr lang="en-US" smtClean="0"/>
               <a:t>Click to edit Master text styles</a:t>
             </a:r>
           </a:p>
           <a:p>
             <a:pPr lvl="1"/>
             <a:r>
-              <a:rPr lang="en-US"/>
+              <a:rPr lang="en-US" smtClean="0"/>
               <a:t>Second level</a:t>
             </a:r>
           </a:p>
           <a:p>
             <a:pPr lvl="2"/>
             <a:r>
-              <a:rPr lang="en-US"/>
+              <a:rPr lang="en-US" smtClean="0"/>
               <a:t>Third level</a:t>
             </a:r>
           </a:p>
           <a:p>
             <a:pPr lvl="3"/>
             <a:r>
-              <a:rPr lang="en-US"/>
+              <a:rPr lang="en-US" smtClean="0"/>
               <a:t>Fourth level</a:t>
             </a:r>
           </a:p>
           <a:p>
             <a:pPr lvl="4"/>
             <a:r>
-              <a:rPr lang="en-US"/>
+              <a:rPr lang="en-US" smtClean="0"/>
               <a:t>Fifth level</a:t>
             </a:r>
-            <a:endParaRPr lang="en-US" dirty="0"/>
+            <a:endParaRPr lang="en-US"/>
           </a:p>
         </p:txBody>
       </p:sp>
@@ -1204,9 +1871,9 @@
           <a:bodyPr/>
           <a:lstStyle/>
           <a:p>
-            <a:fld id="{846CE7D5-CF57-46EF-B807-FDD0502418D4}" type="datetimeFigureOut">
-              <a:rPr lang="en-US" smtClean="0"/>
-              <a:t>6/25/2026</a:t>
+            <a:fld id="{5BCAD085-E8A6-8845-BD4E-CB4CCA059FC4}" type="datetimeFigureOut">
+              <a:rPr lang="en-US" smtClean="0"/>
+              <a:t>1/27/13</a:t>
             </a:fld>
             <a:endParaRPr lang="en-US"/>
           </a:p>
@@ -1246,7 +1913,7 @@
           <a:bodyPr/>
           <a:lstStyle/>
           <a:p>
-            <a:fld id="{330EA680-D336-4FF7-8B7A-9848BB0A1C32}" type="slidenum">
+            <a:fld id="{C1FF6DA9-008F-8B48-92A6-B652298478BF}" type="slidenum">
               <a:rPr lang="en-US" smtClean="0"/>
               <a:t>‹#›</a:t>
             </a:fld>
@@ -1257,7 +1924,7 @@
     </p:spTree>
     <p:extLst>
       <p:ext uri="{BB962C8B-B14F-4D97-AF65-F5344CB8AC3E}">
-        <p14:creationId xmlns:p14="http://schemas.microsoft.com/office/powerpoint/2010/main" val="949138452"/>
+        <p14:creationId xmlns:p14="http://schemas.microsoft.com/office/powerpoint/2010/main" val="2614314258"/>
       </p:ext>
     </p:extLst>
   </p:cSld>
@@ -1296,23 +1963,23 @@
         </p:nvSpPr>
         <p:spPr>
           <a:xfrm>
-            <a:off x="831850" y="1709738"/>
-            <a:ext cx="10515600" cy="2852737"/>
+            <a:off x="722313" y="4406900"/>
+            <a:ext cx="7772400" cy="1362075"/>
           </a:xfrm>
         </p:spPr>
         <p:txBody>
-          <a:bodyPr anchor="b"/>
+          <a:bodyPr anchor="t"/>
           <a:lstStyle>
-            <a:lvl1pPr>
-              <a:defRPr sz="6000"/>
+            <a:lvl1pPr algn="l">
+              <a:defRPr sz="4000" b="1" cap="all"/>
             </a:lvl1pPr>
           </a:lstStyle>
           <a:p>
             <a:r>
-              <a:rPr lang="en-US"/>
+              <a:rPr lang="en-US" smtClean="0"/>
               <a:t>Click to edit Master title style</a:t>
             </a:r>
-            <a:endParaRPr lang="en-US" dirty="0"/>
+            <a:endParaRPr lang="en-US"/>
           </a:p>
         </p:txBody>
       </p:sp>
@@ -1328,99 +1995,99 @@
         </p:nvSpPr>
         <p:spPr>
           <a:xfrm>
-            <a:off x="831850" y="4589463"/>
-            <a:ext cx="10515600" cy="1500187"/>
+            <a:off x="722313" y="2906713"/>
+            <a:ext cx="7772400" cy="1500187"/>
           </a:xfrm>
         </p:spPr>
         <p:txBody>
-          <a:bodyPr/>
+          <a:bodyPr anchor="b"/>
           <a:lstStyle>
             <a:lvl1pPr marL="0" indent="0">
               <a:buNone/>
-              <a:defRPr sz="2400">
+              <a:defRPr sz="2000">
                 <a:solidFill>
                   <a:schemeClr val="tx1">
-                    <a:tint val="82000"/>
+                    <a:tint val="75000"/>
                   </a:schemeClr>
                 </a:solidFill>
               </a:defRPr>
             </a:lvl1pPr>
             <a:lvl2pPr marL="457200" indent="0">
               <a:buNone/>
-              <a:defRPr sz="2000">
+              <a:defRPr sz="1800">
                 <a:solidFill>
                   <a:schemeClr val="tx1">
-                    <a:tint val="82000"/>
+                    <a:tint val="75000"/>
                   </a:schemeClr>
                 </a:solidFill>
               </a:defRPr>
             </a:lvl2pPr>
             <a:lvl3pPr marL="914400" indent="0">
               <a:buNone/>
-              <a:defRPr sz="1800">
+              <a:defRPr sz="1600">
                 <a:solidFill>
                   <a:schemeClr val="tx1">
-                    <a:tint val="82000"/>
+                    <a:tint val="75000"/>
                   </a:schemeClr>
                 </a:solidFill>
               </a:defRPr>
             </a:lvl3pPr>
             <a:lvl4pPr marL="1371600" indent="0">
               <a:buNone/>
-              <a:defRPr sz="1600">
+              <a:defRPr sz="1400">
                 <a:solidFill>
                   <a:schemeClr val="tx1">
-                    <a:tint val="82000"/>
+                    <a:tint val="75000"/>
                   </a:schemeClr>
                 </a:solidFill>
               </a:defRPr>
             </a:lvl4pPr>
             <a:lvl5pPr marL="1828800" indent="0">
               <a:buNone/>
-              <a:defRPr sz="1600">
+              <a:defRPr sz="1400">
                 <a:solidFill>
                   <a:schemeClr val="tx1">
-                    <a:tint val="82000"/>
+                    <a:tint val="75000"/>
                   </a:schemeClr>
                 </a:solidFill>
               </a:defRPr>
             </a:lvl5pPr>
             <a:lvl6pPr marL="2286000" indent="0">
               <a:buNone/>
-              <a:defRPr sz="1600">
+              <a:defRPr sz="1400">
                 <a:solidFill>
                   <a:schemeClr val="tx1">
-                    <a:tint val="82000"/>
+                    <a:tint val="75000"/>
                   </a:schemeClr>
                 </a:solidFill>
               </a:defRPr>
             </a:lvl6pPr>
             <a:lvl7pPr marL="2743200" indent="0">
               <a:buNone/>
-              <a:defRPr sz="1600">
+              <a:defRPr sz="1400">
                 <a:solidFill>
                   <a:schemeClr val="tx1">
-                    <a:tint val="82000"/>
+                    <a:tint val="75000"/>
                   </a:schemeClr>
                 </a:solidFill>
               </a:defRPr>
             </a:lvl7pPr>
             <a:lvl8pPr marL="3200400" indent="0">
               <a:buNone/>
-              <a:defRPr sz="1600">
+              <a:defRPr sz="1400">
                 <a:solidFill>
                   <a:schemeClr val="tx1">
-                    <a:tint val="82000"/>
+                    <a:tint val="75000"/>
                   </a:schemeClr>
                 </a:solidFill>
               </a:defRPr>
             </a:lvl8pPr>
             <a:lvl9pPr marL="3657600" indent="0">
               <a:buNone/>
-              <a:defRPr sz="1600">
+              <a:defRPr sz="1400">
                 <a:solidFill>
                   <a:schemeClr val="tx1">
-                    <a:tint val="82000"/>
+                    <a:tint val="75000"/>
                   </a:schemeClr>
                 </a:solidFill>
               </a:defRPr>
@@ -1429,7 +2096,7 @@
           <a:p>
             <a:pPr lvl="0"/>
             <a:r>
-              <a:rPr lang="en-US"/>
+              <a:rPr lang="en-US" smtClean="0"/>
               <a:t>Click to edit Master text styles</a:t>
             </a:r>
           </a:p>
@@ -1450,9 +2117,9 @@
           <a:bodyPr/>
           <a:lstStyle/>
           <a:p>
-            <a:fld id="{846CE7D5-CF57-46EF-B807-FDD0502418D4}" type="datetimeFigureOut">
-              <a:rPr lang="en-US" smtClean="0"/>
-              <a:t>6/25/2026</a:t>
+            <a:fld id="{5BCAD085-E8A6-8845-BD4E-CB4CCA059FC4}" type="datetimeFigureOut">
+              <a:rPr lang="en-US" smtClean="0"/>
+              <a:t>1/27/13</a:t>
             </a:fld>
             <a:endParaRPr lang="en-US"/>
           </a:p>
@@ -1492,7 +2159,7 @@
           <a:bodyPr/>
           <a:lstStyle/>
           <a:p>
-            <a:fld id="{330EA680-D336-4FF7-8B7A-9848BB0A1C32}" type="slidenum">
+            <a:fld id="{C1FF6DA9-008F-8B48-92A6-B652298478BF}" type="slidenum">
               <a:rPr lang="en-US" smtClean="0"/>
               <a:t>‹#›</a:t>
             </a:fld>
@@ -1503,7 +2170,7 @@
     </p:spTree>
     <p:extLst>
       <p:ext uri="{BB962C8B-B14F-4D97-AF65-F5344CB8AC3E}">
-        <p14:creationId xmlns:p14="http://schemas.microsoft.com/office/powerpoint/2010/main" val="2591524520"/>
+        <p14:creationId xmlns:p14="http://schemas.microsoft.com/office/powerpoint/2010/main" val="960648375"/>
       </p:ext>
     </p:extLst>
   </p:cSld>
@@ -1546,10 +2213,10 @@
           <a:lstStyle/>
           <a:p>
             <a:r>
-              <a:rPr lang="en-US"/>
+              <a:rPr lang="en-US" smtClean="0"/>
               <a:t>Click to edit Master title style</a:t>
             </a:r>
-            <a:endParaRPr lang="en-US" dirty="0"/>
+            <a:endParaRPr lang="en-US"/>
           </a:p>
         </p:txBody>
       </p:sp>
@@ -1565,48 +2232,76 @@
         </p:nvSpPr>
         <p:spPr>
           <a:xfrm>
-            <a:off x="838200" y="1825625"/>
-            <a:ext cx="5181600" cy="4351338"/>
+            <a:off x="457200" y="1600200"/>
+            <a:ext cx="4038600" cy="4525963"/>
           </a:xfrm>
         </p:spPr>
         <p:txBody>
           <a:bodyPr/>
-          <a:lstStyle/>
+          <a:lstStyle>
+            <a:lvl1pPr>
+              <a:defRPr sz="2800"/>
+            </a:lvl1pPr>
+            <a:lvl2pPr>
+              <a:defRPr sz="2400"/>
+            </a:lvl2pPr>
+            <a:lvl3pPr>
+              <a:defRPr sz="2000"/>
+            </a:lvl3pPr>
+            <a:lvl4pPr>
+              <a:defRPr sz="1800"/>
+            </a:lvl4pPr>
+            <a:lvl5pPr>
+              <a:defRPr sz="1800"/>
+            </a:lvl5pPr>
+            <a:lvl6pPr>
+              <a:defRPr sz="1800"/>
+            </a:lvl6pPr>
+            <a:lvl7pPr>
+              <a:defRPr sz="1800"/>
+            </a:lvl7pPr>
+            <a:lvl8pPr>
+              <a:defRPr sz="1800"/>
+            </a:lvl8pPr>
+            <a:lvl9pPr>
+              <a:defRPr sz="1800"/>
+            </a:lvl9pPr>
+          </a:lstStyle>
           <a:p>
             <a:pPr lvl="0"/>
             <a:r>
-              <a:rPr lang="en-US"/>
+              <a:rPr lang="en-US" smtClean="0"/>
               <a:t>Click to edit Master text styles</a:t>
             </a:r>
           </a:p>
           <a:p>
             <a:pPr lvl="1"/>
             <a:r>
-              <a:rPr lang="en-US"/>
+              <a:rPr lang="en-US" smtClean="0"/>
               <a:t>Second level</a:t>
             </a:r>
           </a:p>
           <a:p>
             <a:pPr lvl="2"/>
             <a:r>
-              <a:rPr lang="en-US"/>
+              <a:rPr lang="en-US" smtClean="0"/>
               <a:t>Third level</a:t>
             </a:r>
           </a:p>
           <a:p>
             <a:pPr lvl="3"/>
             <a:r>
-              <a:rPr lang="en-US"/>
+              <a:rPr lang="en-US" smtClean="0"/>
               <a:t>Fourth level</a:t>
             </a:r>
           </a:p>
           <a:p>
             <a:pPr lvl="4"/>
             <a:r>
-              <a:rPr lang="en-US"/>
+              <a:rPr lang="en-US" smtClean="0"/>
               <a:t>Fifth level</a:t>
             </a:r>
-            <a:endParaRPr lang="en-US" dirty="0"/>
+            <a:endParaRPr lang="en-US"/>
           </a:p>
         </p:txBody>
       </p:sp>
@@ -1622,48 +2317,76 @@
         </p:nvSpPr>
         <p:spPr>
           <a:xfrm>
-            <a:off x="6172200" y="1825625"/>
-            <a:ext cx="5181600" cy="4351338"/>
+            <a:off x="4648200" y="1600200"/>
+            <a:ext cx="4038600" cy="4525963"/>
           </a:xfrm>
         </p:spPr>
         <p:txBody>
           <a:bodyPr/>
-          <a:lstStyle/>
+          <a:lstStyle>
+            <a:lvl1pPr>
+              <a:defRPr sz="2800"/>
+            </a:lvl1pPr>
+            <a:lvl2pPr>
+              <a:defRPr sz="2400"/>
+            </a:lvl2pPr>
+            <a:lvl3pPr>
+              <a:defRPr sz="2000"/>
+            </a:lvl3pPr>
+            <a:lvl4pPr>
+              <a:defRPr sz="1800"/>
+            </a:lvl4pPr>
+            <a:lvl5pPr>
+              <a:defRPr sz="1800"/>
+            </a:lvl5pPr>
+            <a:lvl6pPr>
+              <a:defRPr sz="1800"/>
+            </a:lvl6pPr>
+            <a:lvl7pPr>
+              <a:defRPr sz="1800"/>
+            </a:lvl7pPr>
+            <a:lvl8pPr>
+              <a:defRPr sz="1800"/>
+            </a:lvl8pPr>
+            <a:lvl9pPr>
+              <a:defRPr sz="1800"/>
+            </a:lvl9pPr>
+          </a:lstStyle>
           <a:p>
             <a:pPr lvl="0"/>
             <a:r>
-              <a:rPr lang="en-US"/>
+              <a:rPr lang="en-US" smtClean="0"/>
               <a:t>Click to edit Master text styles</a:t>
             </a:r>
           </a:p>
           <a:p>
             <a:pPr lvl="1"/>
             <a:r>
-              <a:rPr lang="en-US"/>
+              <a:rPr lang="en-US" smtClean="0"/>
               <a:t>Second level</a:t>
             </a:r>
           </a:p>
           <a:p>
             <a:pPr lvl="2"/>
             <a:r>
-              <a:rPr lang="en-US"/>
+              <a:rPr lang="en-US" smtClean="0"/>
               <a:t>Third level</a:t>
             </a:r>
           </a:p>
           <a:p>
             <a:pPr lvl="3"/>
             <a:r>
-              <a:rPr lang="en-US"/>
+              <a:rPr lang="en-US" smtClean="0"/>
               <a:t>Fourth level</a:t>
             </a:r>
           </a:p>
           <a:p>
             <a:pPr lvl="4"/>
             <a:r>
-              <a:rPr lang="en-US"/>
+              <a:rPr lang="en-US" smtClean="0"/>
               <a:t>Fifth level</a:t>
             </a:r>
-            <a:endParaRPr lang="en-US" dirty="0"/>
+            <a:endParaRPr lang="en-US"/>
           </a:p>
         </p:txBody>
       </p:sp>
@@ -1682,9 +2405,9 @@
           <a:bodyPr/>
           <a:lstStyle/>
           <a:p>
-            <a:fld id="{846CE7D5-CF57-46EF-B807-FDD0502418D4}" type="datetimeFigureOut">
-              <a:rPr lang="en-US" smtClean="0"/>
-              <a:t>6/25/2026</a:t>
+            <a:fld id="{5BCAD085-E8A6-8845-BD4E-CB4CCA059FC4}" type="datetimeFigureOut">
+              <a:rPr lang="en-US" smtClean="0"/>
+              <a:t>1/27/13</a:t>
             </a:fld>
             <a:endParaRPr lang="en-US"/>
           </a:p>
@@ -1724,7 +2447,7 @@
           <a:bodyPr/>
           <a:lstStyle/>
           <a:p>
-            <a:fld id="{330EA680-D336-4FF7-8B7A-9848BB0A1C32}" type="slidenum">
+            <a:fld id="{C1FF6DA9-008F-8B48-92A6-B652298478BF}" type="slidenum">
               <a:rPr lang="en-US" smtClean="0"/>
               <a:t>‹#›</a:t>
             </a:fld>
@@ -1735,7 +2458,7 @@
     </p:spTree>
     <p:extLst>
       <p:ext uri="{BB962C8B-B14F-4D97-AF65-F5344CB8AC3E}">
-        <p14:creationId xmlns:p14="http://schemas.microsoft.com/office/powerpoint/2010/main" val="1203092039"/>
+        <p14:creationId xmlns:p14="http://schemas.microsoft.com/office/powerpoint/2010/main" val="2782244947"/>
       </p:ext>
     </p:extLst>
   </p:cSld>
@@ -1772,38 +2495,37 @@
             <p:ph type="title"/>
           </p:nvPr>
         </p:nvSpPr>
+        <p:spPr/>
+        <p:txBody>
+          <a:bodyPr/>
+          <a:lstStyle>
+            <a:lvl1pPr>
+              <a:defRPr/>
+            </a:lvl1pPr>
+          </a:lstStyle>
+          <a:p>
+            <a:r>
+              <a:rPr lang="en-US" smtClean="0"/>
+              <a:t>Click to edit Master title style</a:t>
+            </a:r>
+            <a:endParaRPr lang="en-US"/>
+          </a:p>
+        </p:txBody>
+      </p:sp>
+      <p:sp>
+        <p:nvSpPr>
+          <p:cNvPr id="3" name="Text Placeholder 2"/>
+          <p:cNvSpPr>
+            <a:spLocks noGrp="1"/>
+          </p:cNvSpPr>
+          <p:nvPr>
+            <p:ph type="body" idx="1"/>
+          </p:nvPr>
+        </p:nvSpPr>
         <p:spPr>
           <a:xfrm>
-            <a:off x="839788" y="365125"/>
-            <a:ext cx="10515600" cy="1325563"/>
-          </a:xfrm>
-        </p:spPr>
-        <p:txBody>
-          <a:bodyPr/>
-          <a:lstStyle/>
-          <a:p>
-            <a:r>
-              <a:rPr lang="en-US"/>
-              <a:t>Click to edit Master title style</a:t>
-            </a:r>
-            <a:endParaRPr lang="en-US" dirty="0"/>
-          </a:p>
-        </p:txBody>
-      </p:sp>
-      <p:sp>
-        <p:nvSpPr>
-          <p:cNvPr id="3" name="Text Placeholder 2"/>
-          <p:cNvSpPr>
-            <a:spLocks noGrp="1"/>
-          </p:cNvSpPr>
-          <p:nvPr>
-            <p:ph type="body" idx="1"/>
-          </p:nvPr>
-        </p:nvSpPr>
-        <p:spPr>
-          <a:xfrm>
-            <a:off x="839788" y="1681163"/>
-            <a:ext cx="5157787" cy="823912"/>
+            <a:off x="457200" y="1535113"/>
+            <a:ext cx="4040188" cy="639762"/>
           </a:xfrm>
         </p:spPr>
         <p:txBody>
@@ -1849,7 +2571,7 @@
           <a:p>
             <a:pPr lvl="0"/>
             <a:r>
-              <a:rPr lang="en-US"/>
+              <a:rPr lang="en-US" smtClean="0"/>
               <a:t>Click to edit Master text styles</a:t>
             </a:r>
           </a:p>
@@ -1867,48 +2589,76 @@
         </p:nvSpPr>
         <p:spPr>
           <a:xfrm>
-            <a:off x="839788" y="2505075"/>
-            <a:ext cx="5157787" cy="3684588"/>
+            <a:off x="457200" y="2174875"/>
+            <a:ext cx="4040188" cy="3951288"/>
           </a:xfrm>
         </p:spPr>
         <p:txBody>
           <a:bodyPr/>
-          <a:lstStyle/>
+          <a:lstStyle>
+            <a:lvl1pPr>
+              <a:defRPr sz="2400"/>
+            </a:lvl1pPr>
+            <a:lvl2pPr>
+              <a:defRPr sz="2000"/>
+            </a:lvl2pPr>
+            <a:lvl3pPr>
+              <a:defRPr sz="1800"/>
+            </a:lvl3pPr>
+            <a:lvl4pPr>
+              <a:defRPr sz="1600"/>
+            </a:lvl4pPr>
+            <a:lvl5pPr>
+              <a:defRPr sz="1600"/>
+            </a:lvl5pPr>
+            <a:lvl6pPr>
+              <a:defRPr sz="1600"/>
+            </a:lvl6pPr>
+            <a:lvl7pPr>
+              <a:defRPr sz="1600"/>
+            </a:lvl7pPr>
+            <a:lvl8pPr>
+              <a:defRPr sz="1600"/>
+            </a:lvl8pPr>
+            <a:lvl9pPr>
+              <a:defRPr sz="1600"/>
+            </a:lvl9pPr>
+          </a:lstStyle>
           <a:p>
             <a:pPr lvl="0"/>
             <a:r>
-              <a:rPr lang="en-US"/>
+              <a:rPr lang="en-US" smtClean="0"/>
               <a:t>Click to edit Master text styles</a:t>
             </a:r>
           </a:p>
           <a:p>
             <a:pPr lvl="1"/>
             <a:r>
-              <a:rPr lang="en-US"/>
+              <a:rPr lang="en-US" smtClean="0"/>
               <a:t>Second level</a:t>
             </a:r>
           </a:p>
           <a:p>
             <a:pPr lvl="2"/>
             <a:r>
-              <a:rPr lang="en-US"/>
+              <a:rPr lang="en-US" smtClean="0"/>
               <a:t>Third level</a:t>
             </a:r>
           </a:p>
           <a:p>
             <a:pPr lvl="3"/>
             <a:r>
-              <a:rPr lang="en-US"/>
+              <a:rPr lang="en-US" smtClean="0"/>
               <a:t>Fourth level</a:t>
             </a:r>
           </a:p>
           <a:p>
             <a:pPr lvl="4"/>
             <a:r>
-              <a:rPr lang="en-US"/>
+              <a:rPr lang="en-US" smtClean="0"/>
               <a:t>Fifth level</a:t>
             </a:r>
-            <a:endParaRPr lang="en-US" dirty="0"/>
+            <a:endParaRPr lang="en-US"/>
           </a:p>
         </p:txBody>
       </p:sp>
@@ -1924,8 +2674,8 @@
         </p:nvSpPr>
         <p:spPr>
           <a:xfrm>
-            <a:off x="6172200" y="1681163"/>
-            <a:ext cx="5183188" cy="823912"/>
+            <a:off x="4645025" y="1535113"/>
+            <a:ext cx="4041775" cy="639762"/>
           </a:xfrm>
         </p:spPr>
         <p:txBody>
@@ -1971,7 +2721,7 @@
           <a:p>
             <a:pPr lvl="0"/>
             <a:r>
-              <a:rPr lang="en-US"/>
+              <a:rPr lang="en-US" smtClean="0"/>
               <a:t>Click to edit Master text styles</a:t>
             </a:r>
           </a:p>
@@ -1989,48 +2739,76 @@
         </p:nvSpPr>
         <p:spPr>
           <a:xfrm>
-            <a:off x="6172200" y="2505075"/>
-            <a:ext cx="5183188" cy="3684588"/>
+            <a:off x="4645025" y="2174875"/>
+            <a:ext cx="4041775" cy="3951288"/>
           </a:xfrm>
         </p:spPr>
         <p:txBody>
           <a:bodyPr/>
-          <a:lstStyle/>
+          <a:lstStyle>
+            <a:lvl1pPr>
+              <a:defRPr sz="2400"/>
+            </a:lvl1pPr>
+            <a:lvl2pPr>
+              <a:defRPr sz="2000"/>
+            </a:lvl2pPr>
+            <a:lvl3pPr>
+              <a:defRPr sz="1800"/>
+            </a:lvl3pPr>
+            <a:lvl4pPr>
+              <a:defRPr sz="1600"/>
+            </a:lvl4pPr>
+            <a:lvl5pPr>
+              <a:defRPr sz="1600"/>
+            </a:lvl5pPr>
+            <a:lvl6pPr>
+              <a:defRPr sz="1600"/>
+            </a:lvl6pPr>
+            <a:lvl7pPr>
+              <a:defRPr sz="1600"/>
+            </a:lvl7pPr>
+            <a:lvl8pPr>
+              <a:defRPr sz="1600"/>
+            </a:lvl8pPr>
+            <a:lvl9pPr>
+              <a:defRPr sz="1600"/>
+            </a:lvl9pPr>
+          </a:lstStyle>
           <a:p>
             <a:pPr lvl="0"/>
             <a:r>
-              <a:rPr lang="en-US"/>
+              <a:rPr lang="en-US" smtClean="0"/>
               <a:t>Click to edit Master text styles</a:t>
             </a:r>
           </a:p>
           <a:p>
             <a:pPr lvl="1"/>
             <a:r>
-              <a:rPr lang="en-US"/>
+              <a:rPr lang="en-US" smtClean="0"/>
               <a:t>Second level</a:t>
             </a:r>
           </a:p>
           <a:p>
             <a:pPr lvl="2"/>
             <a:r>
-              <a:rPr lang="en-US"/>
+              <a:rPr lang="en-US" smtClean="0"/>
               <a:t>Third level</a:t>
             </a:r>
           </a:p>
           <a:p>
             <a:pPr lvl="3"/>
             <a:r>
-              <a:rPr lang="en-US"/>
+              <a:rPr lang="en-US" smtClean="0"/>
               <a:t>Fourth level</a:t>
             </a:r>
           </a:p>
           <a:p>
             <a:pPr lvl="4"/>
             <a:r>
-              <a:rPr lang="en-US"/>
+              <a:rPr lang="en-US" smtClean="0"/>
               <a:t>Fifth level</a:t>
             </a:r>
-            <a:endParaRPr lang="en-US" dirty="0"/>
+            <a:endParaRPr lang="en-US"/>
           </a:p>
         </p:txBody>
       </p:sp>
@@ -2049,9 +2827,9 @@
           <a:bodyPr/>
           <a:lstStyle/>
           <a:p>
-            <a:fld id="{846CE7D5-CF57-46EF-B807-FDD0502418D4}" type="datetimeFigureOut">
-              <a:rPr lang="en-US" smtClean="0"/>
-              <a:t>6/25/2026</a:t>
+            <a:fld id="{5BCAD085-E8A6-8845-BD4E-CB4CCA059FC4}" type="datetimeFigureOut">
+              <a:rPr lang="en-US" smtClean="0"/>
+              <a:t>1/27/13</a:t>
             </a:fld>
             <a:endParaRPr lang="en-US"/>
           </a:p>
@@ -2091,7 +2869,7 @@
           <a:bodyPr/>
           <a:lstStyle/>
           <a:p>
-            <a:fld id="{330EA680-D336-4FF7-8B7A-9848BB0A1C32}" type="slidenum">
+            <a:fld id="{C1FF6DA9-008F-8B48-92A6-B652298478BF}" type="slidenum">
               <a:rPr lang="en-US" smtClean="0"/>
               <a:t>‹#›</a:t>
             </a:fld>
@@ -2102,7 +2880,7 @@
     </p:spTree>
     <p:extLst>
       <p:ext uri="{BB962C8B-B14F-4D97-AF65-F5344CB8AC3E}">
-        <p14:creationId xmlns:p14="http://schemas.microsoft.com/office/powerpoint/2010/main" val="3733172339"/>
+        <p14:creationId xmlns:p14="http://schemas.microsoft.com/office/powerpoint/2010/main" val="990158736"/>
       </p:ext>
     </p:extLst>
   </p:cSld>
@@ -2145,10 +2923,10 @@
           <a:lstStyle/>
           <a:p>
             <a:r>
-              <a:rPr lang="en-US"/>
+              <a:rPr lang="en-US" smtClean="0"/>
               <a:t>Click to edit Master title style</a:t>
             </a:r>
-            <a:endParaRPr lang="en-US" dirty="0"/>
+            <a:endParaRPr lang="en-US"/>
           </a:p>
         </p:txBody>
       </p:sp>
@@ -2167,9 +2945,9 @@
           <a:bodyPr/>
           <a:lstStyle/>
           <a:p>
-            <a:fld id="{846CE7D5-CF57-46EF-B807-FDD0502418D4}" type="datetimeFigureOut">
-              <a:rPr lang="en-US" smtClean="0"/>
-              <a:t>6/25/2026</a:t>
+            <a:fld id="{5BCAD085-E8A6-8845-BD4E-CB4CCA059FC4}" type="datetimeFigureOut">
+              <a:rPr lang="en-US" smtClean="0"/>
+              <a:t>1/27/13</a:t>
             </a:fld>
             <a:endParaRPr lang="en-US"/>
           </a:p>
@@ -2209,7 +2987,7 @@
           <a:bodyPr/>
           <a:lstStyle/>
           <a:p>
-            <a:fld id="{330EA680-D336-4FF7-8B7A-9848BB0A1C32}" type="slidenum">
+            <a:fld id="{C1FF6DA9-008F-8B48-92A6-B652298478BF}" type="slidenum">
               <a:rPr lang="en-US" smtClean="0"/>
               <a:t>‹#›</a:t>
             </a:fld>
@@ -2220,7 +2998,7 @@
     </p:spTree>
     <p:extLst>
       <p:ext uri="{BB962C8B-B14F-4D97-AF65-F5344CB8AC3E}">
-        <p14:creationId xmlns:p14="http://schemas.microsoft.com/office/powerpoint/2010/main" val="3210312558"/>
+        <p14:creationId xmlns:p14="http://schemas.microsoft.com/office/powerpoint/2010/main" val="727027711"/>
       </p:ext>
     </p:extLst>
   </p:cSld>
@@ -2262,9 +3040,9 @@
           <a:bodyPr/>
           <a:lstStyle/>
           <a:p>
-            <a:fld id="{846CE7D5-CF57-46EF-B807-FDD0502418D4}" type="datetimeFigureOut">
-              <a:rPr lang="en-US" smtClean="0"/>
-              <a:t>6/25/2026</a:t>
+            <a:fld id="{5BCAD085-E8A6-8845-BD4E-CB4CCA059FC4}" type="datetimeFigureOut">
+              <a:rPr lang="en-US" smtClean="0"/>
+              <a:t>1/27/13</a:t>
             </a:fld>
             <a:endParaRPr lang="en-US"/>
           </a:p>
@@ -2304,7 +3082,7 @@
           <a:bodyPr/>
           <a:lstStyle/>
           <a:p>
-            <a:fld id="{330EA680-D336-4FF7-8B7A-9848BB0A1C32}" type="slidenum">
+            <a:fld id="{C1FF6DA9-008F-8B48-92A6-B652298478BF}" type="slidenum">
               <a:rPr lang="en-US" smtClean="0"/>
               <a:t>‹#›</a:t>
             </a:fld>
@@ -2315,7 +3093,7 @@
     </p:spTree>
     <p:extLst>
       <p:ext uri="{BB962C8B-B14F-4D97-AF65-F5344CB8AC3E}">
-        <p14:creationId xmlns:p14="http://schemas.microsoft.com/office/powerpoint/2010/main" val="3146388984"/>
+        <p14:creationId xmlns:p14="http://schemas.microsoft.com/office/powerpoint/2010/main" val="1212999818"/>
       </p:ext>
     </p:extLst>
   </p:cSld>
@@ -2354,23 +3132,23 @@
         </p:nvSpPr>
         <p:spPr>
           <a:xfrm>
-            <a:off x="839788" y="457200"/>
-            <a:ext cx="3932237" cy="1600200"/>
+            <a:off x="457200" y="273050"/>
+            <a:ext cx="3008313" cy="1162050"/>
           </a:xfrm>
         </p:spPr>
         <p:txBody>
           <a:bodyPr anchor="b"/>
           <a:lstStyle>
-            <a:lvl1pPr>
-              <a:defRPr sz="3200"/>
+            <a:lvl1pPr algn="l">
+              <a:defRPr sz="2000" b="1"/>
             </a:lvl1pPr>
           </a:lstStyle>
           <a:p>
             <a:r>
-              <a:rPr lang="en-US"/>
+              <a:rPr lang="en-US" smtClean="0"/>
               <a:t>Click to edit Master title style</a:t>
             </a:r>
-            <a:endParaRPr lang="en-US" dirty="0"/>
+            <a:endParaRPr lang="en-US"/>
           </a:p>
         </p:txBody>
       </p:sp>
@@ -2386,8 +3164,8 @@
         </p:nvSpPr>
         <p:spPr>
           <a:xfrm>
-            <a:off x="5183188" y="987425"/>
-            <a:ext cx="6172200" cy="4873625"/>
+            <a:off x="3575050" y="273050"/>
+            <a:ext cx="5111750" cy="5853113"/>
           </a:xfrm>
         </p:spPr>
         <p:txBody>
@@ -2424,38 +3202,38 @@
           <a:p>
             <a:pPr lvl="0"/>
             <a:r>
-              <a:rPr lang="en-US"/>
+              <a:rPr lang="en-US" smtClean="0"/>
               <a:t>Click to edit Master text styles</a:t>
             </a:r>
           </a:p>
           <a:p>
             <a:pPr lvl="1"/>
             <a:r>
-              <a:rPr lang="en-US"/>
+              <a:rPr lang="en-US" smtClean="0"/>
               <a:t>Second level</a:t>
             </a:r>
           </a:p>
           <a:p>
             <a:pPr lvl="2"/>
             <a:r>
-              <a:rPr lang="en-US"/>
+              <a:rPr lang="en-US" smtClean="0"/>
               <a:t>Third level</a:t>
             </a:r>
           </a:p>
           <a:p>
             <a:pPr lvl="3"/>
             <a:r>
-              <a:rPr lang="en-US"/>
+              <a:rPr lang="en-US" smtClean="0"/>
               <a:t>Fourth level</a:t>
             </a:r>
           </a:p>
           <a:p>
             <a:pPr lvl="4"/>
             <a:r>
-              <a:rPr lang="en-US"/>
+              <a:rPr lang="en-US" smtClean="0"/>
               <a:t>Fifth level</a:t>
             </a:r>
-            <a:endParaRPr lang="en-US" dirty="0"/>
+            <a:endParaRPr lang="en-US"/>
           </a:p>
         </p:txBody>
       </p:sp>
@@ -2471,8 +3249,8 @@
         </p:nvSpPr>
         <p:spPr>
           <a:xfrm>
-            <a:off x="839788" y="2057400"/>
-            <a:ext cx="3932237" cy="3811588"/>
+            <a:off x="457200" y="1435100"/>
+            <a:ext cx="3008313" cy="4691063"/>
           </a:xfrm>
         </p:spPr>
         <p:txBody>
@@ -2480,45 +3258,45 @@
           <a:lstStyle>
             <a:lvl1pPr marL="0" indent="0">
               <a:buNone/>
-              <a:defRPr sz="1600"/>
+              <a:defRPr sz="1400"/>
             </a:lvl1pPr>
             <a:lvl2pPr marL="457200" indent="0">
               <a:buNone/>
-              <a:defRPr sz="1400"/>
+              <a:defRPr sz="1200"/>
             </a:lvl2pPr>
             <a:lvl3pPr marL="914400" indent="0">
               <a:buNone/>
-              <a:defRPr sz="1200"/>
+              <a:defRPr sz="1000"/>
             </a:lvl3pPr>
             <a:lvl4pPr marL="1371600" indent="0">
               <a:buNone/>
-              <a:defRPr sz="1000"/>
+              <a:defRPr sz="900"/>
             </a:lvl4pPr>
             <a:lvl5pPr marL="1828800" indent="0">
               <a:buNone/>
-              <a:defRPr sz="1000"/>
+              <a:defRPr sz="900"/>
             </a:lvl5pPr>
             <a:lvl6pPr marL="2286000" indent="0">
               <a:buNone/>
-              <a:defRPr sz="1000"/>
+              <a:defRPr sz="900"/>
             </a:lvl6pPr>
             <a:lvl7pPr marL="2743200" indent="0">
               <a:buNone/>
-              <a:defRPr sz="1000"/>
+              <a:defRPr sz="900"/>
             </a:lvl7pPr>
             <a:lvl8pPr marL="3200400" indent="0">
               <a:buNone/>
-              <a:defRPr sz="1000"/>
+              <a:defRPr sz="900"/>
             </a:lvl8pPr>
             <a:lvl9pPr marL="3657600" indent="0">
               <a:buNone/>
-              <a:defRPr sz="1000"/>
+              <a:defRPr sz="900"/>
             </a:lvl9pPr>
           </a:lstStyle>
           <a:p>
             <a:pPr lvl="0"/>
             <a:r>
-              <a:rPr lang="en-US"/>
+              <a:rPr lang="en-US" smtClean="0"/>
               <a:t>Click to edit Master text styles</a:t>
             </a:r>
           </a:p>
@@ -2539,9 +3317,9 @@
           <a:bodyPr/>
           <a:lstStyle/>
           <a:p>
-            <a:fld id="{846CE7D5-CF57-46EF-B807-FDD0502418D4}" type="datetimeFigureOut">
-              <a:rPr lang="en-US" smtClean="0"/>
-              <a:t>6/25/2026</a:t>
+            <a:fld id="{5BCAD085-E8A6-8845-BD4E-CB4CCA059FC4}" type="datetimeFigureOut">
+              <a:rPr lang="en-US" smtClean="0"/>
+              <a:t>1/27/13</a:t>
             </a:fld>
             <a:endParaRPr lang="en-US"/>
           </a:p>
@@ -2581,7 +3359,7 @@
           <a:bodyPr/>
           <a:lstStyle/>
           <a:p>
-            <a:fld id="{330EA680-D336-4FF7-8B7A-9848BB0A1C32}" type="slidenum">
+            <a:fld id="{C1FF6DA9-008F-8B48-92A6-B652298478BF}" type="slidenum">
               <a:rPr lang="en-US" smtClean="0"/>
               <a:t>‹#›</a:t>
             </a:fld>
@@ -2592,7 +3370,7 @@
     </p:spTree>
     <p:extLst>
       <p:ext uri="{BB962C8B-B14F-4D97-AF65-F5344CB8AC3E}">
-        <p14:creationId xmlns:p14="http://schemas.microsoft.com/office/powerpoint/2010/main" val="3171841454"/>
+        <p14:creationId xmlns:p14="http://schemas.microsoft.com/office/powerpoint/2010/main" val="1840726560"/>
       </p:ext>
     </p:extLst>
   </p:cSld>
@@ -2631,23 +3409,23 @@
         </p:nvSpPr>
         <p:spPr>
           <a:xfrm>
-            <a:off x="839788" y="457200"/>
-            <a:ext cx="3932237" cy="1600200"/>
+            <a:off x="1792288" y="4800600"/>
+            <a:ext cx="5486400" cy="566738"/>
           </a:xfrm>
         </p:spPr>
         <p:txBody>
           <a:bodyPr anchor="b"/>
           <a:lstStyle>
-            <a:lvl1pPr>
-              <a:defRPr sz="3200"/>
+            <a:lvl1pPr algn="l">
+              <a:defRPr sz="2000" b="1"/>
             </a:lvl1pPr>
           </a:lstStyle>
           <a:p>
             <a:r>
-              <a:rPr lang="en-US"/>
+              <a:rPr lang="en-US" smtClean="0"/>
               <a:t>Click to edit Master title style</a:t>
             </a:r>
-            <a:endParaRPr lang="en-US" dirty="0"/>
+            <a:endParaRPr lang="en-US"/>
           </a:p>
         </p:txBody>
       </p:sp>
@@ -2655,7 +3433,7 @@
         <p:nvSpPr>
           <p:cNvPr id="3" name="Picture Placeholder 2"/>
           <p:cNvSpPr>
-            <a:spLocks noGrp="1" noChangeAspect="1"/>
+            <a:spLocks noGrp="1"/>
           </p:cNvSpPr>
           <p:nvPr>
             <p:ph type="pic" idx="1"/>
@@ -2663,12 +3441,12 @@
         </p:nvSpPr>
         <p:spPr>
           <a:xfrm>
-            <a:off x="5183188" y="987425"/>
-            <a:ext cx="6172200" cy="4873625"/>
+            <a:off x="1792288" y="612775"/>
+            <a:ext cx="5486400" cy="4114800"/>
           </a:xfrm>
         </p:spPr>
         <p:txBody>
-          <a:bodyPr anchor="t"/>
+          <a:bodyPr/>
           <a:lstStyle>
             <a:lvl1pPr marL="0" indent="0">
               <a:buNone/>
@@ -2708,11 +3486,7 @@
             </a:lvl9pPr>
           </a:lstStyle>
           <a:p>
-            <a:r>
-              <a:rPr lang="en-US"/>
-              <a:t>Click icon to add picture</a:t>
-            </a:r>
-            <a:endParaRPr lang="en-US" dirty="0"/>
+            <a:endParaRPr lang="en-US"/>
           </a:p>
         </p:txBody>
       </p:sp>
@@ -2728,8 +3502,8 @@
         </p:nvSpPr>
         <p:spPr>
           <a:xfrm>
-            <a:off x="839788" y="2057400"/>
-            <a:ext cx="3932237" cy="3811588"/>
+            <a:off x="1792288" y="5367338"/>
+            <a:ext cx="5486400" cy="804862"/>
           </a:xfrm>
         </p:spPr>
         <p:txBody>
@@ -2737,45 +3511,45 @@
           <a:lstStyle>
             <a:lvl1pPr marL="0" indent="0">
               <a:buNone/>
-              <a:defRPr sz="1600"/>
+              <a:defRPr sz="1400"/>
             </a:lvl1pPr>
             <a:lvl2pPr marL="457200" indent="0">
               <a:buNone/>
-              <a:defRPr sz="1400"/>
+              <a:defRPr sz="1200"/>
             </a:lvl2pPr>
             <a:lvl3pPr marL="914400" indent="0">
               <a:buNone/>
-              <a:defRPr sz="1200"/>
+              <a:defRPr sz="1000"/>
             </a:lvl3pPr>
             <a:lvl4pPr marL="1371600" indent="0">
               <a:buNone/>
-              <a:defRPr sz="1000"/>
+              <a:defRPr sz="900"/>
             </a:lvl4pPr>
             <a:lvl5pPr marL="1828800" indent="0">
               <a:buNone/>
-              <a:defRPr sz="1000"/>
+              <a:defRPr sz="900"/>
             </a:lvl5pPr>
             <a:lvl6pPr marL="2286000" indent="0">
               <a:buNone/>
-              <a:defRPr sz="1000"/>
+              <a:defRPr sz="900"/>
             </a:lvl6pPr>
             <a:lvl7pPr marL="2743200" indent="0">
               <a:buNone/>
-              <a:defRPr sz="1000"/>
+              <a:defRPr sz="900"/>
             </a:lvl7pPr>
             <a:lvl8pPr marL="3200400" indent="0">
               <a:buNone/>
-              <a:defRPr sz="1000"/>
+              <a:defRPr sz="900"/>
             </a:lvl8pPr>
             <a:lvl9pPr marL="3657600" indent="0">
               <a:buNone/>
-              <a:defRPr sz="1000"/>
+              <a:defRPr sz="900"/>
             </a:lvl9pPr>
           </a:lstStyle>
           <a:p>
             <a:pPr lvl="0"/>
             <a:r>
-              <a:rPr lang="en-US"/>
+              <a:rPr lang="en-US" smtClean="0"/>
               <a:t>Click to edit Master text styles</a:t>
             </a:r>
           </a:p>
@@ -2796,9 +3570,9 @@
           <a:bodyPr/>
           <a:lstStyle/>
           <a:p>
-            <a:fld id="{846CE7D5-CF57-46EF-B807-FDD0502418D4}" type="datetimeFigureOut">
-              <a:rPr lang="en-US" smtClean="0"/>
-              <a:t>6/25/2026</a:t>
+            <a:fld id="{5BCAD085-E8A6-8845-BD4E-CB4CCA059FC4}" type="datetimeFigureOut">
+              <a:rPr lang="en-US" smtClean="0"/>
+              <a:t>1/27/13</a:t>
             </a:fld>
             <a:endParaRPr lang="en-US"/>
           </a:p>
@@ -2838,7 +3612,7 @@
           <a:bodyPr/>
           <a:lstStyle/>
           <a:p>
-            <a:fld id="{330EA680-D336-4FF7-8B7A-9848BB0A1C32}" type="slidenum">
+            <a:fld id="{C1FF6DA9-008F-8B48-92A6-B652298478BF}" type="slidenum">
               <a:rPr lang="en-US" smtClean="0"/>
               <a:t>‹#›</a:t>
             </a:fld>
@@ -2849,7 +3623,7 @@
     </p:spTree>
     <p:extLst>
       <p:ext uri="{BB962C8B-B14F-4D97-AF65-F5344CB8AC3E}">
-        <p14:creationId xmlns:p14="http://schemas.microsoft.com/office/powerpoint/2010/main" val="1718958274"/>
+        <p14:creationId xmlns:p14="http://schemas.microsoft.com/office/powerpoint/2010/main" val="3889236939"/>
       </p:ext>
     </p:extLst>
   </p:cSld>
@@ -2893,8 +3667,8 @@
         </p:nvSpPr>
         <p:spPr>
           <a:xfrm>
-            <a:off x="838200" y="365125"/>
-            <a:ext cx="10515600" cy="1325563"/>
+            <a:off x="457200" y="274638"/>
+            <a:ext cx="8229600" cy="1143000"/>
           </a:xfrm>
           <a:prstGeom prst="rect">
             <a:avLst/>
@@ -2907,10 +3681,10 @@
           <a:lstStyle/>
           <a:p>
             <a:r>
-              <a:rPr lang="en-US"/>
+              <a:rPr lang="en-US" smtClean="0"/>
               <a:t>Click to edit Master title style</a:t>
             </a:r>
-            <a:endParaRPr lang="en-US" dirty="0"/>
+            <a:endParaRPr lang="en-US"/>
           </a:p>
         </p:txBody>
       </p:sp>
@@ -2926,8 +3700,8 @@
         </p:nvSpPr>
         <p:spPr>
           <a:xfrm>
-            <a:off x="838200" y="1825625"/>
-            <a:ext cx="10515600" cy="4351338"/>
+            <a:off x="457200" y="1600200"/>
+            <a:ext cx="8229600" cy="4525963"/>
           </a:xfrm>
           <a:prstGeom prst="rect">
             <a:avLst/>
@@ -2941,38 +3715,38 @@
           <a:p>
             <a:pPr lvl="0"/>
             <a:r>
-              <a:rPr lang="en-US"/>
+              <a:rPr lang="en-US" smtClean="0"/>
               <a:t>Click to edit Master text styles</a:t>
             </a:r>
           </a:p>
           <a:p>
             <a:pPr lvl="1"/>
             <a:r>
-              <a:rPr lang="en-US"/>
+              <a:rPr lang="en-US" smtClean="0"/>
               <a:t>Second level</a:t>
             </a:r>
           </a:p>
           <a:p>
             <a:pPr lvl="2"/>
             <a:r>
-              <a:rPr lang="en-US"/>
+              <a:rPr lang="en-US" smtClean="0"/>
               <a:t>Third level</a:t>
             </a:r>
           </a:p>
           <a:p>
             <a:pPr lvl="3"/>
             <a:r>
-              <a:rPr lang="en-US"/>
+              <a:rPr lang="en-US" smtClean="0"/>
               <a:t>Fourth level</a:t>
             </a:r>
           </a:p>
           <a:p>
             <a:pPr lvl="4"/>
             <a:r>
-              <a:rPr lang="en-US"/>
+              <a:rPr lang="en-US" smtClean="0"/>
               <a:t>Fifth level</a:t>
             </a:r>
-            <a:endParaRPr lang="en-US" dirty="0"/>
+            <a:endParaRPr lang="en-US"/>
           </a:p>
         </p:txBody>
       </p:sp>
@@ -2988,8 +3762,8 @@
         </p:nvSpPr>
         <p:spPr>
           <a:xfrm>
-            <a:off x="838200" y="6356350"/>
-            <a:ext cx="2743200" cy="365125"/>
+            <a:off x="457200" y="6356350"/>
+            <a:ext cx="2133600" cy="365125"/>
           </a:xfrm>
           <a:prstGeom prst="rect">
             <a:avLst/>
@@ -3002,16 +3776,16 @@
               <a:defRPr sz="1200">
                 <a:solidFill>
                   <a:schemeClr val="tx1">
-                    <a:tint val="82000"/>
+                    <a:tint val="75000"/>
                   </a:schemeClr>
                 </a:solidFill>
               </a:defRPr>
             </a:lvl1pPr>
           </a:lstStyle>
           <a:p>
-            <a:fld id="{846CE7D5-CF57-46EF-B807-FDD0502418D4}" type="datetimeFigureOut">
-              <a:rPr lang="en-US" smtClean="0"/>
-              <a:t>6/25/2026</a:t>
+            <a:fld id="{5BCAD085-E8A6-8845-BD4E-CB4CCA059FC4}" type="datetimeFigureOut">
+              <a:rPr lang="en-US" smtClean="0"/>
+              <a:t>1/27/13</a:t>
             </a:fld>
             <a:endParaRPr lang="en-US"/>
           </a:p>
@@ -3029,8 +3803,8 @@
         </p:nvSpPr>
         <p:spPr>
           <a:xfrm>
-            <a:off x="4038600" y="6356350"/>
-            <a:ext cx="4114800" cy="365125"/>
+            <a:off x="3124200" y="6356350"/>
+            <a:ext cx="2895600" cy="365125"/>
           </a:xfrm>
           <a:prstGeom prst="rect">
             <a:avLst/>
@@ -3043,7 +3817,7 @@
               <a:defRPr sz="1200">
                 <a:solidFill>
                   <a:schemeClr val="tx1">
-                    <a:tint val="82000"/>
+                    <a:tint val="75000"/>
                   </a:schemeClr>
                 </a:solidFill>
               </a:defRPr>
@@ -3066,8 +3840,8 @@
         </p:nvSpPr>
         <p:spPr>
           <a:xfrm>
-            <a:off x="8610600" y="6356350"/>
-            <a:ext cx="2743200" cy="365125"/>
+            <a:off x="6553200" y="6356350"/>
+            <a:ext cx="2133600" cy="365125"/>
           </a:xfrm>
           <a:prstGeom prst="rect">
             <a:avLst/>
@@ -3080,14 +3854,14 @@
               <a:defRPr sz="1200">
                 <a:solidFill>
                   <a:schemeClr val="tx1">
-                    <a:tint val="82000"/>
+                    <a:tint val="75000"/>
                   </a:schemeClr>
                 </a:solidFill>
               </a:defRPr>
             </a:lvl1pPr>
           </a:lstStyle>
           <a:p>
-            <a:fld id="{330EA680-D336-4FF7-8B7A-9848BB0A1C32}" type="slidenum">
+            <a:fld id="{C1FF6DA9-008F-8B48-92A6-B652298478BF}" type="slidenum">
               <a:rPr lang="en-US" smtClean="0"/>
               <a:t>‹#›</a:t>
             </a:fld>
@@ -3098,30 +3872,27 @@
     </p:spTree>
     <p:extLst>
       <p:ext uri="{BB962C8B-B14F-4D97-AF65-F5344CB8AC3E}">
-        <p14:creationId xmlns:p14="http://schemas.microsoft.com/office/powerpoint/2010/main" val="2460954070"/>
+        <p14:creationId xmlns:p14="http://schemas.microsoft.com/office/powerpoint/2010/main" val="2209977519"/>
       </p:ext>
     </p:extLst>
   </p:cSld>
   <p:clrMap bg1="lt1" tx1="dk1" bg2="lt2" tx2="dk2" accent1="accent1" accent2="accent2" accent3="accent3" accent4="accent4" accent5="accent5" accent6="accent6" hlink="hlink" folHlink="folHlink"/>
   <p:sldLayoutIdLst>
-    <p:sldLayoutId id="2147483661" r:id="rId1"/>
-    <p:sldLayoutId id="2147483662" r:id="rId2"/>
-    <p:sldLayoutId id="2147483663" r:id="rId3"/>
-    <p:sldLayoutId id="2147483664" r:id="rId4"/>
-    <p:sldLayoutId id="2147483665" r:id="rId5"/>
-    <p:sldLayoutId id="2147483666" r:id="rId6"/>
-    <p:sldLayoutId id="2147483667" r:id="rId7"/>
-    <p:sldLayoutId id="2147483668" r:id="rId8"/>
-    <p:sldLayoutId id="2147483669" r:id="rId9"/>
-    <p:sldLayoutId id="2147483670" r:id="rId10"/>
-    <p:sldLayoutId id="2147483671" r:id="rId11"/>
+    <p:sldLayoutId id="2147483649" r:id="rId1"/>
+    <p:sldLayoutId id="2147483650" r:id="rId2"/>
+    <p:sldLayoutId id="2147483651" r:id="rId3"/>
+    <p:sldLayoutId id="2147483652" r:id="rId4"/>
+    <p:sldLayoutId id="2147483653" r:id="rId5"/>
+    <p:sldLayoutId id="2147483654" r:id="rId6"/>
+    <p:sldLayoutId id="2147483655" r:id="rId7"/>
+    <p:sldLayoutId id="2147483656" r:id="rId8"/>
+    <p:sldLayoutId id="2147483657" r:id="rId9"/>
+    <p:sldLayoutId id="2147483658" r:id="rId10"/>
+    <p:sldLayoutId id="2147483659" r:id="rId11"/>
   </p:sldLayoutIdLst>
   <p:txStyles>
     <p:titleStyle>
-      <a:lvl1pPr algn="l" defTabSz="914400" rtl="0" eaLnBrk="1" latinLnBrk="0" hangingPunct="1">
-        <a:lnSpc>
-          <a:spcPct val="90000"/>
-        </a:lnSpc>
+      <a:lvl1pPr algn="ctr" defTabSz="457200" rtl="0" eaLnBrk="1" latinLnBrk="0" hangingPunct="1">
         <a:spcBef>
           <a:spcPct val="0"/>
         </a:spcBef>
@@ -3137,15 +3908,27 @@
       </a:lvl1pPr>
     </p:titleStyle>
     <p:bodyStyle>
-      <a:lvl1pPr marL="228600" indent="-228600" algn="l" defTabSz="914400" rtl="0" eaLnBrk="1" latinLnBrk="0" hangingPunct="1">
-        <a:lnSpc>
-          <a:spcPct val="90000"/>
-        </a:lnSpc>
+      <a:lvl1pPr marL="342900" indent="-342900" algn="l" defTabSz="457200" rtl="0" eaLnBrk="1" latinLnBrk="0" hangingPunct="1">
         <a:spcBef>
-          <a:spcPts val="1000"/>
+          <a:spcPct val="20000"/>
         </a:spcBef>
-        <a:buFont typeface="Arial" panose="020B0604020202020204" pitchFamily="34" charset="0"/>
+        <a:buFont typeface="Arial"/>
         <a:buChar char="•"/>
+        <a:defRPr sz="3200" kern="1200">
+          <a:solidFill>
+            <a:schemeClr val="tx1"/>
+          </a:solidFill>
+          <a:latin typeface="+mn-lt"/>
+          <a:ea typeface="+mn-ea"/>
+          <a:cs typeface="+mn-cs"/>
+        </a:defRPr>
+      </a:lvl1pPr>
+      <a:lvl2pPr marL="742950" indent="-285750" algn="l" defTabSz="457200" rtl="0" eaLnBrk="1" latinLnBrk="0" hangingPunct="1">
+        <a:spcBef>
+          <a:spcPct val="20000"/>
+        </a:spcBef>
+        <a:buFont typeface="Arial"/>
+        <a:buChar char="–"/>
         <a:defRPr sz="2800" kern="1200">
           <a:solidFill>
             <a:schemeClr val="tx1"/>
@@ -3154,15 +3937,12 @@
           <a:ea typeface="+mn-ea"/>
           <a:cs typeface="+mn-cs"/>
         </a:defRPr>
-      </a:lvl1pPr>
-      <a:lvl2pPr marL="685800" indent="-228600" algn="l" defTabSz="914400" rtl="0" eaLnBrk="1" latinLnBrk="0" hangingPunct="1">
-        <a:lnSpc>
-          <a:spcPct val="90000"/>
-        </a:lnSpc>
+      </a:lvl2pPr>
+      <a:lvl3pPr marL="1143000" indent="-228600" algn="l" defTabSz="457200" rtl="0" eaLnBrk="1" latinLnBrk="0" hangingPunct="1">
         <a:spcBef>
-          <a:spcPts val="500"/>
+          <a:spcPct val="20000"/>
         </a:spcBef>
-        <a:buFont typeface="Arial" panose="020B0604020202020204" pitchFamily="34" charset="0"/>
+        <a:buFont typeface="Arial"/>
         <a:buChar char="•"/>
         <a:defRPr sz="2400" kern="1200">
           <a:solidFill>
@@ -3172,15 +3952,42 @@
           <a:ea typeface="+mn-ea"/>
           <a:cs typeface="+mn-cs"/>
         </a:defRPr>
-      </a:lvl2pPr>
-      <a:lvl3pPr marL="1143000" indent="-228600" algn="l" defTabSz="914400" rtl="0" eaLnBrk="1" latinLnBrk="0" hangingPunct="1">
-        <a:lnSpc>
-          <a:spcPct val="90000"/>
-        </a:lnSpc>
+      </a:lvl3pPr>
+      <a:lvl4pPr marL="1600200" indent="-228600" algn="l" defTabSz="457200" rtl="0" eaLnBrk="1" latinLnBrk="0" hangingPunct="1">
         <a:spcBef>
-          <a:spcPts val="500"/>
+          <a:spcPct val="20000"/>
         </a:spcBef>
-        <a:buFont typeface="Arial" panose="020B0604020202020204" pitchFamily="34" charset="0"/>
+        <a:buFont typeface="Arial"/>
+        <a:buChar char="–"/>
+        <a:defRPr sz="2000" kern="1200">
+          <a:solidFill>
+            <a:schemeClr val="tx1"/>
+          </a:solidFill>
+          <a:latin typeface="+mn-lt"/>
+          <a:ea typeface="+mn-ea"/>
+          <a:cs typeface="+mn-cs"/>
+        </a:defRPr>
+      </a:lvl4pPr>
+      <a:lvl5pPr marL="2057400" indent="-228600" algn="l" defTabSz="457200" rtl="0" eaLnBrk="1" latinLnBrk="0" hangingPunct="1">
+        <a:spcBef>
+          <a:spcPct val="20000"/>
+        </a:spcBef>
+        <a:buFont typeface="Arial"/>
+        <a:buChar char="»"/>
+        <a:defRPr sz="2000" kern="1200">
+          <a:solidFill>
+            <a:schemeClr val="tx1"/>
+          </a:solidFill>
+          <a:latin typeface="+mn-lt"/>
+          <a:ea typeface="+mn-ea"/>
+          <a:cs typeface="+mn-cs"/>
+        </a:defRPr>
+      </a:lvl5pPr>
+      <a:lvl6pPr marL="2514600" indent="-228600" algn="l" defTabSz="457200" rtl="0" eaLnBrk="1" latinLnBrk="0" hangingPunct="1">
+        <a:spcBef>
+          <a:spcPct val="20000"/>
+        </a:spcBef>
+        <a:buFont typeface="Arial"/>
         <a:buChar char="•"/>
         <a:defRPr sz="2000" kern="1200">
           <a:solidFill>
@@ -3190,71 +3997,14 @@
           <a:ea typeface="+mn-ea"/>
           <a:cs typeface="+mn-cs"/>
         </a:defRPr>
-      </a:lvl3pPr>
-      <a:lvl4pPr marL="1600200" indent="-228600" algn="l" defTabSz="914400" rtl="0" eaLnBrk="1" latinLnBrk="0" hangingPunct="1">
-        <a:lnSpc>
-          <a:spcPct val="90000"/>
-        </a:lnSpc>
+      </a:lvl6pPr>
+      <a:lvl7pPr marL="2971800" indent="-228600" algn="l" defTabSz="457200" rtl="0" eaLnBrk="1" latinLnBrk="0" hangingPunct="1">
         <a:spcBef>
-          <a:spcPts val="500"/>
+          <a:spcPct val="20000"/>
         </a:spcBef>
-        <a:buFont typeface="Arial" panose="020B0604020202020204" pitchFamily="34" charset="0"/>
+        <a:buFont typeface="Arial"/>
         <a:buChar char="•"/>
-        <a:defRPr sz="1800" kern="1200">
-          <a:solidFill>
-            <a:schemeClr val="tx1"/>
-          </a:solidFill>
-          <a:latin typeface="+mn-lt"/>
-          <a:ea typeface="+mn-ea"/>
-          <a:cs typeface="+mn-cs"/>
-        </a:defRPr>
-      </a:lvl4pPr>
-      <a:lvl5pPr marL="2057400" indent="-228600" algn="l" defTabSz="914400" rtl="0" eaLnBrk="1" latinLnBrk="0" hangingPunct="1">
-        <a:lnSpc>
-          <a:spcPct val="90000"/>
-        </a:lnSpc>
-        <a:spcBef>
-          <a:spcPts val="500"/>
-        </a:spcBef>
-        <a:buFont typeface="Arial" panose="020B0604020202020204" pitchFamily="34" charset="0"/>
-        <a:buChar char="•"/>
-        <a:defRPr sz="1800" kern="1200">
-          <a:solidFill>
-            <a:schemeClr val="tx1"/>
-          </a:solidFill>
-          <a:latin typeface="+mn-lt"/>
-          <a:ea typeface="+mn-ea"/>
-          <a:cs typeface="+mn-cs"/>
-        </a:defRPr>
-      </a:lvl5pPr>
-      <a:lvl6pPr marL="2514600" indent="-228600" algn="l" defTabSz="914400" rtl="0" eaLnBrk="1" latinLnBrk="0" hangingPunct="1">
-        <a:lnSpc>
-          <a:spcPct val="90000"/>
-        </a:lnSpc>
-        <a:spcBef>
-          <a:spcPts val="500"/>
-        </a:spcBef>
-        <a:buFont typeface="Arial" panose="020B0604020202020204" pitchFamily="34" charset="0"/>
-        <a:buChar char="•"/>
-        <a:defRPr sz="1800" kern="1200">
-          <a:solidFill>
-            <a:schemeClr val="tx1"/>
-          </a:solidFill>
-          <a:latin typeface="+mn-lt"/>
-          <a:ea typeface="+mn-ea"/>
-          <a:cs typeface="+mn-cs"/>
-        </a:defRPr>
-      </a:lvl6pPr>
-      <a:lvl7pPr marL="2971800" indent="-228600" algn="l" defTabSz="914400" rtl="0" eaLnBrk="1" latinLnBrk="0" hangingPunct="1">
-        <a:lnSpc>
-          <a:spcPct val="90000"/>
-        </a:lnSpc>
-        <a:spcBef>
-          <a:spcPts val="500"/>
-        </a:spcBef>
-        <a:buFont typeface="Arial" panose="020B0604020202020204" pitchFamily="34" charset="0"/>
-        <a:buChar char="•"/>
-        <a:defRPr sz="1800" kern="1200">
+        <a:defRPr sz="2000" kern="1200">
           <a:solidFill>
             <a:schemeClr val="tx1"/>
           </a:solidFill>
@@ -3263,16 +4013,13 @@
           <a:cs typeface="+mn-cs"/>
         </a:defRPr>
       </a:lvl7pPr>
-      <a:lvl8pPr marL="3429000" indent="-228600" algn="l" defTabSz="914400" rtl="0" eaLnBrk="1" latinLnBrk="0" hangingPunct="1">
-        <a:lnSpc>
-          <a:spcPct val="90000"/>
-        </a:lnSpc>
+      <a:lvl8pPr marL="3429000" indent="-228600" algn="l" defTabSz="457200" rtl="0" eaLnBrk="1" latinLnBrk="0" hangingPunct="1">
         <a:spcBef>
-          <a:spcPts val="500"/>
+          <a:spcPct val="20000"/>
         </a:spcBef>
-        <a:buFont typeface="Arial" panose="020B0604020202020204" pitchFamily="34" charset="0"/>
+        <a:buFont typeface="Arial"/>
         <a:buChar char="•"/>
-        <a:defRPr sz="1800" kern="1200">
+        <a:defRPr sz="2000" kern="1200">
           <a:solidFill>
             <a:schemeClr val="tx1"/>
           </a:solidFill>
@@ -3281,16 +4028,13 @@
           <a:cs typeface="+mn-cs"/>
         </a:defRPr>
       </a:lvl8pPr>
-      <a:lvl9pPr marL="3886200" indent="-228600" algn="l" defTabSz="914400" rtl="0" eaLnBrk="1" latinLnBrk="0" hangingPunct="1">
-        <a:lnSpc>
-          <a:spcPct val="90000"/>
-        </a:lnSpc>
+      <a:lvl9pPr marL="3886200" indent="-228600" algn="l" defTabSz="457200" rtl="0" eaLnBrk="1" latinLnBrk="0" hangingPunct="1">
         <a:spcBef>
-          <a:spcPts val="500"/>
+          <a:spcPct val="20000"/>
         </a:spcBef>
-        <a:buFont typeface="Arial" panose="020B0604020202020204" pitchFamily="34" charset="0"/>
+        <a:buFont typeface="Arial"/>
         <a:buChar char="•"/>
-        <a:defRPr sz="1800" kern="1200">
+        <a:defRPr sz="2000" kern="1200">
           <a:solidFill>
             <a:schemeClr val="tx1"/>
           </a:solidFill>
@@ -3304,7 +4048,7 @@
       <a:defPPr>
         <a:defRPr lang="en-US"/>
       </a:defPPr>
-      <a:lvl1pPr marL="0" algn="l" defTabSz="914400" rtl="0" eaLnBrk="1" latinLnBrk="0" hangingPunct="1">
+      <a:lvl1pPr marL="0" algn="l" defTabSz="457200" rtl="0" eaLnBrk="1" latinLnBrk="0" hangingPunct="1">
         <a:defRPr sz="1800" kern="1200">
           <a:solidFill>
             <a:schemeClr val="tx1"/>
@@ -3314,7 +4058,7 @@
           <a:cs typeface="+mn-cs"/>
         </a:defRPr>
       </a:lvl1pPr>
-      <a:lvl2pPr marL="457200" algn="l" defTabSz="914400" rtl="0" eaLnBrk="1" latinLnBrk="0" hangingPunct="1">
+      <a:lvl2pPr marL="457200" algn="l" defTabSz="457200" rtl="0" eaLnBrk="1" latinLnBrk="0" hangingPunct="1">
         <a:defRPr sz="1800" kern="1200">
           <a:solidFill>
             <a:schemeClr val="tx1"/>
@@ -3324,7 +4068,7 @@
           <a:cs typeface="+mn-cs"/>
         </a:defRPr>
       </a:lvl2pPr>
-      <a:lvl3pPr marL="914400" algn="l" defTabSz="914400" rtl="0" eaLnBrk="1" latinLnBrk="0" hangingPunct="1">
+      <a:lvl3pPr marL="914400" algn="l" defTabSz="457200" rtl="0" eaLnBrk="1" latinLnBrk="0" hangingPunct="1">
         <a:defRPr sz="1800" kern="1200">
           <a:solidFill>
             <a:schemeClr val="tx1"/>
@@ -3334,7 +4078,7 @@
           <a:cs typeface="+mn-cs"/>
         </a:defRPr>
       </a:lvl3pPr>
-      <a:lvl4pPr marL="1371600" algn="l" defTabSz="914400" rtl="0" eaLnBrk="1" latinLnBrk="0" hangingPunct="1">
+      <a:lvl4pPr marL="1371600" algn="l" defTabSz="457200" rtl="0" eaLnBrk="1" latinLnBrk="0" hangingPunct="1">
         <a:defRPr sz="1800" kern="1200">
           <a:solidFill>
             <a:schemeClr val="tx1"/>
@@ -3344,7 +4088,7 @@
           <a:cs typeface="+mn-cs"/>
         </a:defRPr>
       </a:lvl4pPr>
-      <a:lvl5pPr marL="1828800" algn="l" defTabSz="914400" rtl="0" eaLnBrk="1" latinLnBrk="0" hangingPunct="1">
+      <a:lvl5pPr marL="1828800" algn="l" defTabSz="457200" rtl="0" eaLnBrk="1" latinLnBrk="0" hangingPunct="1">
         <a:defRPr sz="1800" kern="1200">
           <a:solidFill>
             <a:schemeClr val="tx1"/>
@@ -3354,7 +4098,7 @@
           <a:cs typeface="+mn-cs"/>
         </a:defRPr>
       </a:lvl5pPr>
-      <a:lvl6pPr marL="2286000" algn="l" defTabSz="914400" rtl="0" eaLnBrk="1" latinLnBrk="0" hangingPunct="1">
+      <a:lvl6pPr marL="2286000" algn="l" defTabSz="457200" rtl="0" eaLnBrk="1" latinLnBrk="0" hangingPunct="1">
         <a:defRPr sz="1800" kern="1200">
           <a:solidFill>
             <a:schemeClr val="tx1"/>
@@ -3364,7 +4108,7 @@
           <a:cs typeface="+mn-cs"/>
         </a:defRPr>
       </a:lvl6pPr>
-      <a:lvl7pPr marL="2743200" algn="l" defTabSz="914400" rtl="0" eaLnBrk="1" latinLnBrk="0" hangingPunct="1">
+      <a:lvl7pPr marL="2743200" algn="l" defTabSz="457200" rtl="0" eaLnBrk="1" latinLnBrk="0" hangingPunct="1">
         <a:defRPr sz="1800" kern="1200">
           <a:solidFill>
             <a:schemeClr val="tx1"/>
@@ -3374,7 +4118,7 @@
           <a:cs typeface="+mn-cs"/>
         </a:defRPr>
       </a:lvl7pPr>
-      <a:lvl8pPr marL="3200400" algn="l" defTabSz="914400" rtl="0" eaLnBrk="1" latinLnBrk="0" hangingPunct="1">
+      <a:lvl8pPr marL="3200400" algn="l" defTabSz="457200" rtl="0" eaLnBrk="1" latinLnBrk="0" hangingPunct="1">
         <a:defRPr sz="1800" kern="1200">
           <a:solidFill>
             <a:schemeClr val="tx1"/>
@@ -3384,7 +4128,7 @@
           <a:cs typeface="+mn-cs"/>
         </a:defRPr>
       </a:lvl8pPr>
-      <a:lvl9pPr marL="3657600" algn="l" defTabSz="914400" rtl="0" eaLnBrk="1" latinLnBrk="0" hangingPunct="1">
+      <a:lvl9pPr marL="3657600" algn="l" defTabSz="457200" rtl="0" eaLnBrk="1" latinLnBrk="0" hangingPunct="1">
         <a:defRPr sz="1800" kern="1200">
           <a:solidFill>
             <a:schemeClr val="tx1"/>
@@ -3400,7 +4144,7 @@
 </file>
 
 <file path=ppt/slides/slide1.xml><?xml version="1.0" encoding="utf-8"?>
-<p:sld xmlns:a="http://schemas.openxmlformats.org/drawingml/2006/main" xmlns:r="http://schemas.openxmlformats.org/officeDocument/2006/relationships" xmlns:p="http://schemas.openxmlformats.org/presentationml/2006/main">
+<p:sld xmlns:a="http://schemas.openxmlformats.org/drawingml/2006/main" xmlns:p="http://schemas.openxmlformats.org/presentationml/2006/main" xmlns:r="http://schemas.openxmlformats.org/officeDocument/2006/relationships">
   <p:cSld>
     <p:spTree>
       <p:nvGrpSpPr>
@@ -3408,202 +4152,17 @@
         <p:cNvGrpSpPr/>
         <p:nvPr/>
       </p:nvGrpSpPr>
-      <p:grpSpPr>
-        <a:xfrm>
-          <a:off x="0" y="0"/>
-          <a:ext cx="0" cy="0"/>
-          <a:chOff x="0" y="0"/>
-          <a:chExt cx="0" cy="0"/>
-        </a:xfrm>
-      </p:grpSpPr>
-      <p:sp>
-        <p:nvSpPr>
-          <p:cNvPr id="2" name="Title 1">
-            <a:extLst>
-              <a:ext uri="{FF2B5EF4-FFF2-40B4-BE49-F238E27FC236}">
-                <a16:creationId xmlns:a16="http://schemas.microsoft.com/office/drawing/2014/main" id="{71432667-73F1-3F5A-2FD1-3C5E7D183BC7}"/>
-              </a:ext>
-            </a:extLst>
-          </p:cNvPr>
-          <p:cNvSpPr>
-            <a:spLocks noGrp="1"/>
-          </p:cNvSpPr>
-          <p:nvPr>
-            <p:ph type="title"/>
-          </p:nvPr>
-        </p:nvSpPr>
-        <p:spPr/>
-        <p:txBody>
-          <a:bodyPr/>
-          <a:lstStyle/>
-          <a:p>
-            <a:r>
-              <a:rPr lang="en-US">
-                <a:ea typeface="+mj-lt"/>
-                <a:cs typeface="+mj-lt"/>
-              </a:rPr>
-              <a:t>The Problem &amp; Its Real Ceiling</a:t>
-            </a:r>
-            <a:endParaRPr lang="en-US"/>
-          </a:p>
-        </p:txBody>
-      </p:sp>
-      <p:sp>
-        <p:nvSpPr>
-          <p:cNvPr id="3" name="Content Placeholder 2">
-            <a:extLst>
-              <a:ext uri="{FF2B5EF4-FFF2-40B4-BE49-F238E27FC236}">
-                <a16:creationId xmlns:a16="http://schemas.microsoft.com/office/drawing/2014/main" id="{95E37482-C396-AB2D-7856-D66B856D9BA9}"/>
-              </a:ext>
-            </a:extLst>
-          </p:cNvPr>
-          <p:cNvSpPr>
-            <a:spLocks noGrp="1"/>
-          </p:cNvSpPr>
-          <p:nvPr>
-            <p:ph idx="1"/>
-          </p:nvPr>
-        </p:nvSpPr>
-        <p:spPr/>
-        <p:txBody>
-          <a:bodyPr vert="horz" lIns="91440" tIns="45720" rIns="91440" bIns="45720" rtlCol="0" anchor="t">
-            <a:normAutofit fontScale="92500" lnSpcReduction="10000"/>
-          </a:bodyPr>
-          <a:lstStyle/>
-          <a:p>
-            <a:r>
-              <a:rPr lang="en-US">
-                <a:ea typeface="+mn-lt"/>
-                <a:cs typeface="+mn-lt"/>
-              </a:rPr>
-              <a:t>Classify public statements as </a:t>
-            </a:r>
-            <a:r>
-              <a:rPr lang="en-US" i="1">
-                <a:ea typeface="+mn-lt"/>
-                <a:cs typeface="+mn-lt"/>
-              </a:rPr>
-              <a:t>True/False</a:t>
-            </a:r>
-            <a:r>
-              <a:rPr lang="en-US">
-                <a:ea typeface="+mn-lt"/>
-                <a:cs typeface="+mn-lt"/>
-              </a:rPr>
-              <a:t> from text + metadata (speaker, party, subjects, context)</a:t>
-            </a:r>
-          </a:p>
-          <a:p>
-            <a:endParaRPr lang="en-US" dirty="0">
-              <a:ea typeface="+mn-lt"/>
-              <a:cs typeface="+mn-lt"/>
-            </a:endParaRPr>
-          </a:p>
-          <a:p>
-            <a:r>
-              <a:rPr lang="en-US">
-                <a:ea typeface="+mn-lt"/>
-                <a:cs typeface="+mn-lt"/>
-              </a:rPr>
-              <a:t>This is a low-ceiling task: </a:t>
-            </a:r>
-            <a:r>
-              <a:rPr lang="en-US" b="1">
-                <a:ea typeface="+mn-lt"/>
-                <a:cs typeface="+mn-lt"/>
-              </a:rPr>
-              <a:t>~62–69% binary accuracy</a:t>
-            </a:r>
-            <a:r>
-              <a:rPr lang="en-US">
-                <a:ea typeface="+mn-lt"/>
-                <a:cs typeface="+mn-lt"/>
-              </a:rPr>
-              <a:t> across model families and methods [1]</a:t>
-            </a:r>
-            <a:endParaRPr lang="en-US" baseline="30000"/>
-          </a:p>
-          <a:p>
-            <a:endParaRPr lang="en-US" dirty="0">
-              <a:ea typeface="+mn-lt"/>
-              <a:cs typeface="+mn-lt"/>
-            </a:endParaRPr>
-          </a:p>
-          <a:p>
-            <a:r>
-              <a:rPr lang="en-US" b="1">
-                <a:ea typeface="+mn-lt"/>
-                <a:cs typeface="+mn-lt"/>
-              </a:rPr>
-              <a:t>Why:</a:t>
-            </a:r>
-            <a:r>
-              <a:rPr lang="en-US">
-                <a:ea typeface="+mn-lt"/>
-                <a:cs typeface="+mn-lt"/>
-              </a:rPr>
-              <a:t> verifying claims needs external world knowledge the text lacks; human truth labels are judgment calls with limited agreement; some statements aren't verifiable from inputs</a:t>
-            </a:r>
-            <a:endParaRPr lang="en-US" dirty="0"/>
-          </a:p>
-          <a:p>
-            <a:endParaRPr lang="en-US" dirty="0">
-              <a:ea typeface="+mn-lt"/>
-              <a:cs typeface="+mn-lt"/>
-            </a:endParaRPr>
-          </a:p>
-          <a:p>
-            <a:r>
-              <a:rPr lang="en-US" b="1" dirty="0">
-                <a:ea typeface="+mn-lt"/>
-                <a:cs typeface="+mn-lt"/>
-              </a:rPr>
-              <a:t>Aim:</a:t>
-            </a:r>
-            <a:r>
-              <a:rPr lang="en-US" dirty="0">
-                <a:ea typeface="+mn-lt"/>
-                <a:cs typeface="+mn-lt"/>
-              </a:rPr>
-              <a:t> a principled </a:t>
-            </a:r>
-            <a:r>
-              <a:rPr lang="en-US">
-                <a:ea typeface="+mn-lt"/>
-                <a:cs typeface="+mn-lt"/>
-              </a:rPr>
-              <a:t>LLM</a:t>
-            </a:r>
-            <a:r>
-              <a:rPr lang="en-US" dirty="0">
-                <a:ea typeface="+mn-lt"/>
-                <a:cs typeface="+mn-lt"/>
-              </a:rPr>
-              <a:t>-based evaluation pipeline</a:t>
-            </a:r>
-            <a:endParaRPr lang="en-US" dirty="0"/>
-          </a:p>
-          <a:p>
-            <a:endParaRPr lang="en-US" dirty="0"/>
-          </a:p>
-        </p:txBody>
-      </p:sp>
-      <p:sp>
-        <p:nvSpPr>
-          <p:cNvPr id="5" name="TextBox 4">
-            <a:extLst>
-              <a:ext uri="{FF2B5EF4-FFF2-40B4-BE49-F238E27FC236}">
-                <a16:creationId xmlns:a16="http://schemas.microsoft.com/office/drawing/2014/main" id="{5D77565A-96AE-1BB8-EFE6-78F0DE70046C}"/>
-              </a:ext>
-            </a:extLst>
-          </p:cNvPr>
+      <p:grpSpPr/>
+      <p:sp>
+        <p:nvSpPr>
+          <p:cNvPr id="2" name="TextBox 1"/>
           <p:cNvSpPr txBox="1"/>
           <p:nvPr/>
         </p:nvSpPr>
         <p:spPr>
           <a:xfrm>
-            <a:off x="836432" y="6473137"/>
-            <a:ext cx="10515599" cy="338554"/>
+            <a:off x="502920" y="320040"/>
+            <a:ext cx="11185855" cy="914400"/>
           </a:xfrm>
           <a:prstGeom prst="rect">
             <a:avLst/>
@@ -3611,37 +4170,183 @@
           <a:noFill/>
         </p:spPr>
         <p:txBody>
-          <a:bodyPr rot="0" spcFirstLastPara="0" vertOverflow="overflow" horzOverflow="overflow" vert="horz" wrap="square" lIns="91440" tIns="45720" rIns="91440" bIns="45720" numCol="1" spcCol="0" rtlCol="0" fromWordArt="0" anchor="t" anchorCtr="0" forceAA="0" compatLnSpc="1">
-            <a:prstTxWarp prst="textNoShape">
-              <a:avLst/>
-            </a:prstTxWarp>
+          <a:bodyPr wrap="square">
             <a:spAutoFit/>
           </a:bodyPr>
           <a:lstStyle/>
           <a:p>
             <a:r>
-              <a:rPr lang="en-US" sz="1600">
-                <a:ea typeface="+mn-lt"/>
-                <a:cs typeface="+mn-lt"/>
+              <a:rPr sz="2800" b="1">
+                <a:solidFill>
+                  <a:srgbClr val="1F3A5F"/>
+                </a:solidFill>
               </a:rPr>
-              <a:t>[1] Yu et al., Open, Closed, or Small Language Models for Text Classification?, In </a:t>
-            </a:r>
-            <a:r>
-              <a:rPr lang="en-US" sz="1600" i="1">
-                <a:ea typeface="+mn-lt"/>
-                <a:cs typeface="+mn-lt"/>
+              <a:t>The Problem &amp; Its Real Ceiling</a:t>
+            </a:r>
+          </a:p>
+        </p:txBody>
+      </p:sp>
+      <p:sp>
+        <p:nvSpPr>
+          <p:cNvPr id="3" name="Rectangle 2"/>
+          <p:cNvSpPr/>
+          <p:nvPr/>
+        </p:nvSpPr>
+        <p:spPr>
+          <a:xfrm>
+            <a:off x="502920" y="1207008"/>
+            <a:ext cx="2194560" cy="38100"/>
+          </a:xfrm>
+          <a:prstGeom prst="rect">
+            <a:avLst/>
+          </a:prstGeom>
+          <a:solidFill>
+            <a:srgbClr val="2E6DA4"/>
+          </a:solidFill>
+          <a:ln>
+            <a:noFill/>
+          </a:ln>
+        </p:spPr>
+        <p:style>
+          <a:lnRef idx="1">
+            <a:schemeClr val="accent1"/>
+          </a:lnRef>
+          <a:fillRef idx="3">
+            <a:schemeClr val="accent1"/>
+          </a:fillRef>
+          <a:effectRef idx="2">
+            <a:schemeClr val="accent1"/>
+          </a:effectRef>
+          <a:fontRef idx="minor">
+            <a:schemeClr val="lt1"/>
+          </a:fontRef>
+        </p:style>
+        <p:txBody>
+          <a:bodyPr rtlCol="0" anchor="ctr"/>
+          <a:lstStyle/>
+          <a:p>
+            <a:pPr algn="ctr"/>
+          </a:p>
+        </p:txBody>
+      </p:sp>
+      <p:sp>
+        <p:nvSpPr>
+          <p:cNvPr id="4" name="TextBox 3"/>
+          <p:cNvSpPr txBox="1"/>
+          <p:nvPr/>
+        </p:nvSpPr>
+        <p:spPr>
+          <a:xfrm>
+            <a:off x="502920" y="1417320"/>
+            <a:ext cx="11185855" cy="4480560"/>
+          </a:xfrm>
+          <a:prstGeom prst="rect">
+            <a:avLst/>
+          </a:prstGeom>
+          <a:noFill/>
+        </p:spPr>
+        <p:txBody>
+          <a:bodyPr wrap="square">
+            <a:spAutoFit/>
+          </a:bodyPr>
+          <a:lstStyle/>
+          <a:p>
+            <a:pPr>
+              <a:spcAft>
+                <a:spcPts val="1000"/>
+              </a:spcAft>
+            </a:pPr>
+            <a:r>
+              <a:rPr sz="1600">
+                <a:solidFill>
+                  <a:srgbClr val="222222"/>
+                </a:solidFill>
               </a:rPr>
-              <a:t>Arxiv'23</a:t>
+              <a:t>•  Classify public statements as True / False from text + metadata (speaker, party, subjects, context).</a:t>
+            </a:r>
+          </a:p>
+          <a:p>
+            <a:pPr>
+              <a:spcAft>
+                <a:spcPts val="1000"/>
+              </a:spcAft>
+            </a:pPr>
+            <a:r>
+              <a:rPr sz="1600">
+                <a:solidFill>
+                  <a:srgbClr val="222222"/>
+                </a:solidFill>
+              </a:rPr>
+              <a:t>•  Low-ceiling task: ~62–69% binary accuracy across model families and methods.</a:t>
+            </a:r>
+          </a:p>
+          <a:p>
+            <a:pPr>
+              <a:spcAft>
+                <a:spcPts val="1000"/>
+              </a:spcAft>
+            </a:pPr>
+            <a:r>
+              <a:rPr sz="1600">
+                <a:solidFill>
+                  <a:srgbClr val="222222"/>
+                </a:solidFill>
+              </a:rPr>
+              <a:t>•  Why: verifying claims needs external world knowledge the text lacks; human truth labels are judgment calls with limited agreement; some statements aren't verifiable from inputs.</a:t>
+            </a:r>
+          </a:p>
+          <a:p>
+            <a:pPr>
+              <a:spcAft>
+                <a:spcPts val="1000"/>
+              </a:spcAft>
+            </a:pPr>
+            <a:r>
+              <a:rPr sz="1600">
+                <a:solidFill>
+                  <a:srgbClr val="222222"/>
+                </a:solidFill>
+              </a:rPr>
+              <a:t>•  Aim: a principled, honestly-evaluated system — not a vanity accuracy number.</a:t>
+            </a:r>
+          </a:p>
+        </p:txBody>
+      </p:sp>
+      <p:sp>
+        <p:nvSpPr>
+          <p:cNvPr id="5" name="TextBox 4"/>
+          <p:cNvSpPr txBox="1"/>
+          <p:nvPr/>
+        </p:nvSpPr>
+        <p:spPr>
+          <a:xfrm>
+            <a:off x="502920" y="6446520"/>
+            <a:ext cx="11185855" cy="320040"/>
+          </a:xfrm>
+          <a:prstGeom prst="rect">
+            <a:avLst/>
+          </a:prstGeom>
+          <a:noFill/>
+        </p:spPr>
+        <p:txBody>
+          <a:bodyPr wrap="none">
+            <a:spAutoFit/>
+          </a:bodyPr>
+          <a:lstStyle/>
+          <a:p>
+            <a:pPr algn="r"/>
+            <a:r>
+              <a:rPr sz="900">
+                <a:solidFill>
+                  <a:srgbClr val="7A7A7A"/>
+                </a:solidFill>
+              </a:rPr>
+              <a:t>Private &amp; Confidential</a:t>
             </a:r>
           </a:p>
         </p:txBody>
       </p:sp>
     </p:spTree>
-    <p:extLst>
-      <p:ext uri="{BB962C8B-B14F-4D97-AF65-F5344CB8AC3E}">
-        <p14:creationId xmlns:p14="http://schemas.microsoft.com/office/powerpoint/2010/main" val="1293903496"/>
-      </p:ext>
-    </p:extLst>
   </p:cSld>
   <p:clrMapOvr>
     <a:masterClrMapping/>
@@ -3650,7 +4355,7 @@
 </file>
 
 <file path=ppt/slides/slide10.xml><?xml version="1.0" encoding="utf-8"?>
-<p:sld xmlns:a="http://schemas.openxmlformats.org/drawingml/2006/main" xmlns:r="http://schemas.openxmlformats.org/officeDocument/2006/relationships" xmlns:p="http://schemas.openxmlformats.org/presentationml/2006/main">
+<p:sld xmlns:a="http://schemas.openxmlformats.org/drawingml/2006/main" xmlns:p="http://schemas.openxmlformats.org/presentationml/2006/main" xmlns:r="http://schemas.openxmlformats.org/officeDocument/2006/relationships">
   <p:cSld>
     <p:spTree>
       <p:nvGrpSpPr>
@@ -3658,39 +4363,34 @@
         <p:cNvGrpSpPr/>
         <p:nvPr/>
       </p:nvGrpSpPr>
-      <p:grpSpPr>
-        <a:xfrm>
-          <a:off x="0" y="0"/>
-          <a:ext cx="0" cy="0"/>
-          <a:chOff x="0" y="0"/>
-          <a:chExt cx="0" cy="0"/>
-        </a:xfrm>
-      </p:grpSpPr>
-      <p:sp>
-        <p:nvSpPr>
-          <p:cNvPr id="2" name="Title 1">
-            <a:extLst>
-              <a:ext uri="{FF2B5EF4-FFF2-40B4-BE49-F238E27FC236}">
-                <a16:creationId xmlns:a16="http://schemas.microsoft.com/office/drawing/2014/main" id="{F14EAF84-8D94-5B7C-751D-D9891B50FA43}"/>
-              </a:ext>
-            </a:extLst>
-          </p:cNvPr>
-          <p:cNvSpPr>
-            <a:spLocks noGrp="1"/>
-          </p:cNvSpPr>
-          <p:nvPr>
-            <p:ph type="title"/>
-          </p:nvPr>
-        </p:nvSpPr>
-        <p:spPr/>
-        <p:txBody>
-          <a:bodyPr/>
-          <a:lstStyle/>
-          <a:p>
-            <a:r>
-              <a:rPr lang="en-US">
-                <a:ea typeface="+mj-lt"/>
-                <a:cs typeface="+mj-lt"/>
+      <p:grpSpPr/>
+      <p:sp>
+        <p:nvSpPr>
+          <p:cNvPr id="2" name="TextBox 1"/>
+          <p:cNvSpPr txBox="1"/>
+          <p:nvPr/>
+        </p:nvSpPr>
+        <p:spPr>
+          <a:xfrm>
+            <a:off x="502920" y="320040"/>
+            <a:ext cx="11185855" cy="914400"/>
+          </a:xfrm>
+          <a:prstGeom prst="rect">
+            <a:avLst/>
+          </a:prstGeom>
+          <a:noFill/>
+        </p:spPr>
+        <p:txBody>
+          <a:bodyPr wrap="square">
+            <a:spAutoFit/>
+          </a:bodyPr>
+          <a:lstStyle/>
+          <a:p>
+            <a:r>
+              <a:rPr sz="2800" b="1">
+                <a:solidFill>
+                  <a:srgbClr val="1F3A5F"/>
+                </a:solidFill>
               </a:rPr>
               <a:t>Findings &amp; Future Work</a:t>
             </a:r>
@@ -3699,208 +4399,150 @@
       </p:sp>
       <p:sp>
         <p:nvSpPr>
-          <p:cNvPr id="3" name="Content Placeholder 2">
-            <a:extLst>
-              <a:ext uri="{FF2B5EF4-FFF2-40B4-BE49-F238E27FC236}">
-                <a16:creationId xmlns:a16="http://schemas.microsoft.com/office/drawing/2014/main" id="{727C79B1-C936-7839-8727-63A853487899}"/>
-              </a:ext>
-            </a:extLst>
-          </p:cNvPr>
-          <p:cNvSpPr>
-            <a:spLocks noGrp="1"/>
-          </p:cNvSpPr>
-          <p:nvPr>
-            <p:ph idx="1"/>
-          </p:nvPr>
-        </p:nvSpPr>
-        <p:spPr/>
-        <p:txBody>
-          <a:bodyPr vert="horz" lIns="91440" tIns="45720" rIns="91440" bIns="45720" rtlCol="0" anchor="t">
-            <a:normAutofit fontScale="92500"/>
+          <p:cNvPr id="3" name="Rectangle 2"/>
+          <p:cNvSpPr/>
+          <p:nvPr/>
+        </p:nvSpPr>
+        <p:spPr>
+          <a:xfrm>
+            <a:off x="502920" y="1207008"/>
+            <a:ext cx="2194560" cy="38100"/>
+          </a:xfrm>
+          <a:prstGeom prst="rect">
+            <a:avLst/>
+          </a:prstGeom>
+          <a:solidFill>
+            <a:srgbClr val="2E6DA4"/>
+          </a:solidFill>
+          <a:ln>
+            <a:noFill/>
+          </a:ln>
+        </p:spPr>
+        <p:style>
+          <a:lnRef idx="1">
+            <a:schemeClr val="accent1"/>
+          </a:lnRef>
+          <a:fillRef idx="3">
+            <a:schemeClr val="accent1"/>
+          </a:fillRef>
+          <a:effectRef idx="2">
+            <a:schemeClr val="accent1"/>
+          </a:effectRef>
+          <a:fontRef idx="minor">
+            <a:schemeClr val="lt1"/>
+          </a:fontRef>
+        </p:style>
+        <p:txBody>
+          <a:bodyPr rtlCol="0" anchor="ctr"/>
+          <a:lstStyle/>
+          <a:p>
+            <a:pPr algn="ctr"/>
+          </a:p>
+        </p:txBody>
+      </p:sp>
+      <p:sp>
+        <p:nvSpPr>
+          <p:cNvPr id="4" name="TextBox 3"/>
+          <p:cNvSpPr txBox="1"/>
+          <p:nvPr/>
+        </p:nvSpPr>
+        <p:spPr>
+          <a:xfrm>
+            <a:off x="502920" y="1417320"/>
+            <a:ext cx="11185855" cy="4480560"/>
+          </a:xfrm>
+          <a:prstGeom prst="rect">
+            <a:avLst/>
+          </a:prstGeom>
+          <a:noFill/>
+        </p:spPr>
+        <p:txBody>
+          <a:bodyPr wrap="square">
+            <a:spAutoFit/>
           </a:bodyPr>
           <a:lstStyle/>
           <a:p>
-            <a:r>
-              <a:rPr lang="en-US" b="1">
-                <a:ea typeface="+mn-lt"/>
-                <a:cs typeface="+mn-lt"/>
+            <a:pPr>
+              <a:spcAft>
+                <a:spcPts val="1000"/>
+              </a:spcAft>
+            </a:pPr>
+            <a:r>
+              <a:rPr sz="1600">
+                <a:solidFill>
+                  <a:srgbClr val="222222"/>
+                </a:solidFill>
               </a:rPr>
-              <a:t>Findings</a:t>
-            </a:r>
-            <a:r>
-              <a:rPr lang="en-US" dirty="0">
-                <a:ea typeface="+mn-lt"/>
-                <a:cs typeface="+mn-lt"/>
+              <a:t>•  Story: a low-ceiling task evaluated leakage-free; fine-tuning gave a significant accuracy gain over matched zero-shot (+0.031, p=6e-07) but NO calibration gain; post-hoc calibration is what buys confidence quality (ECE 0.316 → 0.061); the explainer showed speaker-driven predictions perform at the majority-class baseline and that self-rationales agree with the true driver only at chance.</a:t>
+            </a:r>
+          </a:p>
+          <a:p>
+            <a:pPr>
+              <a:spcAft>
+                <a:spcPts val="1000"/>
+              </a:spcAft>
+            </a:pPr>
+            <a:r>
+              <a:rPr sz="1600">
+                <a:solidFill>
+                  <a:srgbClr val="222222"/>
+                </a:solidFill>
               </a:rPr>
-              <a:t> </a:t>
-            </a:r>
-            <a:endParaRPr lang="en-US" dirty="0"/>
-          </a:p>
-          <a:p>
-            <a:pPr lvl="1">
-              <a:buFont typeface="Courier New" panose="020B0604020202020204" pitchFamily="34" charset="0"/>
-              <a:buChar char="o"/>
+              <a:t>•  Optimized for honest, defensible evaluation over a vanity number.</a:t>
+            </a:r>
+          </a:p>
+          <a:p>
+            <a:pPr>
+              <a:spcAft>
+                <a:spcPts val="1000"/>
+              </a:spcAft>
             </a:pPr>
             <a:r>
-              <a:rPr lang="en-US">
-                <a:ea typeface="+mn-lt"/>
-                <a:cs typeface="+mn-lt"/>
+              <a:rPr sz="1600">
+                <a:solidFill>
+                  <a:srgbClr val="222222"/>
+                </a:solidFill>
               </a:rPr>
-              <a:t>a low-ceiling task evaluated leakage-free </a:t>
-            </a:r>
-            <a:endParaRPr lang="en-US"/>
-          </a:p>
-          <a:p>
-            <a:pPr lvl="1">
-              <a:buFont typeface="Courier New" panose="020B0604020202020204" pitchFamily="34" charset="0"/>
-              <a:buChar char="o"/>
-            </a:pPr>
-            <a:r>
-              <a:rPr lang="en-US">
-                <a:ea typeface="+mn-lt"/>
-                <a:cs typeface="+mn-lt"/>
+              <a:t>•  Future work: logprob elicitation everywhere; richer calibration (isotonic); ensembling zero-shot + fine-tuned; production abstention from the coverage-accuracy curve; alternative elicitations (score-mode trade-off); DPO if ranked data existed.</a:t>
+            </a:r>
+          </a:p>
+        </p:txBody>
+      </p:sp>
+      <p:sp>
+        <p:nvSpPr>
+          <p:cNvPr id="5" name="TextBox 4"/>
+          <p:cNvSpPr txBox="1"/>
+          <p:nvPr/>
+        </p:nvSpPr>
+        <p:spPr>
+          <a:xfrm>
+            <a:off x="502920" y="6446520"/>
+            <a:ext cx="11185855" cy="320040"/>
+          </a:xfrm>
+          <a:prstGeom prst="rect">
+            <a:avLst/>
+          </a:prstGeom>
+          <a:noFill/>
+        </p:spPr>
+        <p:txBody>
+          <a:bodyPr wrap="none">
+            <a:spAutoFit/>
+          </a:bodyPr>
+          <a:lstStyle/>
+          <a:p>
+            <a:pPr algn="r"/>
+            <a:r>
+              <a:rPr sz="900">
+                <a:solidFill>
+                  <a:srgbClr val="7A7A7A"/>
+                </a:solidFill>
               </a:rPr>
-              <a:t>fine-tuning gave a significant accuracy gain (+3.3 pts, p&lt;0.001) over zero-shot and halved calibration error</a:t>
-            </a:r>
-          </a:p>
-          <a:p>
-            <a:pPr lvl="1">
-              <a:buFont typeface="Courier New" panose="020B0604020202020204" pitchFamily="34" charset="0"/>
-              <a:buChar char="o"/>
-            </a:pPr>
-            <a:r>
-              <a:rPr lang="en-US">
-                <a:ea typeface="+mn-lt"/>
-                <a:cs typeface="+mn-lt"/>
-              </a:rPr>
-              <a:t>the explainer exposed a speaker shortcut that hurts and showed self-rationales are unreliable</a:t>
-            </a:r>
-            <a:endParaRPr lang="en-US"/>
-          </a:p>
-          <a:p>
-            <a:endParaRPr lang="en-US" dirty="0">
-              <a:ea typeface="+mn-lt"/>
-              <a:cs typeface="+mn-lt"/>
-            </a:endParaRPr>
-          </a:p>
-          <a:p>
-            <a:r>
-              <a:rPr lang="en-US" b="1" dirty="0">
-                <a:ea typeface="+mn-lt"/>
-                <a:cs typeface="+mn-lt"/>
-              </a:rPr>
-              <a:t>Future work</a:t>
-            </a:r>
-            <a:r>
-              <a:rPr lang="en-US" dirty="0">
-                <a:ea typeface="+mn-lt"/>
-                <a:cs typeface="+mn-lt"/>
-              </a:rPr>
-              <a:t> </a:t>
-            </a:r>
-          </a:p>
-          <a:p>
-            <a:pPr lvl="1">
-              <a:buFont typeface="Courier New" panose="020B0604020202020204" pitchFamily="34" charset="0"/>
-              <a:buChar char="o"/>
-            </a:pPr>
-            <a:r>
-              <a:rPr lang="en-US" dirty="0" err="1">
-                <a:ea typeface="+mn-lt"/>
-                <a:cs typeface="+mn-lt"/>
-              </a:rPr>
-              <a:t>logprob</a:t>
-            </a:r>
-            <a:r>
-              <a:rPr lang="en-US" dirty="0">
-                <a:ea typeface="+mn-lt"/>
-                <a:cs typeface="+mn-lt"/>
-              </a:rPr>
-              <a:t> elicitation everywhere </a:t>
-            </a:r>
-          </a:p>
-          <a:p>
-            <a:pPr lvl="1">
-              <a:buFont typeface="Courier New" panose="020B0604020202020204" pitchFamily="34" charset="0"/>
-              <a:buChar char="o"/>
-            </a:pPr>
-            <a:r>
-              <a:rPr lang="en-US">
-                <a:ea typeface="+mn-lt"/>
-                <a:cs typeface="+mn-lt"/>
-              </a:rPr>
-              <a:t>richer calibration (isotonic)</a:t>
-            </a:r>
-          </a:p>
-          <a:p>
-            <a:pPr lvl="1">
-              <a:buFont typeface="Courier New" panose="020B0604020202020204" pitchFamily="34" charset="0"/>
-              <a:buChar char="o"/>
-            </a:pPr>
-            <a:r>
-              <a:rPr lang="en-US" dirty="0" err="1">
-                <a:ea typeface="+mn-lt"/>
-                <a:cs typeface="+mn-lt"/>
-              </a:rPr>
-              <a:t>ensembling</a:t>
-            </a:r>
-            <a:r>
-              <a:rPr lang="en-US" dirty="0">
-                <a:ea typeface="+mn-lt"/>
-                <a:cs typeface="+mn-lt"/>
-              </a:rPr>
-              <a:t> </a:t>
-            </a:r>
-            <a:r>
-              <a:rPr lang="en-US" i="1" dirty="0">
-                <a:ea typeface="+mn-lt"/>
-                <a:cs typeface="+mn-lt"/>
-              </a:rPr>
-              <a:t>zero-shot</a:t>
-            </a:r>
-            <a:r>
-              <a:rPr lang="en-US" dirty="0">
-                <a:ea typeface="+mn-lt"/>
-                <a:cs typeface="+mn-lt"/>
-              </a:rPr>
-              <a:t> and </a:t>
-            </a:r>
-            <a:r>
-              <a:rPr lang="en-US" i="1" dirty="0">
-                <a:ea typeface="+mn-lt"/>
-                <a:cs typeface="+mn-lt"/>
-              </a:rPr>
-              <a:t>fine-tuned</a:t>
-            </a:r>
-          </a:p>
-          <a:p>
-            <a:pPr lvl="1">
-              <a:buFont typeface="Courier New" panose="020B0604020202020204" pitchFamily="34" charset="0"/>
-              <a:buChar char="o"/>
-            </a:pPr>
-            <a:r>
-              <a:rPr lang="en-US">
-                <a:ea typeface="+mn-lt"/>
-                <a:cs typeface="+mn-lt"/>
-              </a:rPr>
-              <a:t>alternative elicitations (score-mode trade-off)</a:t>
-            </a:r>
-          </a:p>
-          <a:p>
-            <a:pPr lvl="1">
-              <a:buFont typeface="Courier New" panose="020B0604020202020204" pitchFamily="34" charset="0"/>
-              <a:buChar char="o"/>
-            </a:pPr>
-            <a:endParaRPr lang="en-US" dirty="0"/>
+              <a:t>Private &amp; Confidential</a:t>
+            </a:r>
           </a:p>
         </p:txBody>
       </p:sp>
     </p:spTree>
-    <p:extLst>
-      <p:ext uri="{BB962C8B-B14F-4D97-AF65-F5344CB8AC3E}">
-        <p14:creationId xmlns:p14="http://schemas.microsoft.com/office/powerpoint/2010/main" val="2950083633"/>
-      </p:ext>
-    </p:extLst>
   </p:cSld>
   <p:clrMapOvr>
     <a:masterClrMapping/>
@@ -3909,7 +4551,7 @@
 </file>
 
 <file path=ppt/slides/slide2.xml><?xml version="1.0" encoding="utf-8"?>
-<p:sld xmlns:a="http://schemas.openxmlformats.org/drawingml/2006/main" xmlns:r="http://schemas.openxmlformats.org/officeDocument/2006/relationships" xmlns:p="http://schemas.openxmlformats.org/presentationml/2006/main">
+<p:sld xmlns:a="http://schemas.openxmlformats.org/drawingml/2006/main" xmlns:p="http://schemas.openxmlformats.org/presentationml/2006/main" xmlns:r="http://schemas.openxmlformats.org/officeDocument/2006/relationships">
   <p:cSld>
     <p:spTree>
       <p:nvGrpSpPr>
@@ -3917,155 +4559,201 @@
         <p:cNvGrpSpPr/>
         <p:nvPr/>
       </p:nvGrpSpPr>
-      <p:grpSpPr>
-        <a:xfrm>
-          <a:off x="0" y="0"/>
-          <a:ext cx="0" cy="0"/>
-          <a:chOff x="0" y="0"/>
-          <a:chExt cx="0" cy="0"/>
-        </a:xfrm>
-      </p:grpSpPr>
-      <p:sp>
-        <p:nvSpPr>
-          <p:cNvPr id="2" name="Title 1">
-            <a:extLst>
-              <a:ext uri="{FF2B5EF4-FFF2-40B4-BE49-F238E27FC236}">
-                <a16:creationId xmlns:a16="http://schemas.microsoft.com/office/drawing/2014/main" id="{A9698A79-92EB-F052-43E4-5CA1626D9CC8}"/>
-              </a:ext>
-            </a:extLst>
-          </p:cNvPr>
-          <p:cNvSpPr>
-            <a:spLocks noGrp="1"/>
-          </p:cNvSpPr>
-          <p:nvPr>
-            <p:ph type="title"/>
-          </p:nvPr>
-        </p:nvSpPr>
-        <p:spPr/>
-        <p:txBody>
-          <a:bodyPr/>
-          <a:lstStyle/>
-          <a:p>
-            <a:r>
-              <a:rPr lang="en-US">
-                <a:ea typeface="+mj-lt"/>
-                <a:cs typeface="+mj-lt"/>
+      <p:grpSpPr/>
+      <p:sp>
+        <p:nvSpPr>
+          <p:cNvPr id="2" name="TextBox 1"/>
+          <p:cNvSpPr txBox="1"/>
+          <p:nvPr/>
+        </p:nvSpPr>
+        <p:spPr>
+          <a:xfrm>
+            <a:off x="502920" y="320040"/>
+            <a:ext cx="11185855" cy="914400"/>
+          </a:xfrm>
+          <a:prstGeom prst="rect">
+            <a:avLst/>
+          </a:prstGeom>
+          <a:noFill/>
+        </p:spPr>
+        <p:txBody>
+          <a:bodyPr wrap="square">
+            <a:spAutoFit/>
+          </a:bodyPr>
+          <a:lstStyle/>
+          <a:p>
+            <a:r>
+              <a:rPr sz="2800" b="1">
+                <a:solidFill>
+                  <a:srgbClr val="1F3A5F"/>
+                </a:solidFill>
               </a:rPr>
-              <a:t>Mapping the 6 Labels To Binary Classification</a:t>
-            </a:r>
-            <a:endParaRPr lang="en-US"/>
-          </a:p>
-        </p:txBody>
-      </p:sp>
-      <p:sp>
-        <p:nvSpPr>
-          <p:cNvPr id="3" name="Content Placeholder 2">
-            <a:extLst>
-              <a:ext uri="{FF2B5EF4-FFF2-40B4-BE49-F238E27FC236}">
-                <a16:creationId xmlns:a16="http://schemas.microsoft.com/office/drawing/2014/main" id="{E551B907-2015-8E3E-E08F-DDA1783D3E34}"/>
-              </a:ext>
-            </a:extLst>
-          </p:cNvPr>
-          <p:cNvSpPr>
-            <a:spLocks noGrp="1"/>
-          </p:cNvSpPr>
-          <p:nvPr>
-            <p:ph idx="1"/>
-          </p:nvPr>
-        </p:nvSpPr>
-        <p:spPr/>
-        <p:txBody>
-          <a:bodyPr vert="horz" lIns="91440" tIns="45720" rIns="91440" bIns="45720" rtlCol="0" anchor="t">
-            <a:normAutofit/>
+              <a:t>Target Framing: 6 Labels → Binary</a:t>
+            </a:r>
+          </a:p>
+        </p:txBody>
+      </p:sp>
+      <p:sp>
+        <p:nvSpPr>
+          <p:cNvPr id="3" name="Rectangle 2"/>
+          <p:cNvSpPr/>
+          <p:nvPr/>
+        </p:nvSpPr>
+        <p:spPr>
+          <a:xfrm>
+            <a:off x="502920" y="1207008"/>
+            <a:ext cx="2194560" cy="38100"/>
+          </a:xfrm>
+          <a:prstGeom prst="rect">
+            <a:avLst/>
+          </a:prstGeom>
+          <a:solidFill>
+            <a:srgbClr val="2E6DA4"/>
+          </a:solidFill>
+          <a:ln>
+            <a:noFill/>
+          </a:ln>
+        </p:spPr>
+        <p:style>
+          <a:lnRef idx="1">
+            <a:schemeClr val="accent1"/>
+          </a:lnRef>
+          <a:fillRef idx="3">
+            <a:schemeClr val="accent1"/>
+          </a:fillRef>
+          <a:effectRef idx="2">
+            <a:schemeClr val="accent1"/>
+          </a:effectRef>
+          <a:fontRef idx="minor">
+            <a:schemeClr val="lt1"/>
+          </a:fontRef>
+        </p:style>
+        <p:txBody>
+          <a:bodyPr rtlCol="0" anchor="ctr"/>
+          <a:lstStyle/>
+          <a:p>
+            <a:pPr algn="ctr"/>
+          </a:p>
+        </p:txBody>
+      </p:sp>
+      <p:sp>
+        <p:nvSpPr>
+          <p:cNvPr id="4" name="TextBox 3"/>
+          <p:cNvSpPr txBox="1"/>
+          <p:nvPr/>
+        </p:nvSpPr>
+        <p:spPr>
+          <a:xfrm>
+            <a:off x="502920" y="1417320"/>
+            <a:ext cx="11185855" cy="4480560"/>
+          </a:xfrm>
+          <a:prstGeom prst="rect">
+            <a:avLst/>
+          </a:prstGeom>
+          <a:noFill/>
+        </p:spPr>
+        <p:txBody>
+          <a:bodyPr wrap="square">
+            <a:spAutoFit/>
           </a:bodyPr>
           <a:lstStyle/>
           <a:p>
-            <a:r>
-              <a:rPr lang="en-US">
-                <a:ea typeface="+mn-lt"/>
-                <a:cs typeface="+mn-lt"/>
+            <a:pPr>
+              <a:spcAft>
+                <a:spcPts val="1000"/>
+              </a:spcAft>
+            </a:pPr>
+            <a:r>
+              <a:rPr sz="1600">
+                <a:solidFill>
+                  <a:srgbClr val="222222"/>
+                </a:solidFill>
               </a:rPr>
-              <a:t>Source: 6 ordinal truthfulness levels</a:t>
-            </a:r>
-            <a:endParaRPr lang="en-US"/>
-          </a:p>
-          <a:p>
-            <a:endParaRPr lang="en-US" dirty="0">
-              <a:ea typeface="+mn-lt"/>
-              <a:cs typeface="+mn-lt"/>
-            </a:endParaRPr>
-          </a:p>
-          <a:p>
-            <a:r>
-              <a:rPr lang="en-US" b="1">
-                <a:ea typeface="+mn-lt"/>
-                <a:cs typeface="+mn-lt"/>
+              <a:t>•  Source: 6 ordinal truthfulness levels.</a:t>
+            </a:r>
+          </a:p>
+          <a:p>
+            <a:pPr>
+              <a:spcAft>
+                <a:spcPts val="1000"/>
+              </a:spcAft>
+            </a:pPr>
+            <a:r>
+              <a:rPr sz="1600">
+                <a:solidFill>
+                  <a:srgbClr val="222222"/>
+                </a:solidFill>
               </a:rPr>
-              <a:t>Middle split:</a:t>
-            </a:r>
-            <a:r>
-              <a:rPr lang="en-US">
-                <a:ea typeface="+mn-lt"/>
-                <a:cs typeface="+mn-lt"/>
+              <a:t>•  Middle split: 3 truer → True, 3 falser → False.</a:t>
+            </a:r>
+          </a:p>
+          <a:p>
+            <a:pPr>
+              <a:spcAft>
+                <a:spcPts val="1000"/>
+              </a:spcAft>
+            </a:pPr>
+            <a:r>
+              <a:rPr sz="1600">
+                <a:solidFill>
+                  <a:srgbClr val="222222"/>
+                </a:solidFill>
               </a:rPr>
-              <a:t> 3 truer → True, 3 falser → False</a:t>
-            </a:r>
-            <a:endParaRPr lang="en-US"/>
-          </a:p>
-          <a:p>
-            <a:endParaRPr lang="en-US" dirty="0">
-              <a:ea typeface="+mn-lt"/>
-              <a:cs typeface="+mn-lt"/>
-            </a:endParaRPr>
-          </a:p>
-          <a:p>
-            <a:r>
-              <a:rPr lang="en-US" b="1">
-                <a:ea typeface="+mn-lt"/>
-                <a:cs typeface="+mn-lt"/>
+              <a:t>•  Why: near-balanced target (≈56/44) keeps accuracy meaningful, no majority-class shortcut.</a:t>
+            </a:r>
+          </a:p>
+          <a:p>
+            <a:pPr>
+              <a:spcAft>
+                <a:spcPts val="1000"/>
+              </a:spcAft>
+            </a:pPr>
+            <a:r>
+              <a:rPr sz="1600">
+                <a:solidFill>
+                  <a:srgbClr val="222222"/>
+                </a:solidFill>
               </a:rPr>
-              <a:t>Why:</a:t>
-            </a:r>
-            <a:r>
-              <a:rPr lang="en-US">
-                <a:ea typeface="+mn-lt"/>
-                <a:cs typeface="+mn-lt"/>
+              <a:t>•  Sensitivity check: moving ambiguous "half-true" to False leaves conclusions unchanged.</a:t>
+            </a:r>
+          </a:p>
+        </p:txBody>
+      </p:sp>
+      <p:sp>
+        <p:nvSpPr>
+          <p:cNvPr id="5" name="TextBox 4"/>
+          <p:cNvSpPr txBox="1"/>
+          <p:nvPr/>
+        </p:nvSpPr>
+        <p:spPr>
+          <a:xfrm>
+            <a:off x="502920" y="6446520"/>
+            <a:ext cx="11185855" cy="320040"/>
+          </a:xfrm>
+          <a:prstGeom prst="rect">
+            <a:avLst/>
+          </a:prstGeom>
+          <a:noFill/>
+        </p:spPr>
+        <p:txBody>
+          <a:bodyPr wrap="none">
+            <a:spAutoFit/>
+          </a:bodyPr>
+          <a:lstStyle/>
+          <a:p>
+            <a:pPr algn="r"/>
+            <a:r>
+              <a:rPr sz="900">
+                <a:solidFill>
+                  <a:srgbClr val="7A7A7A"/>
+                </a:solidFill>
               </a:rPr>
-              <a:t> near-balanced target (≈56/44) keeps accuracy meaningful, no majority-class</a:t>
-            </a:r>
-            <a:endParaRPr lang="en-US"/>
-          </a:p>
-          <a:p>
-            <a:endParaRPr lang="en-US" dirty="0">
-              <a:ea typeface="+mn-lt"/>
-              <a:cs typeface="+mn-lt"/>
-            </a:endParaRPr>
-          </a:p>
-          <a:p>
-            <a:r>
-              <a:rPr lang="en-US" b="1">
-                <a:ea typeface="+mn-lt"/>
-                <a:cs typeface="+mn-lt"/>
-              </a:rPr>
-              <a:t>Sensitivity check:</a:t>
-            </a:r>
-            <a:r>
-              <a:rPr lang="en-US">
-                <a:ea typeface="+mn-lt"/>
-                <a:cs typeface="+mn-lt"/>
-              </a:rPr>
-              <a:t> moving ambiguous "half-true" to False leaves conclusions unchanged</a:t>
-            </a:r>
-            <a:endParaRPr lang="en-US"/>
+              <a:t>Private &amp; Confidential</a:t>
+            </a:r>
           </a:p>
         </p:txBody>
       </p:sp>
     </p:spTree>
-    <p:extLst>
-      <p:ext uri="{BB962C8B-B14F-4D97-AF65-F5344CB8AC3E}">
-        <p14:creationId xmlns:p14="http://schemas.microsoft.com/office/powerpoint/2010/main" val="3266473572"/>
-      </p:ext>
-    </p:extLst>
   </p:cSld>
   <p:clrMapOvr>
     <a:masterClrMapping/>
@@ -4074,7 +4762,7 @@
 </file>
 
 <file path=ppt/slides/slide3.xml><?xml version="1.0" encoding="utf-8"?>
-<p:sld xmlns:a="http://schemas.openxmlformats.org/drawingml/2006/main" xmlns:r="http://schemas.openxmlformats.org/officeDocument/2006/relationships" xmlns:p="http://schemas.openxmlformats.org/presentationml/2006/main">
+<p:sld xmlns:a="http://schemas.openxmlformats.org/drawingml/2006/main" xmlns:p="http://schemas.openxmlformats.org/presentationml/2006/main" xmlns:r="http://schemas.openxmlformats.org/officeDocument/2006/relationships">
   <p:cSld>
     <p:spTree>
       <p:nvGrpSpPr>
@@ -4082,244 +4770,169 @@
         <p:cNvGrpSpPr/>
         <p:nvPr/>
       </p:nvGrpSpPr>
-      <p:grpSpPr>
-        <a:xfrm>
-          <a:off x="0" y="0"/>
-          <a:ext cx="0" cy="0"/>
-          <a:chOff x="0" y="0"/>
-          <a:chExt cx="0" cy="0"/>
-        </a:xfrm>
-      </p:grpSpPr>
-      <p:sp>
-        <p:nvSpPr>
-          <p:cNvPr id="2" name="Title 1">
-            <a:extLst>
-              <a:ext uri="{FF2B5EF4-FFF2-40B4-BE49-F238E27FC236}">
-                <a16:creationId xmlns:a16="http://schemas.microsoft.com/office/drawing/2014/main" id="{BA3D9533-9AC4-326D-04FD-A2B9EB4E583A}"/>
-              </a:ext>
-            </a:extLst>
-          </p:cNvPr>
-          <p:cNvSpPr>
-            <a:spLocks noGrp="1"/>
-          </p:cNvSpPr>
-          <p:nvPr>
-            <p:ph type="title"/>
-          </p:nvPr>
-        </p:nvSpPr>
-        <p:spPr/>
-        <p:txBody>
-          <a:bodyPr/>
-          <a:lstStyle/>
-          <a:p>
-            <a:r>
-              <a:rPr lang="en-US">
-                <a:ea typeface="+mj-lt"/>
-                <a:cs typeface="+mj-lt"/>
+      <p:grpSpPr/>
+      <p:sp>
+        <p:nvSpPr>
+          <p:cNvPr id="2" name="TextBox 1"/>
+          <p:cNvSpPr txBox="1"/>
+          <p:nvPr/>
+        </p:nvSpPr>
+        <p:spPr>
+          <a:xfrm>
+            <a:off x="502920" y="320040"/>
+            <a:ext cx="11185855" cy="914400"/>
+          </a:xfrm>
+          <a:prstGeom prst="rect">
+            <a:avLst/>
+          </a:prstGeom>
+          <a:noFill/>
+        </p:spPr>
+        <p:txBody>
+          <a:bodyPr wrap="square">
+            <a:spAutoFit/>
+          </a:bodyPr>
+          <a:lstStyle/>
+          <a:p>
+            <a:r>
+              <a:rPr sz="2800" b="1">
+                <a:solidFill>
+                  <a:srgbClr val="1F3A5F"/>
+                </a:solidFill>
               </a:rPr>
-              <a:t>Data Integrity: Split That Prevents Cheating</a:t>
-            </a:r>
-            <a:endParaRPr lang="en-US"/>
-          </a:p>
-        </p:txBody>
-      </p:sp>
-      <p:sp>
-        <p:nvSpPr>
-          <p:cNvPr id="3" name="Content Placeholder 2">
-            <a:extLst>
-              <a:ext uri="{FF2B5EF4-FFF2-40B4-BE49-F238E27FC236}">
-                <a16:creationId xmlns:a16="http://schemas.microsoft.com/office/drawing/2014/main" id="{4AD5936E-3B08-06B8-EBFD-26785DFA4D70}"/>
-              </a:ext>
-            </a:extLst>
-          </p:cNvPr>
-          <p:cNvSpPr>
-            <a:spLocks noGrp="1"/>
-          </p:cNvSpPr>
-          <p:nvPr>
-            <p:ph idx="1"/>
-          </p:nvPr>
-        </p:nvSpPr>
-        <p:spPr/>
-        <p:txBody>
-          <a:bodyPr vert="horz" lIns="91440" tIns="45720" rIns="91440" bIns="45720" rtlCol="0" anchor="t">
-            <a:normAutofit fontScale="77500" lnSpcReduction="20000"/>
+              <a:t>Data Integrity: The Split That Prevents Cheating</a:t>
+            </a:r>
+          </a:p>
+        </p:txBody>
+      </p:sp>
+      <p:sp>
+        <p:nvSpPr>
+          <p:cNvPr id="3" name="Rectangle 2"/>
+          <p:cNvSpPr/>
+          <p:nvPr/>
+        </p:nvSpPr>
+        <p:spPr>
+          <a:xfrm>
+            <a:off x="502920" y="1207008"/>
+            <a:ext cx="2194560" cy="38100"/>
+          </a:xfrm>
+          <a:prstGeom prst="rect">
+            <a:avLst/>
+          </a:prstGeom>
+          <a:solidFill>
+            <a:srgbClr val="2E6DA4"/>
+          </a:solidFill>
+          <a:ln>
+            <a:noFill/>
+          </a:ln>
+        </p:spPr>
+        <p:style>
+          <a:lnRef idx="1">
+            <a:schemeClr val="accent1"/>
+          </a:lnRef>
+          <a:fillRef idx="3">
+            <a:schemeClr val="accent1"/>
+          </a:fillRef>
+          <a:effectRef idx="2">
+            <a:schemeClr val="accent1"/>
+          </a:effectRef>
+          <a:fontRef idx="minor">
+            <a:schemeClr val="lt1"/>
+          </a:fontRef>
+        </p:style>
+        <p:txBody>
+          <a:bodyPr rtlCol="0" anchor="ctr"/>
+          <a:lstStyle/>
+          <a:p>
+            <a:pPr algn="ctr"/>
+          </a:p>
+        </p:txBody>
+      </p:sp>
+      <p:sp>
+        <p:nvSpPr>
+          <p:cNvPr id="4" name="TextBox 3"/>
+          <p:cNvSpPr txBox="1"/>
+          <p:nvPr/>
+        </p:nvSpPr>
+        <p:spPr>
+          <a:xfrm>
+            <a:off x="502920" y="1417320"/>
+            <a:ext cx="5669280" cy="4480560"/>
+          </a:xfrm>
+          <a:prstGeom prst="rect">
+            <a:avLst/>
+          </a:prstGeom>
+          <a:noFill/>
+        </p:spPr>
+        <p:txBody>
+          <a:bodyPr wrap="square">
+            <a:spAutoFit/>
           </a:bodyPr>
           <a:lstStyle/>
           <a:p>
-            <a:r>
-              <a:rPr lang="en-US" b="1" dirty="0">
-                <a:ea typeface="+mn-lt"/>
-                <a:cs typeface="+mn-lt"/>
+            <a:pPr>
+              <a:spcAft>
+                <a:spcPts val="1000"/>
+              </a:spcAft>
+            </a:pPr>
+            <a:r>
+              <a:rPr sz="1600">
+                <a:solidFill>
+                  <a:srgbClr val="222222"/>
+                </a:solidFill>
               </a:rPr>
-              <a:t>Naive random splits leak:</a:t>
-            </a:r>
-            <a:r>
-              <a:rPr lang="en-US" dirty="0">
-                <a:ea typeface="+mn-lt"/>
-                <a:cs typeface="+mn-lt"/>
+              <a:t>•  Naive random splits leak: frequent speakers appear in train and test → model learns "this person lies", not the claim.</a:t>
+            </a:r>
+          </a:p>
+          <a:p>
+            <a:pPr>
+              <a:spcAft>
+                <a:spcPts val="1000"/>
+              </a:spcAft>
+            </a:pPr>
+            <a:r>
+              <a:rPr sz="1600">
+                <a:solidFill>
+                  <a:srgbClr val="222222"/>
+                </a:solidFill>
               </a:rPr>
-              <a:t> frequent speakers appear in train and test → model learns "this person lies" not the claim</a:t>
-            </a:r>
-          </a:p>
-          <a:p>
-            <a:endParaRPr lang="en-US" dirty="0">
-              <a:ea typeface="+mn-lt"/>
-              <a:cs typeface="+mn-lt"/>
-            </a:endParaRPr>
-          </a:p>
-          <a:p>
-            <a:r>
-              <a:rPr lang="en-US" b="1">
-                <a:ea typeface="+mn-lt"/>
-                <a:cs typeface="+mn-lt"/>
+              <a:t>•  My split: speaker-disjoint AND near-duplicate-disjoint (union-find) — no speaker or near-identical statement spans two splits.</a:t>
+            </a:r>
+          </a:p>
+          <a:p>
+            <a:pPr>
+              <a:spcAft>
+                <a:spcPts val="1000"/>
+              </a:spcAft>
+            </a:pPr>
+            <a:r>
+              <a:rPr sz="1600">
+                <a:solidFill>
+                  <a:srgbClr val="222222"/>
+                </a:solidFill>
               </a:rPr>
-              <a:t>My split </a:t>
-            </a:r>
-            <a:r>
-              <a:rPr lang="en-US">
-                <a:ea typeface="+mn-lt"/>
-                <a:cs typeface="+mn-lt"/>
+              <a:t>•  Dropped contradictory duplicates (identical text, conflicting labels).</a:t>
+            </a:r>
+          </a:p>
+          <a:p>
+            <a:pPr>
+              <a:spcAft>
+                <a:spcPts val="1000"/>
+              </a:spcAft>
+            </a:pPr>
+            <a:r>
+              <a:rPr sz="1600">
+                <a:solidFill>
+                  <a:srgbClr val="222222"/>
+                </a:solidFill>
               </a:rPr>
-              <a:t>is the </a:t>
-            </a:r>
-            <a:br>
-              <a:rPr lang="en-US" dirty="0">
-                <a:ea typeface="+mn-lt"/>
-                <a:cs typeface="+mn-lt"/>
-              </a:rPr>
-            </a:br>
-            <a:r>
-              <a:rPr lang="en-US">
-                <a:ea typeface="+mn-lt"/>
-                <a:cs typeface="+mn-lt"/>
-              </a:rPr>
-              <a:t>following:</a:t>
-            </a:r>
-          </a:p>
-          <a:p>
-            <a:endParaRPr lang="en-US" dirty="0">
-              <a:ea typeface="+mn-lt"/>
-              <a:cs typeface="+mn-lt"/>
-            </a:endParaRPr>
-          </a:p>
-          <a:p>
-            <a:endParaRPr lang="en-US" dirty="0">
-              <a:ea typeface="+mn-lt"/>
-              <a:cs typeface="+mn-lt"/>
-            </a:endParaRPr>
-          </a:p>
-          <a:p>
-            <a:endParaRPr lang="en-US" dirty="0">
-              <a:ea typeface="+mn-lt"/>
-              <a:cs typeface="+mn-lt"/>
-            </a:endParaRPr>
-          </a:p>
-          <a:p>
-            <a:endParaRPr lang="en-US" dirty="0">
-              <a:ea typeface="+mn-lt"/>
-              <a:cs typeface="+mn-lt"/>
-            </a:endParaRPr>
-          </a:p>
-          <a:p>
-            <a:r>
-              <a:rPr lang="en-US">
-                <a:ea typeface="+mn-lt"/>
-                <a:cs typeface="+mn-lt"/>
-              </a:rPr>
-              <a:t>Dropped contradictory duplicates (identical text, conflicting labels) </a:t>
-            </a:r>
-          </a:p>
-          <a:p>
-            <a:endParaRPr lang="en-US" dirty="0">
-              <a:ea typeface="+mn-lt"/>
-              <a:cs typeface="+mn-lt"/>
-            </a:endParaRPr>
-          </a:p>
-          <a:p>
-            <a:r>
-              <a:rPr lang="en-US" dirty="0">
-                <a:ea typeface="+mn-lt"/>
-                <a:cs typeface="+mn-lt"/>
-              </a:rPr>
-              <a:t>Train </a:t>
-            </a:r>
-            <a:r>
-              <a:rPr lang="en-US" b="1" dirty="0">
-                <a:ea typeface="+mn-lt"/>
-                <a:cs typeface="+mn-lt"/>
-              </a:rPr>
-              <a:t>5710 </a:t>
-            </a:r>
-            <a:r>
-              <a:rPr lang="en-US" dirty="0">
-                <a:ea typeface="+mn-lt"/>
-                <a:cs typeface="+mn-lt"/>
-              </a:rPr>
-              <a:t>/ Val </a:t>
-            </a:r>
-            <a:r>
-              <a:rPr lang="en-US" b="1" dirty="0">
-                <a:ea typeface="+mn-lt"/>
-                <a:cs typeface="+mn-lt"/>
-              </a:rPr>
-              <a:t>1917</a:t>
-            </a:r>
-            <a:r>
-              <a:rPr lang="en-US" dirty="0">
-                <a:ea typeface="+mn-lt"/>
-                <a:cs typeface="+mn-lt"/>
-              </a:rPr>
-              <a:t> / </a:t>
-            </a:r>
-            <a:r>
-              <a:rPr lang="en-US">
-                <a:ea typeface="+mn-lt"/>
-                <a:cs typeface="+mn-lt"/>
-              </a:rPr>
-              <a:t>Test </a:t>
-            </a:r>
-            <a:r>
-              <a:rPr lang="en-US" b="1">
-                <a:ea typeface="+mn-lt"/>
-                <a:cs typeface="+mn-lt"/>
-              </a:rPr>
-              <a:t>1991</a:t>
-            </a:r>
-            <a:br>
-              <a:rPr lang="en-US" dirty="0">
-                <a:ea typeface="+mn-lt"/>
-                <a:cs typeface="+mn-lt"/>
-              </a:rPr>
-            </a:br>
-            <a:r>
-              <a:rPr lang="en-US">
-                <a:ea typeface="+mn-lt"/>
-                <a:cs typeface="+mn-lt"/>
-              </a:rPr>
-              <a:t>Exhibits matched balance (True-rate 0.57 / </a:t>
-            </a:r>
-            <a:r>
-              <a:rPr lang="en-US" dirty="0">
-                <a:ea typeface="+mn-lt"/>
-                <a:cs typeface="+mn-lt"/>
-              </a:rPr>
-              <a:t>0.55 / 0.53)</a:t>
-            </a:r>
-            <a:endParaRPr lang="en-US"/>
-          </a:p>
-          <a:p>
-            <a:endParaRPr lang="en-US" dirty="0"/>
+              <a:t>•  Train 5,710 / Val 1,917 / Test 1,991; matched balance (True-rate 0.57 / 0.55 / 0.53).</a:t>
+            </a:r>
           </a:p>
         </p:txBody>
       </p:sp>
       <p:pic>
         <p:nvPicPr>
-          <p:cNvPr id="4" name="Picture 3" descr="split.png">
-            <a:extLst>
-              <a:ext uri="{FF2B5EF4-FFF2-40B4-BE49-F238E27FC236}">
-                <a16:creationId xmlns:a16="http://schemas.microsoft.com/office/drawing/2014/main" id="{1329FDAF-8C84-E81A-22C7-7F943E873EFD}"/>
-              </a:ext>
-            </a:extLst>
-          </p:cNvPr>
+          <p:cNvPr id="5" name="Picture 4" descr="split.png"/>
           <p:cNvPicPr>
             <a:picLocks noChangeAspect="1"/>
           </p:cNvPicPr>
@@ -4327,27 +4940,55 @@
         </p:nvPicPr>
         <p:blipFill>
           <a:blip r:embed="rId2"/>
-          <a:srcRect b="276"/>
           <a:stretch>
             <a:fillRect/>
           </a:stretch>
         </p:blipFill>
         <p:spPr>
           <a:xfrm>
-            <a:off x="2946854" y="2508932"/>
-            <a:ext cx="6298293" cy="2130394"/>
+            <a:off x="1737360" y="4206240"/>
+            <a:ext cx="8686800" cy="2972008"/>
           </a:xfrm>
           <a:prstGeom prst="rect">
             <a:avLst/>
           </a:prstGeom>
         </p:spPr>
       </p:pic>
+      <p:sp>
+        <p:nvSpPr>
+          <p:cNvPr id="6" name="TextBox 5"/>
+          <p:cNvSpPr txBox="1"/>
+          <p:nvPr/>
+        </p:nvSpPr>
+        <p:spPr>
+          <a:xfrm>
+            <a:off x="502920" y="6446520"/>
+            <a:ext cx="11185855" cy="320040"/>
+          </a:xfrm>
+          <a:prstGeom prst="rect">
+            <a:avLst/>
+          </a:prstGeom>
+          <a:noFill/>
+        </p:spPr>
+        <p:txBody>
+          <a:bodyPr wrap="none">
+            <a:spAutoFit/>
+          </a:bodyPr>
+          <a:lstStyle/>
+          <a:p>
+            <a:pPr algn="r"/>
+            <a:r>
+              <a:rPr sz="900">
+                <a:solidFill>
+                  <a:srgbClr val="7A7A7A"/>
+                </a:solidFill>
+              </a:rPr>
+              <a:t>Private &amp; Confidential</a:t>
+            </a:r>
+          </a:p>
+        </p:txBody>
+      </p:sp>
     </p:spTree>
-    <p:extLst>
-      <p:ext uri="{BB962C8B-B14F-4D97-AF65-F5344CB8AC3E}">
-        <p14:creationId xmlns:p14="http://schemas.microsoft.com/office/powerpoint/2010/main" val="2311857377"/>
-      </p:ext>
-    </p:extLst>
   </p:cSld>
   <p:clrMapOvr>
     <a:masterClrMapping/>
@@ -4356,7 +4997,7 @@
 </file>
 
 <file path=ppt/slides/slide4.xml><?xml version="1.0" encoding="utf-8"?>
-<p:sld xmlns:a="http://schemas.openxmlformats.org/drawingml/2006/main" xmlns:r="http://schemas.openxmlformats.org/officeDocument/2006/relationships" xmlns:p="http://schemas.openxmlformats.org/presentationml/2006/main">
+<p:sld xmlns:a="http://schemas.openxmlformats.org/drawingml/2006/main" xmlns:p="http://schemas.openxmlformats.org/presentationml/2006/main" xmlns:r="http://schemas.openxmlformats.org/officeDocument/2006/relationships">
   <p:cSld>
     <p:spTree>
       <p:nvGrpSpPr>
@@ -4364,188 +5005,201 @@
         <p:cNvGrpSpPr/>
         <p:nvPr/>
       </p:nvGrpSpPr>
-      <p:grpSpPr>
-        <a:xfrm>
-          <a:off x="0" y="0"/>
-          <a:ext cx="0" cy="0"/>
-          <a:chOff x="0" y="0"/>
-          <a:chExt cx="0" cy="0"/>
-        </a:xfrm>
-      </p:grpSpPr>
-      <p:sp>
-        <p:nvSpPr>
-          <p:cNvPr id="2" name="Title 1">
-            <a:extLst>
-              <a:ext uri="{FF2B5EF4-FFF2-40B4-BE49-F238E27FC236}">
-                <a16:creationId xmlns:a16="http://schemas.microsoft.com/office/drawing/2014/main" id="{EFAB4B10-DACB-02E4-AB49-A3B91958DA37}"/>
-              </a:ext>
-            </a:extLst>
-          </p:cNvPr>
-          <p:cNvSpPr>
-            <a:spLocks noGrp="1"/>
-          </p:cNvSpPr>
-          <p:nvPr>
-            <p:ph type="title"/>
-          </p:nvPr>
-        </p:nvSpPr>
-        <p:spPr/>
-        <p:txBody>
-          <a:bodyPr/>
-          <a:lstStyle/>
-          <a:p>
-            <a:r>
-              <a:rPr lang="en-US">
-                <a:ea typeface="+mj-lt"/>
-                <a:cs typeface="+mj-lt"/>
+      <p:grpSpPr/>
+      <p:sp>
+        <p:nvSpPr>
+          <p:cNvPr id="2" name="TextBox 1"/>
+          <p:cNvSpPr txBox="1"/>
+          <p:nvPr/>
+        </p:nvSpPr>
+        <p:spPr>
+          <a:xfrm>
+            <a:off x="502920" y="320040"/>
+            <a:ext cx="11185855" cy="914400"/>
+          </a:xfrm>
+          <a:prstGeom prst="rect">
+            <a:avLst/>
+          </a:prstGeom>
+          <a:noFill/>
+        </p:spPr>
+        <p:txBody>
+          <a:bodyPr wrap="square">
+            <a:spAutoFit/>
+          </a:bodyPr>
+          <a:lstStyle/>
+          <a:p>
+            <a:r>
+              <a:rPr sz="2800" b="1">
+                <a:solidFill>
+                  <a:srgbClr val="1F3A5F"/>
+                </a:solidFill>
               </a:rPr>
               <a:t>Evaluation Methodology: Metrics &amp; Protocol</a:t>
             </a:r>
-            <a:endParaRPr lang="en-US"/>
-          </a:p>
-        </p:txBody>
-      </p:sp>
-      <p:sp>
-        <p:nvSpPr>
-          <p:cNvPr id="3" name="Content Placeholder 2">
-            <a:extLst>
-              <a:ext uri="{FF2B5EF4-FFF2-40B4-BE49-F238E27FC236}">
-                <a16:creationId xmlns:a16="http://schemas.microsoft.com/office/drawing/2014/main" id="{7D75D99F-9AE2-9EAC-58C0-B13C8A64A6B6}"/>
-              </a:ext>
-            </a:extLst>
-          </p:cNvPr>
-          <p:cNvSpPr>
-            <a:spLocks noGrp="1"/>
-          </p:cNvSpPr>
-          <p:nvPr>
-            <p:ph idx="1"/>
-          </p:nvPr>
-        </p:nvSpPr>
-        <p:spPr/>
-        <p:txBody>
-          <a:bodyPr vert="horz" lIns="91440" tIns="45720" rIns="91440" bIns="45720" rtlCol="0" anchor="t">
-            <a:normAutofit/>
+          </a:p>
+        </p:txBody>
+      </p:sp>
+      <p:sp>
+        <p:nvSpPr>
+          <p:cNvPr id="3" name="Rectangle 2"/>
+          <p:cNvSpPr/>
+          <p:nvPr/>
+        </p:nvSpPr>
+        <p:spPr>
+          <a:xfrm>
+            <a:off x="502920" y="1207008"/>
+            <a:ext cx="2194560" cy="38100"/>
+          </a:xfrm>
+          <a:prstGeom prst="rect">
+            <a:avLst/>
+          </a:prstGeom>
+          <a:solidFill>
+            <a:srgbClr val="2E6DA4"/>
+          </a:solidFill>
+          <a:ln>
+            <a:noFill/>
+          </a:ln>
+        </p:spPr>
+        <p:style>
+          <a:lnRef idx="1">
+            <a:schemeClr val="accent1"/>
+          </a:lnRef>
+          <a:fillRef idx="3">
+            <a:schemeClr val="accent1"/>
+          </a:fillRef>
+          <a:effectRef idx="2">
+            <a:schemeClr val="accent1"/>
+          </a:effectRef>
+          <a:fontRef idx="minor">
+            <a:schemeClr val="lt1"/>
+          </a:fontRef>
+        </p:style>
+        <p:txBody>
+          <a:bodyPr rtlCol="0" anchor="ctr"/>
+          <a:lstStyle/>
+          <a:p>
+            <a:pPr algn="ctr"/>
+          </a:p>
+        </p:txBody>
+      </p:sp>
+      <p:sp>
+        <p:nvSpPr>
+          <p:cNvPr id="4" name="TextBox 3"/>
+          <p:cNvSpPr txBox="1"/>
+          <p:nvPr/>
+        </p:nvSpPr>
+        <p:spPr>
+          <a:xfrm>
+            <a:off x="502920" y="1417320"/>
+            <a:ext cx="11185855" cy="4480560"/>
+          </a:xfrm>
+          <a:prstGeom prst="rect">
+            <a:avLst/>
+          </a:prstGeom>
+          <a:noFill/>
+        </p:spPr>
+        <p:txBody>
+          <a:bodyPr wrap="square">
+            <a:spAutoFit/>
           </a:bodyPr>
           <a:lstStyle/>
           <a:p>
-            <a:r>
-              <a:rPr lang="en-US">
-                <a:ea typeface="+mn-lt"/>
-                <a:cs typeface="+mn-lt"/>
+            <a:pPr>
+              <a:spcAft>
+                <a:spcPts val="1000"/>
+              </a:spcAft>
+            </a:pPr>
+            <a:r>
+              <a:rPr sz="1600">
+                <a:solidFill>
+                  <a:srgbClr val="222222"/>
+                </a:solidFill>
               </a:rPr>
-              <a:t>Beyond simple </a:t>
-            </a:r>
-            <a:r>
-              <a:rPr lang="en-US" i="1">
-                <a:ea typeface="+mn-lt"/>
-                <a:cs typeface="+mn-lt"/>
+              <a:t>•  Beyond accuracy: balanced accuracy, macro-F1, ROC/PR-AUC, and calibration (Brier + ECE).</a:t>
+            </a:r>
+          </a:p>
+          <a:p>
+            <a:pPr>
+              <a:spcAft>
+                <a:spcPts val="1000"/>
+              </a:spcAft>
+            </a:pPr>
+            <a:r>
+              <a:rPr sz="1600">
+                <a:solidFill>
+                  <a:srgbClr val="222222"/>
+                </a:solidFill>
               </a:rPr>
-              <a:t>accuracy</a:t>
-            </a:r>
-            <a:r>
-              <a:rPr lang="en-US">
-                <a:ea typeface="+mn-lt"/>
-                <a:cs typeface="+mn-lt"/>
+              <a:t>•  Cost asymmetry: a false positive (falsehood labelled True) lets misinformation through — the costlier error; threshold can reflect that.</a:t>
+            </a:r>
+          </a:p>
+          <a:p>
+            <a:pPr>
+              <a:spcAft>
+                <a:spcPts val="1000"/>
+              </a:spcAft>
+            </a:pPr>
+            <a:r>
+              <a:rPr sz="1600">
+                <a:solidFill>
+                  <a:srgbClr val="222222"/>
+                </a:solidFill>
               </a:rPr>
-              <a:t>: </a:t>
-            </a:r>
-            <a:r>
-              <a:rPr lang="en-US" i="1">
-                <a:ea typeface="+mn-lt"/>
-                <a:cs typeface="+mn-lt"/>
+              <a:t>•  Protocol: calibrator + threshold fit on validation, reported on untouched test.</a:t>
+            </a:r>
+          </a:p>
+          <a:p>
+            <a:pPr>
+              <a:spcAft>
+                <a:spcPts val="1000"/>
+              </a:spcAft>
+            </a:pPr>
+            <a:r>
+              <a:rPr sz="1600">
+                <a:solidFill>
+                  <a:srgbClr val="222222"/>
+                </a:solidFill>
               </a:rPr>
-              <a:t>balanced accuracy</a:t>
-            </a:r>
-            <a:r>
-              <a:rPr lang="en-US">
-                <a:ea typeface="+mn-lt"/>
-                <a:cs typeface="+mn-lt"/>
+              <a:t>•  Bootstrap CIs; McNemar's test for the paired comparison.</a:t>
+            </a:r>
+          </a:p>
+        </p:txBody>
+      </p:sp>
+      <p:sp>
+        <p:nvSpPr>
+          <p:cNvPr id="5" name="TextBox 4"/>
+          <p:cNvSpPr txBox="1"/>
+          <p:nvPr/>
+        </p:nvSpPr>
+        <p:spPr>
+          <a:xfrm>
+            <a:off x="502920" y="6446520"/>
+            <a:ext cx="11185855" cy="320040"/>
+          </a:xfrm>
+          <a:prstGeom prst="rect">
+            <a:avLst/>
+          </a:prstGeom>
+          <a:noFill/>
+        </p:spPr>
+        <p:txBody>
+          <a:bodyPr wrap="none">
+            <a:spAutoFit/>
+          </a:bodyPr>
+          <a:lstStyle/>
+          <a:p>
+            <a:pPr algn="r"/>
+            <a:r>
+              <a:rPr sz="900">
+                <a:solidFill>
+                  <a:srgbClr val="7A7A7A"/>
+                </a:solidFill>
               </a:rPr>
-              <a:t>, </a:t>
-            </a:r>
-            <a:r>
-              <a:rPr lang="en-US" i="1">
-                <a:ea typeface="+mn-lt"/>
-                <a:cs typeface="+mn-lt"/>
-              </a:rPr>
-              <a:t>macro-F1</a:t>
-            </a:r>
-            <a:r>
-              <a:rPr lang="en-US">
-                <a:ea typeface="+mn-lt"/>
-                <a:cs typeface="+mn-lt"/>
-              </a:rPr>
-              <a:t>, </a:t>
-            </a:r>
-            <a:r>
-              <a:rPr lang="en-US" i="1">
-                <a:ea typeface="+mn-lt"/>
-                <a:cs typeface="+mn-lt"/>
-              </a:rPr>
-              <a:t>ROC/PR-AUC</a:t>
-            </a:r>
-            <a:r>
-              <a:rPr lang="en-US">
-                <a:ea typeface="+mn-lt"/>
-                <a:cs typeface="+mn-lt"/>
-              </a:rPr>
-              <a:t>, and </a:t>
-            </a:r>
-            <a:r>
-              <a:rPr lang="en-US" i="1">
-                <a:ea typeface="+mn-lt"/>
-                <a:cs typeface="+mn-lt"/>
-              </a:rPr>
-              <a:t>calibration (Brier + ECE)</a:t>
-            </a:r>
-            <a:endParaRPr lang="en-US" i="1"/>
-          </a:p>
-          <a:p>
-            <a:endParaRPr lang="en-US" dirty="0">
-              <a:ea typeface="+mn-lt"/>
-              <a:cs typeface="+mn-lt"/>
-            </a:endParaRPr>
-          </a:p>
-          <a:p>
-            <a:r>
-              <a:rPr lang="en-US">
-                <a:ea typeface="+mn-lt"/>
-                <a:cs typeface="+mn-lt"/>
-              </a:rPr>
-              <a:t>Cost asymmetry: a false positive lets misinformation through and it is the costlier error; threshold can reflect </a:t>
-            </a:r>
-            <a:r>
-              <a:rPr lang="en-US" dirty="0">
-                <a:ea typeface="+mn-lt"/>
-                <a:cs typeface="+mn-lt"/>
-              </a:rPr>
-              <a:t>that</a:t>
-            </a:r>
-            <a:endParaRPr lang="en-US"/>
-          </a:p>
-          <a:p>
-            <a:endParaRPr lang="en-US" dirty="0">
-              <a:ea typeface="+mn-lt"/>
-              <a:cs typeface="+mn-lt"/>
-            </a:endParaRPr>
-          </a:p>
-          <a:p>
-            <a:r>
-              <a:rPr lang="en-US">
-                <a:ea typeface="+mn-lt"/>
-                <a:cs typeface="+mn-lt"/>
-              </a:rPr>
-              <a:t>Protocol: calibrator + threshold fit on validation set, reported on untouched test. Bootstrap CIs; McNemar's test for the paired comparison</a:t>
-            </a:r>
-            <a:endParaRPr lang="en-US"/>
+              <a:t>Private &amp; Confidential</a:t>
+            </a:r>
           </a:p>
         </p:txBody>
       </p:sp>
     </p:spTree>
-    <p:extLst>
-      <p:ext uri="{BB962C8B-B14F-4D97-AF65-F5344CB8AC3E}">
-        <p14:creationId xmlns:p14="http://schemas.microsoft.com/office/powerpoint/2010/main" val="400644371"/>
-      </p:ext>
-    </p:extLst>
   </p:cSld>
   <p:clrMapOvr>
     <a:masterClrMapping/>
@@ -4554,7 +5208,7 @@
 </file>
 
 <file path=ppt/slides/slide5.xml><?xml version="1.0" encoding="utf-8"?>
-<p:sld xmlns:a="http://schemas.openxmlformats.org/drawingml/2006/main" xmlns:r="http://schemas.openxmlformats.org/officeDocument/2006/relationships" xmlns:p="http://schemas.openxmlformats.org/presentationml/2006/main">
+<p:sld xmlns:a="http://schemas.openxmlformats.org/drawingml/2006/main" xmlns:p="http://schemas.openxmlformats.org/presentationml/2006/main" xmlns:r="http://schemas.openxmlformats.org/officeDocument/2006/relationships">
   <p:cSld>
     <p:spTree>
       <p:nvGrpSpPr>
@@ -4562,185 +5216,17 @@
         <p:cNvGrpSpPr/>
         <p:nvPr/>
       </p:nvGrpSpPr>
-      <p:grpSpPr>
-        <a:xfrm>
-          <a:off x="0" y="0"/>
-          <a:ext cx="0" cy="0"/>
-          <a:chOff x="0" y="0"/>
-          <a:chExt cx="0" cy="0"/>
-        </a:xfrm>
-      </p:grpSpPr>
-      <p:sp>
-        <p:nvSpPr>
-          <p:cNvPr id="2" name="Title 1">
-            <a:extLst>
-              <a:ext uri="{FF2B5EF4-FFF2-40B4-BE49-F238E27FC236}">
-                <a16:creationId xmlns:a16="http://schemas.microsoft.com/office/drawing/2014/main" id="{162FC953-2651-E79B-4E56-EB8529529E15}"/>
-              </a:ext>
-            </a:extLst>
-          </p:cNvPr>
-          <p:cNvSpPr>
-            <a:spLocks noGrp="1"/>
-          </p:cNvSpPr>
-          <p:nvPr>
-            <p:ph type="title"/>
-          </p:nvPr>
-        </p:nvSpPr>
-        <p:spPr/>
-        <p:txBody>
-          <a:bodyPr/>
-          <a:lstStyle/>
-          <a:p>
-            <a:r>
-              <a:rPr lang="en-US">
-                <a:ea typeface="+mj-lt"/>
-                <a:cs typeface="+mj-lt"/>
-              </a:rPr>
-              <a:t>Zero-Shot Predictor</a:t>
-            </a:r>
-            <a:endParaRPr lang="en-US"/>
-          </a:p>
-        </p:txBody>
-      </p:sp>
-      <p:sp>
-        <p:nvSpPr>
-          <p:cNvPr id="3" name="Content Placeholder 2">
-            <a:extLst>
-              <a:ext uri="{FF2B5EF4-FFF2-40B4-BE49-F238E27FC236}">
-                <a16:creationId xmlns:a16="http://schemas.microsoft.com/office/drawing/2014/main" id="{E5D9295F-B4FE-18B5-A652-F10CE2825183}"/>
-              </a:ext>
-            </a:extLst>
-          </p:cNvPr>
-          <p:cNvSpPr>
-            <a:spLocks noGrp="1"/>
-          </p:cNvSpPr>
-          <p:nvPr>
-            <p:ph idx="1"/>
-          </p:nvPr>
-        </p:nvSpPr>
-        <p:spPr/>
-        <p:txBody>
-          <a:bodyPr vert="horz" lIns="91440" tIns="45720" rIns="91440" bIns="45720" rtlCol="0" anchor="t">
-            <a:normAutofit/>
-          </a:bodyPr>
-          <a:lstStyle/>
-          <a:p>
-            <a:r>
-              <a:rPr lang="en-US" dirty="0">
-                <a:ea typeface="+mn-lt"/>
-                <a:cs typeface="+mn-lt"/>
-              </a:rPr>
-              <a:t>Base: Gemma-4-31B-it (open; serverless on Together.ai; </a:t>
-            </a:r>
-            <a:r>
-              <a:rPr lang="en-US" dirty="0" err="1">
-                <a:ea typeface="+mn-lt"/>
-                <a:cs typeface="+mn-lt"/>
-              </a:rPr>
-              <a:t>LoRA</a:t>
-            </a:r>
-            <a:r>
-              <a:rPr lang="en-US" dirty="0">
-                <a:ea typeface="+mn-lt"/>
-                <a:cs typeface="+mn-lt"/>
-              </a:rPr>
-              <a:t>-fine-tunable under the same id → shared base, no confound)</a:t>
-            </a:r>
-          </a:p>
-          <a:p>
-            <a:endParaRPr lang="en-US" dirty="0"/>
-          </a:p>
-          <a:p>
-            <a:r>
-              <a:rPr lang="en-US">
-                <a:ea typeface="+mn-lt"/>
-                <a:cs typeface="+mn-lt"/>
-              </a:rPr>
-              <a:t>Prompt: statement + metadata, missing fields marked [unknown]</a:t>
-            </a:r>
-            <a:endParaRPr lang="en-US"/>
-          </a:p>
-          <a:p>
-            <a:endParaRPr lang="en-US" dirty="0">
-              <a:ea typeface="+mn-lt"/>
-              <a:cs typeface="+mn-lt"/>
-            </a:endParaRPr>
-          </a:p>
-          <a:p>
-            <a:r>
-              <a:rPr lang="en-US" dirty="0">
-                <a:ea typeface="+mn-lt"/>
-                <a:cs typeface="+mn-lt"/>
-              </a:rPr>
-              <a:t>Elicitation: decision + </a:t>
-            </a:r>
-            <a:r>
-              <a:rPr lang="en-US" dirty="0" err="1">
-                <a:ea typeface="+mn-lt"/>
-                <a:cs typeface="+mn-lt"/>
-              </a:rPr>
-              <a:t>logprob</a:t>
-            </a:r>
-            <a:r>
-              <a:rPr lang="en-US" dirty="0">
-                <a:ea typeface="+mn-lt"/>
-                <a:cs typeface="+mn-lt"/>
-              </a:rPr>
-              <a:t> — model answers True/False; confidence from the True/False token's </a:t>
-            </a:r>
-            <a:r>
-              <a:rPr lang="en-US" i="1" dirty="0" err="1">
-                <a:ea typeface="+mn-lt"/>
-                <a:cs typeface="+mn-lt"/>
-              </a:rPr>
-              <a:t>logprob</a:t>
-            </a:r>
-            <a:r>
-              <a:rPr lang="en-US" dirty="0">
-                <a:ea typeface="+mn-lt"/>
-                <a:cs typeface="+mn-lt"/>
-              </a:rPr>
-              <a:t> [2]</a:t>
-            </a:r>
-            <a:endParaRPr lang="en-US" dirty="0" err="1"/>
-          </a:p>
-          <a:p>
-            <a:endParaRPr lang="en-US" dirty="0">
-              <a:ea typeface="+mn-lt"/>
-              <a:cs typeface="+mn-lt"/>
-            </a:endParaRPr>
-          </a:p>
-          <a:p>
-            <a:r>
-              <a:rPr lang="en-US">
-                <a:ea typeface="+mn-lt"/>
-                <a:cs typeface="+mn-lt"/>
-              </a:rPr>
-              <a:t>Baseline (calibrated, test): acc 0.668, ECE 0.053</a:t>
-            </a:r>
-            <a:endParaRPr lang="en-US"/>
-          </a:p>
-          <a:p>
-            <a:endParaRPr lang="en-US" dirty="0"/>
-          </a:p>
-        </p:txBody>
-      </p:sp>
-      <p:sp>
-        <p:nvSpPr>
-          <p:cNvPr id="6" name="TextBox 5">
-            <a:extLst>
-              <a:ext uri="{FF2B5EF4-FFF2-40B4-BE49-F238E27FC236}">
-                <a16:creationId xmlns:a16="http://schemas.microsoft.com/office/drawing/2014/main" id="{F5DF3CAF-3228-AFCA-908B-3B72E9895AC4}"/>
-              </a:ext>
-            </a:extLst>
-          </p:cNvPr>
+      <p:grpSpPr/>
+      <p:sp>
+        <p:nvSpPr>
+          <p:cNvPr id="2" name="TextBox 1"/>
           <p:cNvSpPr txBox="1"/>
           <p:nvPr/>
         </p:nvSpPr>
         <p:spPr>
           <a:xfrm>
-            <a:off x="836432" y="6473137"/>
-            <a:ext cx="10515599" cy="338554"/>
+            <a:off x="502920" y="320040"/>
+            <a:ext cx="11185855" cy="914400"/>
           </a:xfrm>
           <a:prstGeom prst="rect">
             <a:avLst/>
@@ -4748,31 +5234,183 @@
           <a:noFill/>
         </p:spPr>
         <p:txBody>
-          <a:bodyPr rot="0" spcFirstLastPara="0" vertOverflow="overflow" horzOverflow="overflow" vert="horz" wrap="square" lIns="91440" tIns="45720" rIns="91440" bIns="45720" numCol="1" spcCol="0" rtlCol="0" fromWordArt="0" anchor="t" anchorCtr="0" forceAA="0" compatLnSpc="1">
-            <a:prstTxWarp prst="textNoShape">
-              <a:avLst/>
-            </a:prstTxWarp>
+          <a:bodyPr wrap="square">
             <a:spAutoFit/>
           </a:bodyPr>
           <a:lstStyle/>
           <a:p>
             <a:r>
-              <a:rPr lang="en-US" sz="1600">
-                <a:ea typeface="+mn-lt"/>
-                <a:cs typeface="+mn-lt"/>
+              <a:rPr sz="2800" b="1">
+                <a:solidFill>
+                  <a:srgbClr val="1F3A5F"/>
+                </a:solidFill>
               </a:rPr>
-              <a:t>[2] https://docs.together.ai/docs/inference/chat/logprobs</a:t>
-            </a:r>
-            <a:endParaRPr lang="en-US"/>
+              <a:t>Zero-Shot Predictor</a:t>
+            </a:r>
+          </a:p>
+        </p:txBody>
+      </p:sp>
+      <p:sp>
+        <p:nvSpPr>
+          <p:cNvPr id="3" name="Rectangle 2"/>
+          <p:cNvSpPr/>
+          <p:nvPr/>
+        </p:nvSpPr>
+        <p:spPr>
+          <a:xfrm>
+            <a:off x="502920" y="1207008"/>
+            <a:ext cx="2194560" cy="38100"/>
+          </a:xfrm>
+          <a:prstGeom prst="rect">
+            <a:avLst/>
+          </a:prstGeom>
+          <a:solidFill>
+            <a:srgbClr val="2E6DA4"/>
+          </a:solidFill>
+          <a:ln>
+            <a:noFill/>
+          </a:ln>
+        </p:spPr>
+        <p:style>
+          <a:lnRef idx="1">
+            <a:schemeClr val="accent1"/>
+          </a:lnRef>
+          <a:fillRef idx="3">
+            <a:schemeClr val="accent1"/>
+          </a:fillRef>
+          <a:effectRef idx="2">
+            <a:schemeClr val="accent1"/>
+          </a:effectRef>
+          <a:fontRef idx="minor">
+            <a:schemeClr val="lt1"/>
+          </a:fontRef>
+        </p:style>
+        <p:txBody>
+          <a:bodyPr rtlCol="0" anchor="ctr"/>
+          <a:lstStyle/>
+          <a:p>
+            <a:pPr algn="ctr"/>
+          </a:p>
+        </p:txBody>
+      </p:sp>
+      <p:sp>
+        <p:nvSpPr>
+          <p:cNvPr id="4" name="TextBox 3"/>
+          <p:cNvSpPr txBox="1"/>
+          <p:nvPr/>
+        </p:nvSpPr>
+        <p:spPr>
+          <a:xfrm>
+            <a:off x="502920" y="1417320"/>
+            <a:ext cx="11185855" cy="4480560"/>
+          </a:xfrm>
+          <a:prstGeom prst="rect">
+            <a:avLst/>
+          </a:prstGeom>
+          <a:noFill/>
+        </p:spPr>
+        <p:txBody>
+          <a:bodyPr wrap="square">
+            <a:spAutoFit/>
+          </a:bodyPr>
+          <a:lstStyle/>
+          <a:p>
+            <a:pPr>
+              <a:spcAft>
+                <a:spcPts val="1000"/>
+              </a:spcAft>
+            </a:pPr>
+            <a:r>
+              <a:rPr sz="1600">
+                <a:solidFill>
+                  <a:srgbClr val="222222"/>
+                </a:solidFill>
+              </a:rPr>
+              <a:t>•  Base: gemma-4-31B-it (open; serverless on Together; LoRA-fine-tunable under the same id → shared base, no confound).</a:t>
+            </a:r>
+          </a:p>
+          <a:p>
+            <a:pPr>
+              <a:spcAft>
+                <a:spcPts val="1000"/>
+              </a:spcAft>
+            </a:pPr>
+            <a:r>
+              <a:rPr sz="1600">
+                <a:solidFill>
+                  <a:srgbClr val="222222"/>
+                </a:solidFill>
+              </a:rPr>
+              <a:t>•  Prompt: statement + metadata, missing fields marked [unknown].</a:t>
+            </a:r>
+          </a:p>
+          <a:p>
+            <a:pPr>
+              <a:spcAft>
+                <a:spcPts val="1000"/>
+              </a:spcAft>
+            </a:pPr>
+            <a:r>
+              <a:rPr sz="1600">
+                <a:solidFill>
+                  <a:srgbClr val="222222"/>
+                </a:solidFill>
+              </a:rPr>
+              <a:t>•  Elicitation: decision + logprob — model answers True/False; confidence from the True/False token's logprob.</a:t>
+            </a:r>
+          </a:p>
+          <a:p>
+            <a:pPr>
+              <a:spcAft>
+                <a:spcPts val="1000"/>
+              </a:spcAft>
+            </a:pPr>
+            <a:r>
+              <a:rPr sz="1600">
+                <a:solidFill>
+                  <a:srgbClr val="222222"/>
+                </a:solidFill>
+              </a:rPr>
+              <a:t>•  Baseline (calibrated, test): acc 0.668, ECE 0.061.</a:t>
+            </a:r>
+          </a:p>
+        </p:txBody>
+      </p:sp>
+      <p:sp>
+        <p:nvSpPr>
+          <p:cNvPr id="5" name="TextBox 4"/>
+          <p:cNvSpPr txBox="1"/>
+          <p:nvPr/>
+        </p:nvSpPr>
+        <p:spPr>
+          <a:xfrm>
+            <a:off x="502920" y="6446520"/>
+            <a:ext cx="11185855" cy="320040"/>
+          </a:xfrm>
+          <a:prstGeom prst="rect">
+            <a:avLst/>
+          </a:prstGeom>
+          <a:noFill/>
+        </p:spPr>
+        <p:txBody>
+          <a:bodyPr wrap="none">
+            <a:spAutoFit/>
+          </a:bodyPr>
+          <a:lstStyle/>
+          <a:p>
+            <a:pPr algn="r"/>
+            <a:r>
+              <a:rPr sz="900">
+                <a:solidFill>
+                  <a:srgbClr val="7A7A7A"/>
+                </a:solidFill>
+              </a:rPr>
+              <a:t>Private &amp; Confidential</a:t>
+            </a:r>
           </a:p>
         </p:txBody>
       </p:sp>
     </p:spTree>
-    <p:extLst>
-      <p:ext uri="{BB962C8B-B14F-4D97-AF65-F5344CB8AC3E}">
-        <p14:creationId xmlns:p14="http://schemas.microsoft.com/office/powerpoint/2010/main" val="3458078512"/>
-      </p:ext>
-    </p:extLst>
   </p:cSld>
   <p:clrMapOvr>
     <a:masterClrMapping/>
@@ -4781,7 +5419,7 @@
 </file>
 
 <file path=ppt/slides/slide6.xml><?xml version="1.0" encoding="utf-8"?>
-<p:sld xmlns:a="http://schemas.openxmlformats.org/drawingml/2006/main" xmlns:r="http://schemas.openxmlformats.org/officeDocument/2006/relationships" xmlns:p="http://schemas.openxmlformats.org/presentationml/2006/main">
+<p:sld xmlns:a="http://schemas.openxmlformats.org/drawingml/2006/main" xmlns:p="http://schemas.openxmlformats.org/presentationml/2006/main" xmlns:r="http://schemas.openxmlformats.org/officeDocument/2006/relationships">
   <p:cSld>
     <p:spTree>
       <p:nvGrpSpPr>
@@ -4789,251 +5427,201 @@
         <p:cNvGrpSpPr/>
         <p:nvPr/>
       </p:nvGrpSpPr>
-      <p:grpSpPr>
-        <a:xfrm>
-          <a:off x="0" y="0"/>
-          <a:ext cx="0" cy="0"/>
-          <a:chOff x="0" y="0"/>
-          <a:chExt cx="0" cy="0"/>
-        </a:xfrm>
-      </p:grpSpPr>
-      <p:sp>
-        <p:nvSpPr>
-          <p:cNvPr id="2" name="Title 1">
-            <a:extLst>
-              <a:ext uri="{FF2B5EF4-FFF2-40B4-BE49-F238E27FC236}">
-                <a16:creationId xmlns:a16="http://schemas.microsoft.com/office/drawing/2014/main" id="{5CD97970-9A59-63CE-5E56-6A2875B85049}"/>
-              </a:ext>
-            </a:extLst>
-          </p:cNvPr>
-          <p:cNvSpPr>
-            <a:spLocks noGrp="1"/>
-          </p:cNvSpPr>
-          <p:nvPr>
-            <p:ph type="title"/>
-          </p:nvPr>
-        </p:nvSpPr>
-        <p:spPr/>
-        <p:txBody>
-          <a:bodyPr/>
-          <a:lstStyle/>
-          <a:p>
-            <a:r>
-              <a:rPr lang="en-US" dirty="0">
-                <a:ea typeface="+mj-lt"/>
-                <a:cs typeface="+mj-lt"/>
+      <p:grpSpPr/>
+      <p:sp>
+        <p:nvSpPr>
+          <p:cNvPr id="2" name="TextBox 1"/>
+          <p:cNvSpPr txBox="1"/>
+          <p:nvPr/>
+        </p:nvSpPr>
+        <p:spPr>
+          <a:xfrm>
+            <a:off x="502920" y="320040"/>
+            <a:ext cx="11185855" cy="914400"/>
+          </a:xfrm>
+          <a:prstGeom prst="rect">
+            <a:avLst/>
+          </a:prstGeom>
+          <a:noFill/>
+        </p:spPr>
+        <p:txBody>
+          <a:bodyPr wrap="square">
+            <a:spAutoFit/>
+          </a:bodyPr>
+          <a:lstStyle/>
+          <a:p>
+            <a:r>
+              <a:rPr sz="2800" b="1">
+                <a:solidFill>
+                  <a:srgbClr val="1F3A5F"/>
+                </a:solidFill>
               </a:rPr>
-              <a:t>Fine-Tuned Predictor (</a:t>
-            </a:r>
-            <a:r>
-              <a:rPr lang="en-US" dirty="0" err="1">
-                <a:ea typeface="+mj-lt"/>
-                <a:cs typeface="+mj-lt"/>
+              <a:t>Fine-Tuned Predictor (LoRA SFT)</a:t>
+            </a:r>
+          </a:p>
+        </p:txBody>
+      </p:sp>
+      <p:sp>
+        <p:nvSpPr>
+          <p:cNvPr id="3" name="Rectangle 2"/>
+          <p:cNvSpPr/>
+          <p:nvPr/>
+        </p:nvSpPr>
+        <p:spPr>
+          <a:xfrm>
+            <a:off x="502920" y="1207008"/>
+            <a:ext cx="2194560" cy="38100"/>
+          </a:xfrm>
+          <a:prstGeom prst="rect">
+            <a:avLst/>
+          </a:prstGeom>
+          <a:solidFill>
+            <a:srgbClr val="2E6DA4"/>
+          </a:solidFill>
+          <a:ln>
+            <a:noFill/>
+          </a:ln>
+        </p:spPr>
+        <p:style>
+          <a:lnRef idx="1">
+            <a:schemeClr val="accent1"/>
+          </a:lnRef>
+          <a:fillRef idx="3">
+            <a:schemeClr val="accent1"/>
+          </a:fillRef>
+          <a:effectRef idx="2">
+            <a:schemeClr val="accent1"/>
+          </a:effectRef>
+          <a:fontRef idx="minor">
+            <a:schemeClr val="lt1"/>
+          </a:fontRef>
+        </p:style>
+        <p:txBody>
+          <a:bodyPr rtlCol="0" anchor="ctr"/>
+          <a:lstStyle/>
+          <a:p>
+            <a:pPr algn="ctr"/>
+          </a:p>
+        </p:txBody>
+      </p:sp>
+      <p:sp>
+        <p:nvSpPr>
+          <p:cNvPr id="4" name="TextBox 3"/>
+          <p:cNvSpPr txBox="1"/>
+          <p:nvPr/>
+        </p:nvSpPr>
+        <p:spPr>
+          <a:xfrm>
+            <a:off x="502920" y="1417320"/>
+            <a:ext cx="11185855" cy="4480560"/>
+          </a:xfrm>
+          <a:prstGeom prst="rect">
+            <a:avLst/>
+          </a:prstGeom>
+          <a:noFill/>
+        </p:spPr>
+        <p:txBody>
+          <a:bodyPr wrap="square">
+            <a:spAutoFit/>
+          </a:bodyPr>
+          <a:lstStyle/>
+          <a:p>
+            <a:pPr>
+              <a:spcAft>
+                <a:spcPts val="1000"/>
+              </a:spcAft>
+            </a:pPr>
+            <a:r>
+              <a:rPr sz="1600">
+                <a:solidFill>
+                  <a:srgbClr val="222222"/>
+                </a:solidFill>
               </a:rPr>
-              <a:t>LoRA</a:t>
-            </a:r>
-            <a:r>
-              <a:rPr lang="en-US" dirty="0">
-                <a:ea typeface="+mj-lt"/>
-                <a:cs typeface="+mj-lt"/>
+              <a:t>•  LoRA supervised fine-tuning on the same gemma-4-31B-it base.</a:t>
+            </a:r>
+          </a:p>
+          <a:p>
+            <a:pPr>
+              <a:spcAft>
+                <a:spcPts val="1000"/>
+              </a:spcAft>
+            </a:pPr>
+            <a:r>
+              <a:rPr sz="1600">
+                <a:solidFill>
+                  <a:srgbClr val="222222"/>
+                </a:solidFill>
               </a:rPr>
-              <a:t> SFT)</a:t>
-            </a:r>
-            <a:endParaRPr lang="en-US" dirty="0"/>
-          </a:p>
-        </p:txBody>
-      </p:sp>
-      <p:sp>
-        <p:nvSpPr>
-          <p:cNvPr id="3" name="Content Placeholder 2">
-            <a:extLst>
-              <a:ext uri="{FF2B5EF4-FFF2-40B4-BE49-F238E27FC236}">
-                <a16:creationId xmlns:a16="http://schemas.microsoft.com/office/drawing/2014/main" id="{B1D91295-BFA9-7B7E-D359-69D0BD805EAE}"/>
-              </a:ext>
-            </a:extLst>
-          </p:cNvPr>
-          <p:cNvSpPr>
-            <a:spLocks noGrp="1"/>
-          </p:cNvSpPr>
-          <p:nvPr>
-            <p:ph idx="1"/>
-          </p:nvPr>
-        </p:nvSpPr>
-        <p:spPr/>
-        <p:txBody>
-          <a:bodyPr vert="horz" lIns="91440" tIns="45720" rIns="91440" bIns="45720" rtlCol="0" anchor="t">
-            <a:normAutofit fontScale="92500" lnSpcReduction="20000"/>
+              <a:t>•  Training data: conversational JSONL — prompt as system+user, assistant = single True/False token; loss on the label only (train_on_inputs=auto).</a:t>
+            </a:r>
+          </a:p>
+          <a:p>
+            <a:pPr>
+              <a:spcAft>
+                <a:spcPts val="1000"/>
+              </a:spcAft>
+            </a:pPr>
+            <a:r>
+              <a:rPr sz="1600">
+                <a:solidFill>
+                  <a:srgbClr val="222222"/>
+                </a:solidFill>
+              </a:rPr>
+              <a:t>•  Train split only (5,710); validation file for eval-loss. Eval loss 0.32 → 0.199 over 3 epochs (from the training run).</a:t>
+            </a:r>
+          </a:p>
+          <a:p>
+            <a:pPr>
+              <a:spcAft>
+                <a:spcPts val="1000"/>
+              </a:spcAft>
+            </a:pPr>
+            <a:r>
+              <a:rPr sz="1600">
+                <a:solidFill>
+                  <a:srgbClr val="222222"/>
+                </a:solidFill>
+              </a:rPr>
+              <a:t>•  Serving: fine-tuned Gemma isn't serverless → short-lived dedicated endpoint, create→infer→guaranteed teardown (~14 min, ~$2).</a:t>
+            </a:r>
+          </a:p>
+        </p:txBody>
+      </p:sp>
+      <p:sp>
+        <p:nvSpPr>
+          <p:cNvPr id="5" name="TextBox 4"/>
+          <p:cNvSpPr txBox="1"/>
+          <p:nvPr/>
+        </p:nvSpPr>
+        <p:spPr>
+          <a:xfrm>
+            <a:off x="502920" y="6446520"/>
+            <a:ext cx="11185855" cy="320040"/>
+          </a:xfrm>
+          <a:prstGeom prst="rect">
+            <a:avLst/>
+          </a:prstGeom>
+          <a:noFill/>
+        </p:spPr>
+        <p:txBody>
+          <a:bodyPr wrap="none">
+            <a:spAutoFit/>
           </a:bodyPr>
           <a:lstStyle/>
           <a:p>
-            <a:r>
-              <a:rPr lang="en-US" dirty="0" err="1">
-                <a:ea typeface="+mn-lt"/>
-                <a:cs typeface="+mn-lt"/>
+            <a:pPr algn="r"/>
+            <a:r>
+              <a:rPr sz="900">
+                <a:solidFill>
+                  <a:srgbClr val="7A7A7A"/>
+                </a:solidFill>
               </a:rPr>
-              <a:t>LoRA</a:t>
-            </a:r>
-            <a:r>
-              <a:rPr lang="en-US" dirty="0">
-                <a:ea typeface="+mn-lt"/>
-                <a:cs typeface="+mn-lt"/>
-              </a:rPr>
-              <a:t> supervised fine-tuning on the same </a:t>
-            </a:r>
-            <a:r>
-              <a:rPr lang="en-US" sz="3000" dirty="0">
-                <a:ea typeface="+mn-lt"/>
-                <a:cs typeface="+mn-lt"/>
-              </a:rPr>
-              <a:t>Gemma-4-31B-it model</a:t>
-            </a:r>
-            <a:endParaRPr lang="en-US" dirty="0">
-              <a:ea typeface="+mn-lt"/>
-              <a:cs typeface="+mn-lt"/>
-            </a:endParaRPr>
-          </a:p>
-          <a:p>
-            <a:endParaRPr lang="en-US" dirty="0"/>
-          </a:p>
-          <a:p>
-            <a:r>
-              <a:rPr lang="en-US" dirty="0">
-                <a:ea typeface="+mn-lt"/>
-                <a:cs typeface="+mn-lt"/>
-              </a:rPr>
-              <a:t>Training data: conversational JSONL</a:t>
-            </a:r>
-          </a:p>
-          <a:p>
-            <a:pPr lvl="1">
-              <a:buFont typeface="Courier New" panose="020B0604020202020204" pitchFamily="34" charset="0"/>
-              <a:buChar char="o"/>
-            </a:pPr>
-            <a:r>
-              <a:rPr lang="en-US" i="1" dirty="0">
-                <a:ea typeface="+mn-lt"/>
-                <a:cs typeface="+mn-lt"/>
-              </a:rPr>
-              <a:t>prompt</a:t>
-            </a:r>
-            <a:r>
-              <a:rPr lang="en-US" dirty="0">
-                <a:ea typeface="+mn-lt"/>
-                <a:cs typeface="+mn-lt"/>
-              </a:rPr>
-              <a:t> as </a:t>
-            </a:r>
-            <a:r>
-              <a:rPr lang="en-US" dirty="0" err="1">
-                <a:ea typeface="+mn-lt"/>
-                <a:cs typeface="+mn-lt"/>
-              </a:rPr>
-              <a:t>system+user</a:t>
-            </a:r>
-            <a:r>
-              <a:rPr lang="en-US" dirty="0">
-                <a:ea typeface="+mn-lt"/>
-                <a:cs typeface="+mn-lt"/>
-              </a:rPr>
-              <a:t>, </a:t>
-            </a:r>
-            <a:r>
-              <a:rPr lang="en-US" i="1" dirty="0">
-                <a:ea typeface="+mn-lt"/>
-                <a:cs typeface="+mn-lt"/>
-              </a:rPr>
-              <a:t>assistant</a:t>
-            </a:r>
-            <a:r>
-              <a:rPr lang="en-US" dirty="0">
-                <a:ea typeface="+mn-lt"/>
-                <a:cs typeface="+mn-lt"/>
-              </a:rPr>
-              <a:t> = single True/False token</a:t>
-            </a:r>
-          </a:p>
-          <a:p>
-            <a:pPr lvl="1">
-              <a:buFont typeface="Courier New" panose="020B0604020202020204" pitchFamily="34" charset="0"/>
-              <a:buChar char="o"/>
-            </a:pPr>
-            <a:r>
-              <a:rPr lang="en-US" i="1" dirty="0">
-                <a:ea typeface="+mn-lt"/>
-                <a:cs typeface="+mn-lt"/>
-              </a:rPr>
-              <a:t>loss </a:t>
-            </a:r>
-            <a:r>
-              <a:rPr lang="en-US" dirty="0">
-                <a:ea typeface="+mn-lt"/>
-                <a:cs typeface="+mn-lt"/>
-              </a:rPr>
-              <a:t>on the label only (</a:t>
-            </a:r>
-            <a:r>
-              <a:rPr lang="en-US" dirty="0" err="1">
-                <a:ea typeface="+mn-lt"/>
-                <a:cs typeface="+mn-lt"/>
-              </a:rPr>
-              <a:t>train_on_inputs</a:t>
-            </a:r>
-            <a:r>
-              <a:rPr lang="en-US" dirty="0">
-                <a:ea typeface="+mn-lt"/>
-                <a:cs typeface="+mn-lt"/>
-              </a:rPr>
-              <a:t>=auto)</a:t>
-            </a:r>
-            <a:endParaRPr lang="en-US"/>
-          </a:p>
-          <a:p>
-            <a:endParaRPr lang="en-US" dirty="0">
-              <a:ea typeface="+mn-lt"/>
-              <a:cs typeface="+mn-lt"/>
-            </a:endParaRPr>
-          </a:p>
-          <a:p>
-            <a:r>
-              <a:rPr lang="en-US">
-                <a:ea typeface="+mn-lt"/>
-                <a:cs typeface="+mn-lt"/>
-              </a:rPr>
-              <a:t>Train split only (5,710); validation file for eval-loss. Eval loss 0.32 → 0.199 over 3 epochs</a:t>
-            </a:r>
-            <a:endParaRPr lang="en-US"/>
-          </a:p>
-          <a:p>
-            <a:endParaRPr lang="en-US" dirty="0">
-              <a:ea typeface="+mn-lt"/>
-              <a:cs typeface="+mn-lt"/>
-            </a:endParaRPr>
-          </a:p>
-          <a:p>
-            <a:r>
-              <a:rPr lang="en-US" dirty="0">
-                <a:ea typeface="+mn-lt"/>
-                <a:cs typeface="+mn-lt"/>
-              </a:rPr>
-              <a:t>Serving: fine-tuned Gemma isn't serverless, thus, we use a short-lived </a:t>
-            </a:r>
-            <a:r>
-              <a:rPr lang="en-US">
-                <a:ea typeface="+mn-lt"/>
-                <a:cs typeface="+mn-lt"/>
-              </a:rPr>
-              <a:t>dedicated endpoint</a:t>
-            </a:r>
-            <a:endParaRPr lang="en-US" dirty="0"/>
+              <a:t>Private &amp; Confidential</a:t>
+            </a:r>
           </a:p>
         </p:txBody>
       </p:sp>
     </p:spTree>
-    <p:extLst>
-      <p:ext uri="{BB962C8B-B14F-4D97-AF65-F5344CB8AC3E}">
-        <p14:creationId xmlns:p14="http://schemas.microsoft.com/office/powerpoint/2010/main" val="3516901167"/>
-      </p:ext>
-    </p:extLst>
   </p:cSld>
   <p:clrMapOvr>
     <a:masterClrMapping/>
@@ -5042,7 +5630,7 @@
 </file>
 
 <file path=ppt/slides/slide7.xml><?xml version="1.0" encoding="utf-8"?>
-<p:sld xmlns:a="http://schemas.openxmlformats.org/drawingml/2006/main" xmlns:r="http://schemas.openxmlformats.org/officeDocument/2006/relationships" xmlns:p="http://schemas.openxmlformats.org/presentationml/2006/main">
+<p:sld xmlns:a="http://schemas.openxmlformats.org/drawingml/2006/main" xmlns:p="http://schemas.openxmlformats.org/presentationml/2006/main" xmlns:r="http://schemas.openxmlformats.org/officeDocument/2006/relationships">
   <p:cSld>
     <p:spTree>
       <p:nvGrpSpPr>
@@ -5050,199 +5638,137 @@
         <p:cNvGrpSpPr/>
         <p:nvPr/>
       </p:nvGrpSpPr>
-      <p:grpSpPr>
-        <a:xfrm>
-          <a:off x="0" y="0"/>
-          <a:ext cx="0" cy="0"/>
-          <a:chOff x="0" y="0"/>
-          <a:chExt cx="0" cy="0"/>
-        </a:xfrm>
-      </p:grpSpPr>
-      <p:sp>
-        <p:nvSpPr>
-          <p:cNvPr id="2" name="Title 1">
-            <a:extLst>
-              <a:ext uri="{FF2B5EF4-FFF2-40B4-BE49-F238E27FC236}">
-                <a16:creationId xmlns:a16="http://schemas.microsoft.com/office/drawing/2014/main" id="{2308051F-BD32-16B3-20BA-BDF24BE7251E}"/>
-              </a:ext>
-            </a:extLst>
-          </p:cNvPr>
-          <p:cNvSpPr>
-            <a:spLocks noGrp="1"/>
-          </p:cNvSpPr>
-          <p:nvPr>
-            <p:ph type="title"/>
-          </p:nvPr>
-        </p:nvSpPr>
-        <p:spPr/>
-        <p:txBody>
-          <a:bodyPr/>
-          <a:lstStyle/>
-          <a:p>
-            <a:r>
-              <a:rPr lang="en-US">
-                <a:ea typeface="+mj-lt"/>
-                <a:cs typeface="+mj-lt"/>
+      <p:grpSpPr/>
+      <p:sp>
+        <p:nvSpPr>
+          <p:cNvPr id="2" name="TextBox 1"/>
+          <p:cNvSpPr txBox="1"/>
+          <p:nvPr/>
+        </p:nvSpPr>
+        <p:spPr>
+          <a:xfrm>
+            <a:off x="502920" y="320040"/>
+            <a:ext cx="11185855" cy="914400"/>
+          </a:xfrm>
+          <a:prstGeom prst="rect">
+            <a:avLst/>
+          </a:prstGeom>
+          <a:noFill/>
+        </p:spPr>
+        <p:txBody>
+          <a:bodyPr wrap="square">
+            <a:spAutoFit/>
+          </a:bodyPr>
+          <a:lstStyle/>
+          <a:p>
+            <a:r>
+              <a:rPr sz="2800" b="1">
+                <a:solidFill>
+                  <a:srgbClr val="1F3A5F"/>
+                </a:solidFill>
               </a:rPr>
               <a:t>The Fair Comparison &amp; Results</a:t>
             </a:r>
-            <a:endParaRPr lang="en-US"/>
-          </a:p>
-        </p:txBody>
-      </p:sp>
-      <p:sp>
-        <p:nvSpPr>
-          <p:cNvPr id="3" name="Content Placeholder 2">
-            <a:extLst>
-              <a:ext uri="{FF2B5EF4-FFF2-40B4-BE49-F238E27FC236}">
-                <a16:creationId xmlns:a16="http://schemas.microsoft.com/office/drawing/2014/main" id="{D8662BBB-A002-BA50-A45C-27969629CC1C}"/>
-              </a:ext>
-            </a:extLst>
-          </p:cNvPr>
-          <p:cNvSpPr>
-            <a:spLocks noGrp="1"/>
-          </p:cNvSpPr>
-          <p:nvPr>
-            <p:ph idx="1"/>
-          </p:nvPr>
+          </a:p>
+          <a:p>
+            <a:r>
+              <a:rPr sz="1400" i="1">
+                <a:solidFill>
+                  <a:srgbClr val="2E6DA4"/>
+                </a:solidFill>
+              </a:rPr>
+              <a:t>Fine-tuning beats the matched zero-shot baseline by +3.1 pts (p &lt; 1e-6). Calibration cuts ECE by ~0.22; fine-tuning itself does not improve it.</a:t>
+            </a:r>
+          </a:p>
+        </p:txBody>
+      </p:sp>
+      <p:sp>
+        <p:nvSpPr>
+          <p:cNvPr id="3" name="Rectangle 2"/>
+          <p:cNvSpPr/>
+          <p:nvPr/>
         </p:nvSpPr>
         <p:spPr>
           <a:xfrm>
-            <a:off x="830943" y="1825625"/>
-            <a:ext cx="10515600" cy="490539"/>
+            <a:off x="502920" y="1371600"/>
+            <a:ext cx="2194560" cy="38100"/>
           </a:xfrm>
+          <a:prstGeom prst="rect">
+            <a:avLst/>
+          </a:prstGeom>
+          <a:solidFill>
+            <a:srgbClr val="2E6DA4"/>
+          </a:solidFill>
+          <a:ln>
+            <a:noFill/>
+          </a:ln>
         </p:spPr>
-        <p:txBody>
-          <a:bodyPr vert="horz" lIns="91440" tIns="45720" rIns="91440" bIns="45720" rtlCol="0" anchor="t">
-            <a:normAutofit/>
+        <p:style>
+          <a:lnRef idx="1">
+            <a:schemeClr val="accent1"/>
+          </a:lnRef>
+          <a:fillRef idx="3">
+            <a:schemeClr val="accent1"/>
+          </a:fillRef>
+          <a:effectRef idx="2">
+            <a:schemeClr val="accent1"/>
+          </a:effectRef>
+          <a:fontRef idx="minor">
+            <a:schemeClr val="lt1"/>
+          </a:fontRef>
+        </p:style>
+        <p:txBody>
+          <a:bodyPr rtlCol="0" anchor="ctr"/>
+          <a:lstStyle/>
+          <a:p>
+            <a:pPr algn="ctr"/>
+          </a:p>
+        </p:txBody>
+      </p:sp>
+      <p:sp>
+        <p:nvSpPr>
+          <p:cNvPr id="4" name="TextBox 3"/>
+          <p:cNvSpPr txBox="1"/>
+          <p:nvPr/>
+        </p:nvSpPr>
+        <p:spPr>
+          <a:xfrm>
+            <a:off x="502920" y="1481328"/>
+            <a:ext cx="11185855" cy="457200"/>
+          </a:xfrm>
+          <a:prstGeom prst="rect">
+            <a:avLst/>
+          </a:prstGeom>
+          <a:noFill/>
+        </p:spPr>
+        <p:txBody>
+          <a:bodyPr wrap="none">
+            <a:spAutoFit/>
           </a:bodyPr>
           <a:lstStyle/>
           <a:p>
             <a:r>
-              <a:rPr lang="en-US" sz="1800" dirty="0">
-                <a:ea typeface="+mn-lt"/>
-                <a:cs typeface="+mn-lt"/>
+              <a:rPr sz="1500">
+                <a:solidFill>
+                  <a:srgbClr val="222222"/>
+                </a:solidFill>
               </a:rPr>
-              <a:t>Same test split, same calibration, same </a:t>
-            </a:r>
-            <a:r>
-              <a:rPr lang="en-US" sz="1800">
-                <a:ea typeface="+mn-lt"/>
-                <a:cs typeface="+mn-lt"/>
-              </a:rPr>
-              <a:t>elicitation; only</a:t>
-            </a:r>
-            <a:r>
-              <a:rPr lang="en-US" sz="1800" dirty="0">
-                <a:ea typeface="+mn-lt"/>
-                <a:cs typeface="+mn-lt"/>
-              </a:rPr>
-              <a:t> fine-</a:t>
-            </a:r>
-            <a:r>
-              <a:rPr lang="en-US" sz="1800">
-                <a:ea typeface="+mn-lt"/>
-                <a:cs typeface="+mn-lt"/>
-              </a:rPr>
-              <a:t>tuning differs</a:t>
-            </a:r>
-            <a:r>
-              <a:rPr lang="en-US" dirty="0">
-                <a:ea typeface="+mn-lt"/>
-                <a:cs typeface="+mn-lt"/>
-              </a:rPr>
-              <a:t> </a:t>
-            </a:r>
-            <a:endParaRPr lang="en-US" dirty="0"/>
-          </a:p>
-          <a:p>
-            <a:endParaRPr lang="en-US" dirty="0">
-              <a:ea typeface="+mn-lt"/>
-              <a:cs typeface="+mn-lt"/>
-            </a:endParaRPr>
-          </a:p>
-          <a:p>
-            <a:pPr marL="0" indent="0">
-              <a:buNone/>
-            </a:pPr>
-            <a:endParaRPr lang="en-US" dirty="0">
-              <a:ea typeface="+mn-lt"/>
-              <a:cs typeface="+mn-lt"/>
-            </a:endParaRPr>
-          </a:p>
-          <a:p>
-            <a:endParaRPr lang="en-US" dirty="0">
-              <a:ea typeface="+mn-lt"/>
-              <a:cs typeface="+mn-lt"/>
-            </a:endParaRPr>
-          </a:p>
-          <a:p>
-            <a:endParaRPr lang="en-US" dirty="0"/>
-          </a:p>
-          <a:p>
-            <a:endParaRPr lang="en-US" dirty="0">
-              <a:ea typeface="+mn-lt"/>
-              <a:cs typeface="+mn-lt"/>
-            </a:endParaRPr>
-          </a:p>
-          <a:p>
-            <a:endParaRPr lang="en-US" dirty="0">
-              <a:ea typeface="+mn-lt"/>
-              <a:cs typeface="+mn-lt"/>
-            </a:endParaRPr>
-          </a:p>
-          <a:p>
-            <a:endParaRPr lang="en-US" dirty="0">
-              <a:ea typeface="+mn-lt"/>
-              <a:cs typeface="+mn-lt"/>
-            </a:endParaRPr>
-          </a:p>
-          <a:p>
-            <a:endParaRPr lang="en-US" dirty="0">
-              <a:ea typeface="+mn-lt"/>
-              <a:cs typeface="+mn-lt"/>
-            </a:endParaRPr>
-          </a:p>
-          <a:p>
-            <a:endParaRPr lang="en-US" dirty="0">
-              <a:ea typeface="+mn-lt"/>
-              <a:cs typeface="+mn-lt"/>
-            </a:endParaRPr>
-          </a:p>
-          <a:p>
-            <a:endParaRPr lang="en-US" dirty="0">
-              <a:ea typeface="+mn-lt"/>
-              <a:cs typeface="+mn-lt"/>
-            </a:endParaRPr>
-          </a:p>
-          <a:p>
-            <a:endParaRPr lang="en-US" dirty="0"/>
+              <a:t>•  Same test split, same calibration, same elicitation → only fine-tuning differs.</a:t>
+            </a:r>
           </a:p>
         </p:txBody>
       </p:sp>
       <p:graphicFrame>
         <p:nvGraphicFramePr>
-          <p:cNvPr id="4" name="Table 3">
-            <a:extLst>
-              <a:ext uri="{FF2B5EF4-FFF2-40B4-BE49-F238E27FC236}">
-                <a16:creationId xmlns:a16="http://schemas.microsoft.com/office/drawing/2014/main" id="{018D8572-61B7-102E-645C-B980EF6908E0}"/>
-              </a:ext>
-            </a:extLst>
-          </p:cNvPr>
+          <p:cNvPr id="5" name="Table 4"/>
           <p:cNvGraphicFramePr>
             <a:graphicFrameLocks noGrp="1"/>
           </p:cNvGraphicFramePr>
-          <p:nvPr>
-            <p:extLst>
-              <p:ext uri="{D42A27DB-BD31-4B8C-83A1-F6EECF244321}">
-                <p14:modId xmlns:p14="http://schemas.microsoft.com/office/powerpoint/2010/main" val="4255944061"/>
-              </p:ext>
-            </p:extLst>
-          </p:nvPr>
+          <p:nvPr/>
         </p:nvGraphicFramePr>
         <p:xfrm>
-          <a:off x="537028" y="2554514"/>
-          <a:ext cx="11123731" cy="1737360"/>
+          <a:off x="502920" y="2057400"/>
+          <a:ext cx="11155675" cy="2011680"/>
         </p:xfrm>
         <a:graphic>
           <a:graphicData uri="http://schemas.openxmlformats.org/drawingml/2006/table">
@@ -5251,64 +5777,16 @@
                 <a:tableStyleId>{5C22544A-7EE6-4342-B048-85BDC9FD1C3A}</a:tableStyleId>
               </a:tblPr>
               <a:tblGrid>
-                <a:gridCol w="3553951">
-                  <a:extLst>
-                    <a:ext uri="{9D8B030D-6E8A-4147-A177-3AD203B41FA5}">
-                      <a16:colId xmlns:a16="http://schemas.microsoft.com/office/drawing/2014/main" val="1043982215"/>
-                    </a:ext>
-                  </a:extLst>
-                </a:gridCol>
-                <a:gridCol w="932282">
-                  <a:extLst>
-                    <a:ext uri="{9D8B030D-6E8A-4147-A177-3AD203B41FA5}">
-                      <a16:colId xmlns:a16="http://schemas.microsoft.com/office/drawing/2014/main" val="1183721618"/>
-                    </a:ext>
-                  </a:extLst>
-                </a:gridCol>
-                <a:gridCol w="1171831">
-                  <a:extLst>
-                    <a:ext uri="{9D8B030D-6E8A-4147-A177-3AD203B41FA5}">
-                      <a16:colId xmlns:a16="http://schemas.microsoft.com/office/drawing/2014/main" val="1936539774"/>
-                    </a:ext>
-                  </a:extLst>
-                </a:gridCol>
-                <a:gridCol w="1342191">
-                  <a:extLst>
-                    <a:ext uri="{9D8B030D-6E8A-4147-A177-3AD203B41FA5}">
-                      <a16:colId xmlns:a16="http://schemas.microsoft.com/office/drawing/2014/main" val="2522950741"/>
-                    </a:ext>
-                  </a:extLst>
-                </a:gridCol>
-                <a:gridCol w="1193639">
-                  <a:extLst>
-                    <a:ext uri="{9D8B030D-6E8A-4147-A177-3AD203B41FA5}">
-                      <a16:colId xmlns:a16="http://schemas.microsoft.com/office/drawing/2014/main" val="2045256900"/>
-                    </a:ext>
-                  </a:extLst>
-                </a:gridCol>
-                <a:gridCol w="1169522">
-                  <a:extLst>
-                    <a:ext uri="{9D8B030D-6E8A-4147-A177-3AD203B41FA5}">
-                      <a16:colId xmlns:a16="http://schemas.microsoft.com/office/drawing/2014/main" val="2428191204"/>
-                    </a:ext>
-                  </a:extLst>
-                </a:gridCol>
-                <a:gridCol w="795758">
-                  <a:extLst>
-                    <a:ext uri="{9D8B030D-6E8A-4147-A177-3AD203B41FA5}">
-                      <a16:colId xmlns:a16="http://schemas.microsoft.com/office/drawing/2014/main" val="908298886"/>
-                    </a:ext>
-                  </a:extLst>
-                </a:gridCol>
-                <a:gridCol w="964557">
-                  <a:extLst>
-                    <a:ext uri="{9D8B030D-6E8A-4147-A177-3AD203B41FA5}">
-                      <a16:colId xmlns:a16="http://schemas.microsoft.com/office/drawing/2014/main" val="3412753580"/>
-                    </a:ext>
-                  </a:extLst>
-                </a:gridCol>
+                <a:gridCol w="3931920"/>
+                <a:gridCol w="1031965"/>
+                <a:gridCol w="1031965"/>
+                <a:gridCol w="1031965"/>
+                <a:gridCol w="1031965"/>
+                <a:gridCol w="1031965"/>
+                <a:gridCol w="1031965"/>
+                <a:gridCol w="1031965"/>
               </a:tblGrid>
-              <a:tr h="303948">
+              <a:tr h="502920">
                 <a:tc>
                   <a:txBody>
                     <a:bodyPr/>
@@ -5316,26 +5794,18 @@
                     <a:p>
                       <a:pPr algn="ctr"/>
                       <a:r>
-                        <a:rPr lang="en-US">
+                        <a:rPr sz="1300" b="1">
                           <a:solidFill>
-                            <a:schemeClr val="tx1"/>
+                            <a:srgbClr val="FFFFFF"/>
                           </a:solidFill>
                         </a:rPr>
                         <a:t>Predictor</a:t>
                       </a:r>
-                      <a:endParaRPr lang="en-US" dirty="0">
-                        <a:solidFill>
-                          <a:schemeClr val="tx1"/>
-                        </a:solidFill>
-                      </a:endParaRPr>
                     </a:p>
                   </a:txBody>
-                  <a:tcPr>
+                  <a:tcPr anchor="ctr">
                     <a:solidFill>
-                      <a:schemeClr val="tx2">
-                        <a:lumMod val="25000"/>
-                        <a:lumOff val="75000"/>
-                      </a:schemeClr>
+                      <a:srgbClr val="1F3A5F"/>
                     </a:solidFill>
                   </a:tcPr>
                 </a:tc>
@@ -5344,28 +5814,20 @@
                     <a:bodyPr/>
                     <a:lstStyle/>
                     <a:p>
-                      <a:pPr algn="r"/>
+                      <a:pPr algn="ctr"/>
                       <a:r>
-                        <a:rPr lang="en-US">
+                        <a:rPr sz="1300" b="1">
                           <a:solidFill>
-                            <a:schemeClr val="tx1"/>
+                            <a:srgbClr val="FFFFFF"/>
                           </a:solidFill>
                         </a:rPr>
                         <a:t>Acc</a:t>
                       </a:r>
-                      <a:endParaRPr lang="en-US" dirty="0">
-                        <a:solidFill>
-                          <a:schemeClr val="tx1"/>
-                        </a:solidFill>
-                      </a:endParaRPr>
                     </a:p>
                   </a:txBody>
-                  <a:tcPr>
+                  <a:tcPr anchor="ctr">
                     <a:solidFill>
-                      <a:schemeClr val="tx2">
-                        <a:lumMod val="25000"/>
-                        <a:lumOff val="75000"/>
-                      </a:schemeClr>
+                      <a:srgbClr val="1F3A5F"/>
                     </a:solidFill>
                   </a:tcPr>
                 </a:tc>
@@ -5374,28 +5836,20 @@
                     <a:bodyPr/>
                     <a:lstStyle/>
                     <a:p>
-                      <a:pPr algn="r"/>
+                      <a:pPr algn="ctr"/>
                       <a:r>
-                        <a:rPr lang="en-US">
+                        <a:rPr sz="1300" b="1">
                           <a:solidFill>
-                            <a:schemeClr val="tx1"/>
+                            <a:srgbClr val="FFFFFF"/>
                           </a:solidFill>
                         </a:rPr>
-                        <a:t>Bal-Acc</a:t>
+                        <a:t>Bal-acc</a:t>
                       </a:r>
-                      <a:endParaRPr lang="en-US" dirty="0">
-                        <a:solidFill>
-                          <a:schemeClr val="tx1"/>
-                        </a:solidFill>
-                      </a:endParaRPr>
                     </a:p>
                   </a:txBody>
-                  <a:tcPr>
+                  <a:tcPr anchor="ctr">
                     <a:solidFill>
-                      <a:schemeClr val="tx2">
-                        <a:lumMod val="25000"/>
-                        <a:lumOff val="75000"/>
-                      </a:schemeClr>
+                      <a:srgbClr val="1F3A5F"/>
                     </a:solidFill>
                   </a:tcPr>
                 </a:tc>
@@ -5404,28 +5858,20 @@
                     <a:bodyPr/>
                     <a:lstStyle/>
                     <a:p>
-                      <a:pPr algn="r"/>
+                      <a:pPr algn="ctr"/>
                       <a:r>
-                        <a:rPr lang="en-US">
+                        <a:rPr sz="1300" b="1">
                           <a:solidFill>
-                            <a:schemeClr val="tx1"/>
+                            <a:srgbClr val="FFFFFF"/>
                           </a:solidFill>
                         </a:rPr>
                         <a:t>Macro-F1</a:t>
                       </a:r>
-                      <a:endParaRPr lang="en-US" dirty="0">
-                        <a:solidFill>
-                          <a:schemeClr val="tx1"/>
-                        </a:solidFill>
-                      </a:endParaRPr>
                     </a:p>
                   </a:txBody>
-                  <a:tcPr>
+                  <a:tcPr anchor="ctr">
                     <a:solidFill>
-                      <a:schemeClr val="tx2">
-                        <a:lumMod val="25000"/>
-                        <a:lumOff val="75000"/>
-                      </a:schemeClr>
+                      <a:srgbClr val="1F3A5F"/>
                     </a:solidFill>
                   </a:tcPr>
                 </a:tc>
@@ -5434,28 +5880,20 @@
                     <a:bodyPr/>
                     <a:lstStyle/>
                     <a:p>
-                      <a:pPr algn="r"/>
+                      <a:pPr algn="ctr"/>
                       <a:r>
-                        <a:rPr lang="en-US">
+                        <a:rPr sz="1300" b="1">
                           <a:solidFill>
-                            <a:schemeClr val="tx1"/>
+                            <a:srgbClr val="FFFFFF"/>
                           </a:solidFill>
                         </a:rPr>
                         <a:t>ROC-AUC</a:t>
                       </a:r>
-                      <a:endParaRPr lang="en-US" dirty="0">
-                        <a:solidFill>
-                          <a:schemeClr val="tx1"/>
-                        </a:solidFill>
-                      </a:endParaRPr>
                     </a:p>
                   </a:txBody>
-                  <a:tcPr>
+                  <a:tcPr anchor="ctr">
                     <a:solidFill>
-                      <a:schemeClr val="tx2">
-                        <a:lumMod val="25000"/>
-                        <a:lumOff val="75000"/>
-                      </a:schemeClr>
+                      <a:srgbClr val="1F3A5F"/>
                     </a:solidFill>
                   </a:tcPr>
                 </a:tc>
@@ -5464,28 +5902,20 @@
                     <a:bodyPr/>
                     <a:lstStyle/>
                     <a:p>
-                      <a:pPr algn="r"/>
+                      <a:pPr algn="ctr"/>
                       <a:r>
-                        <a:rPr lang="en-US">
+                        <a:rPr sz="1300" b="1">
                           <a:solidFill>
-                            <a:schemeClr val="tx1"/>
+                            <a:srgbClr val="FFFFFF"/>
                           </a:solidFill>
                         </a:rPr>
                         <a:t>PR-AUC</a:t>
                       </a:r>
-                      <a:endParaRPr lang="en-US" dirty="0">
-                        <a:solidFill>
-                          <a:schemeClr val="tx1"/>
-                        </a:solidFill>
-                      </a:endParaRPr>
                     </a:p>
                   </a:txBody>
-                  <a:tcPr>
+                  <a:tcPr anchor="ctr">
                     <a:solidFill>
-                      <a:schemeClr val="tx2">
-                        <a:lumMod val="25000"/>
-                        <a:lumOff val="75000"/>
-                      </a:schemeClr>
+                      <a:srgbClr val="1F3A5F"/>
                     </a:solidFill>
                   </a:tcPr>
                 </a:tc>
@@ -5494,28 +5924,20 @@
                     <a:bodyPr/>
                     <a:lstStyle/>
                     <a:p>
-                      <a:pPr algn="r"/>
+                      <a:pPr algn="ctr"/>
                       <a:r>
-                        <a:rPr lang="en-US">
+                        <a:rPr sz="1300" b="1">
                           <a:solidFill>
-                            <a:schemeClr val="tx1"/>
+                            <a:srgbClr val="FFFFFF"/>
                           </a:solidFill>
                         </a:rPr>
                         <a:t>Brier</a:t>
                       </a:r>
-                      <a:endParaRPr lang="en-US" dirty="0">
-                        <a:solidFill>
-                          <a:schemeClr val="tx1"/>
-                        </a:solidFill>
-                      </a:endParaRPr>
                     </a:p>
                   </a:txBody>
-                  <a:tcPr>
+                  <a:tcPr anchor="ctr">
                     <a:solidFill>
-                      <a:schemeClr val="tx2">
-                        <a:lumMod val="25000"/>
-                        <a:lumOff val="75000"/>
-                      </a:schemeClr>
+                      <a:srgbClr val="1F3A5F"/>
                     </a:solidFill>
                   </a:tcPr>
                 </a:tc>
@@ -5524,88 +5946,44 @@
                     <a:bodyPr/>
                     <a:lstStyle/>
                     <a:p>
-                      <a:pPr algn="r"/>
+                      <a:pPr algn="ctr"/>
                       <a:r>
-                        <a:rPr lang="en-US">
+                        <a:rPr sz="1300" b="1">
                           <a:solidFill>
-                            <a:schemeClr val="tx1"/>
+                            <a:srgbClr val="FFFFFF"/>
                           </a:solidFill>
                         </a:rPr>
                         <a:t>ECE</a:t>
                       </a:r>
-                      <a:endParaRPr lang="en-US" dirty="0">
-                        <a:solidFill>
-                          <a:schemeClr val="tx1"/>
-                        </a:solidFill>
-                      </a:endParaRPr>
                     </a:p>
                   </a:txBody>
-                  <a:tcPr>
+                  <a:tcPr anchor="ctr">
                     <a:solidFill>
-                      <a:schemeClr val="tx2">
-                        <a:lumMod val="25000"/>
-                        <a:lumOff val="75000"/>
-                      </a:schemeClr>
+                      <a:srgbClr val="1F3A5F"/>
                     </a:solidFill>
                   </a:tcPr>
                 </a:tc>
-                <a:extLst>
-                  <a:ext uri="{0D108BD9-81ED-4DB2-BD59-A6C34878D82A}">
-                    <a16:rowId xmlns:a16="http://schemas.microsoft.com/office/drawing/2014/main" val="521961415"/>
-                  </a:ext>
-                </a:extLst>
               </a:tr>
-              <a:tr h="303948">
+              <a:tr h="502920">
                 <a:tc>
                   <a:txBody>
                     <a:bodyPr/>
                     <a:lstStyle/>
                     <a:p>
-                      <a:pPr lvl="0" algn="ctr">
-                        <a:buNone/>
-                      </a:pPr>
+                      <a:pPr algn="l"/>
                       <a:r>
-                        <a:rPr lang="en-US" sz="1800" b="1" i="0" u="none" strike="noStrike" noProof="0" dirty="0">
+                        <a:rPr sz="1200">
                           <a:solidFill>
-                            <a:schemeClr val="tx1"/>
+                            <a:srgbClr val="222222"/>
                           </a:solidFill>
-                          <a:latin typeface="Aptos"/>
                         </a:rPr>
-                        <a:t>Zero-shot</a:t>
+                        <a:t>Zero-shot, logprob (baseline)</a:t>
                       </a:r>
-                      <a:r>
-                        <a:rPr lang="en-US" sz="1800" b="0" i="0" u="none" strike="noStrike" noProof="0" dirty="0">
-                          <a:solidFill>
-                            <a:schemeClr val="tx1"/>
-                          </a:solidFill>
-                          <a:latin typeface="Aptos"/>
-                        </a:rPr>
-                        <a:t> (decision/</a:t>
-                      </a:r>
-                      <a:r>
-                        <a:rPr lang="en-US" sz="1800" b="0" i="0" u="none" strike="noStrike" noProof="0" dirty="0" err="1">
-                          <a:solidFill>
-                            <a:schemeClr val="tx1"/>
-                          </a:solidFill>
-                          <a:latin typeface="Aptos"/>
-                        </a:rPr>
-                        <a:t>logprob</a:t>
-                      </a:r>
-                      <a:r>
-                        <a:rPr lang="en-US" sz="1800" b="0" i="0" u="none" strike="noStrike" noProof="0" dirty="0">
-                          <a:solidFill>
-                            <a:schemeClr val="tx1"/>
-                          </a:solidFill>
-                          <a:latin typeface="Aptos"/>
-                        </a:rPr>
-                        <a:t>)</a:t>
-                      </a:r>
-                      <a:endParaRPr lang="en-US" dirty="0"/>
                     </a:p>
                   </a:txBody>
-                  <a:tcPr>
+                  <a:tcPr anchor="ctr">
                     <a:solidFill>
-                      <a:schemeClr val="bg2"/>
+                      <a:srgbClr val="F4F7FB"/>
                     </a:solidFill>
                   </a:tcPr>
                 </a:tc>
@@ -5614,27 +5992,20 @@
                     <a:bodyPr/>
                     <a:lstStyle/>
                     <a:p>
-                      <a:pPr lvl="0" algn="r">
-                        <a:buNone/>
-                      </a:pPr>
+                      <a:pPr algn="ctr"/>
                       <a:r>
-                        <a:rPr lang="en-US" u="sng">
+                        <a:rPr sz="1200">
                           <a:solidFill>
-                            <a:schemeClr val="tx1"/>
+                            <a:srgbClr val="222222"/>
                           </a:solidFill>
                         </a:rPr>
                         <a:t>0.668</a:t>
                       </a:r>
-                      <a:endParaRPr lang="en-US" u="sng" dirty="0">
-                        <a:solidFill>
-                          <a:schemeClr val="tx1"/>
-                        </a:solidFill>
-                      </a:endParaRPr>
                     </a:p>
                   </a:txBody>
-                  <a:tcPr>
+                  <a:tcPr anchor="ctr">
                     <a:solidFill>
-                      <a:schemeClr val="bg2"/>
+                      <a:srgbClr val="F4F7FB"/>
                     </a:solidFill>
                   </a:tcPr>
                 </a:tc>
@@ -5643,25 +6014,20 @@
                     <a:bodyPr/>
                     <a:lstStyle/>
                     <a:p>
-                      <a:pPr algn="r"/>
+                      <a:pPr algn="ctr"/>
                       <a:r>
-                        <a:rPr lang="en-US" u="sng">
+                        <a:rPr sz="1200">
                           <a:solidFill>
-                            <a:schemeClr val="tx1"/>
+                            <a:srgbClr val="222222"/>
                           </a:solidFill>
                         </a:rPr>
                         <a:t>0.662</a:t>
                       </a:r>
-                      <a:endParaRPr lang="en-US" u="sng" dirty="0">
-                        <a:solidFill>
-                          <a:schemeClr val="tx1"/>
-                        </a:solidFill>
-                      </a:endParaRPr>
                     </a:p>
                   </a:txBody>
-                  <a:tcPr>
+                  <a:tcPr anchor="ctr">
                     <a:solidFill>
-                      <a:schemeClr val="bg2"/>
+                      <a:srgbClr val="F4F7FB"/>
                     </a:solidFill>
                   </a:tcPr>
                 </a:tc>
@@ -5670,20 +6036,20 @@
                     <a:bodyPr/>
                     <a:lstStyle/>
                     <a:p>
-                      <a:pPr algn="r"/>
+                      <a:pPr algn="ctr"/>
                       <a:r>
-                        <a:rPr lang="en-US" u="sng">
+                        <a:rPr sz="1200">
                           <a:solidFill>
-                            <a:schemeClr val="tx1"/>
+                            <a:srgbClr val="222222"/>
                           </a:solidFill>
                         </a:rPr>
-                        <a:t>0.662</a:t>
+                        <a:t>0.663</a:t>
                       </a:r>
                     </a:p>
                   </a:txBody>
-                  <a:tcPr>
+                  <a:tcPr anchor="ctr">
                     <a:solidFill>
-                      <a:schemeClr val="bg2"/>
+                      <a:srgbClr val="F4F7FB"/>
                     </a:solidFill>
                   </a:tcPr>
                 </a:tc>
@@ -5692,20 +6058,20 @@
                     <a:bodyPr/>
                     <a:lstStyle/>
                     <a:p>
-                      <a:pPr algn="r"/>
+                      <a:pPr algn="ctr"/>
                       <a:r>
-                        <a:rPr lang="en-US" u="sng">
+                        <a:rPr sz="1200">
                           <a:solidFill>
-                            <a:schemeClr val="tx1"/>
+                            <a:srgbClr val="222222"/>
                           </a:solidFill>
                         </a:rPr>
                         <a:t>0.711</a:t>
                       </a:r>
                     </a:p>
                   </a:txBody>
-                  <a:tcPr>
+                  <a:tcPr anchor="ctr">
                     <a:solidFill>
-                      <a:schemeClr val="bg2"/>
+                      <a:srgbClr val="F4F7FB"/>
                     </a:solidFill>
                   </a:tcPr>
                 </a:tc>
@@ -5714,20 +6080,20 @@
                     <a:bodyPr/>
                     <a:lstStyle/>
                     <a:p>
-                      <a:pPr algn="r"/>
+                      <a:pPr algn="ctr"/>
                       <a:r>
-                        <a:rPr lang="en-US" u="sng">
+                        <a:rPr sz="1200">
                           <a:solidFill>
-                            <a:schemeClr val="tx1"/>
+                            <a:srgbClr val="222222"/>
                           </a:solidFill>
                         </a:rPr>
-                        <a:t>0.679</a:t>
+                        <a:t>0.690</a:t>
                       </a:r>
                     </a:p>
                   </a:txBody>
-                  <a:tcPr>
+                  <a:tcPr anchor="ctr">
                     <a:solidFill>
-                      <a:schemeClr val="bg2"/>
+                      <a:srgbClr val="F4F7FB"/>
                     </a:solidFill>
                   </a:tcPr>
                 </a:tc>
@@ -5736,25 +6102,20 @@
                     <a:bodyPr/>
                     <a:lstStyle/>
                     <a:p>
-                      <a:pPr algn="r"/>
+                      <a:pPr algn="ctr"/>
                       <a:r>
-                        <a:rPr lang="en-US" u="sng">
+                        <a:rPr sz="1200">
                           <a:solidFill>
-                            <a:schemeClr val="tx1"/>
+                            <a:srgbClr val="222222"/>
                           </a:solidFill>
                         </a:rPr>
-                        <a:t>0.217</a:t>
+                        <a:t>0.218</a:t>
                       </a:r>
-                      <a:endParaRPr lang="en-US" u="sng" dirty="0">
-                        <a:solidFill>
-                          <a:schemeClr val="tx1"/>
-                        </a:solidFill>
-                      </a:endParaRPr>
                     </a:p>
                   </a:txBody>
-                  <a:tcPr>
+                  <a:tcPr anchor="ctr">
                     <a:solidFill>
-                      <a:schemeClr val="bg2"/>
+                      <a:srgbClr val="F4F7FB"/>
                     </a:solidFill>
                   </a:tcPr>
                 </a:tc>
@@ -5763,80 +6124,44 @@
                     <a:bodyPr/>
                     <a:lstStyle/>
                     <a:p>
-                      <a:pPr algn="r"/>
+                      <a:pPr algn="ctr"/>
                       <a:r>
-                        <a:rPr lang="en-US" u="sng">
+                        <a:rPr sz="1200">
                           <a:solidFill>
-                            <a:schemeClr val="tx1"/>
+                            <a:srgbClr val="222222"/>
                           </a:solidFill>
                         </a:rPr>
-                        <a:t>0.053</a:t>
+                        <a:t>0.061</a:t>
                       </a:r>
                     </a:p>
                   </a:txBody>
-                  <a:tcPr>
+                  <a:tcPr anchor="ctr">
                     <a:solidFill>
-                      <a:schemeClr val="bg2"/>
+                      <a:srgbClr val="F4F7FB"/>
                     </a:solidFill>
                   </a:tcPr>
                 </a:tc>
-                <a:extLst>
-                  <a:ext uri="{0D108BD9-81ED-4DB2-BD59-A6C34878D82A}">
-                    <a16:rowId xmlns:a16="http://schemas.microsoft.com/office/drawing/2014/main" val="2194446817"/>
-                  </a:ext>
-                </a:extLst>
               </a:tr>
-              <a:tr h="303948">
+              <a:tr h="502920">
                 <a:tc>
                   <a:txBody>
                     <a:bodyPr/>
                     <a:lstStyle/>
                     <a:p>
-                      <a:pPr lvl="0" algn="ctr">
-                        <a:buNone/>
-                      </a:pPr>
+                      <a:pPr algn="l"/>
                       <a:r>
-                        <a:rPr lang="en-US" sz="1800" b="1" i="0" u="none" strike="noStrike" noProof="0" dirty="0">
+                        <a:rPr sz="1200" b="1">
                           <a:solidFill>
-                            <a:schemeClr val="tx1"/>
+                            <a:srgbClr val="2E7D4F"/>
                           </a:solidFill>
-                          <a:latin typeface="Aptos"/>
                         </a:rPr>
-                        <a:t>Fine-tuned</a:t>
+                        <a:t>Fine-tuned (LoRA SFT, decision)</a:t>
                       </a:r>
-                      <a:r>
-                        <a:rPr lang="en-US" sz="1800" b="0" i="0" u="none" strike="noStrike" noProof="0" dirty="0">
-                          <a:solidFill>
-                            <a:schemeClr val="tx1"/>
-                          </a:solidFill>
-                          <a:latin typeface="Aptos"/>
-                        </a:rPr>
-                        <a:t> (</a:t>
-                      </a:r>
-                      <a:r>
-                        <a:rPr lang="en-US" sz="1800" b="0" i="0" u="none" strike="noStrike" noProof="0" dirty="0" err="1">
-                          <a:solidFill>
-                            <a:schemeClr val="tx1"/>
-                          </a:solidFill>
-                          <a:latin typeface="Aptos"/>
-                        </a:rPr>
-                        <a:t>LoRA</a:t>
-                      </a:r>
-                      <a:r>
-                        <a:rPr lang="en-US" sz="1800" b="0" i="0" u="none" strike="noStrike" noProof="0" dirty="0">
-                          <a:solidFill>
-                            <a:schemeClr val="tx1"/>
-                          </a:solidFill>
-                          <a:latin typeface="Aptos"/>
-                        </a:rPr>
-                        <a:t> SFT, decision)</a:t>
-                      </a:r>
-                      <a:endParaRPr lang="en-US" dirty="0"/>
                     </a:p>
                   </a:txBody>
-                  <a:tcPr>
+                  <a:tcPr anchor="ctr">
                     <a:solidFill>
-                      <a:schemeClr val="bg2"/>
+                      <a:srgbClr val="E8F0E8"/>
                     </a:solidFill>
                   </a:tcPr>
                 </a:tc>
@@ -5845,27 +6170,20 @@
                     <a:bodyPr/>
                     <a:lstStyle/>
                     <a:p>
-                      <a:pPr lvl="0" algn="r">
-                        <a:buNone/>
-                      </a:pPr>
+                      <a:pPr algn="ctr"/>
                       <a:r>
-                        <a:rPr lang="en-US" b="1">
+                        <a:rPr sz="1200" b="1">
                           <a:solidFill>
-                            <a:schemeClr val="tx1"/>
+                            <a:srgbClr val="2E7D4F"/>
                           </a:solidFill>
                         </a:rPr>
-                        <a:t>0.701</a:t>
+                        <a:t>0.699</a:t>
                       </a:r>
-                      <a:endParaRPr lang="en-US" b="1" dirty="0">
-                        <a:solidFill>
-                          <a:schemeClr val="tx1"/>
-                        </a:solidFill>
-                      </a:endParaRPr>
                     </a:p>
                   </a:txBody>
-                  <a:tcPr>
+                  <a:tcPr anchor="ctr">
                     <a:solidFill>
-                      <a:schemeClr val="bg2"/>
+                      <a:srgbClr val="E8F0E8"/>
                     </a:solidFill>
                   </a:tcPr>
                 </a:tc>
@@ -5874,27 +6192,20 @@
                     <a:bodyPr/>
                     <a:lstStyle/>
                     <a:p>
-                      <a:pPr lvl="0" algn="r">
-                        <a:buNone/>
-                      </a:pPr>
+                      <a:pPr algn="ctr"/>
                       <a:r>
-                        <a:rPr lang="en-US" b="1">
+                        <a:rPr sz="1200" b="1">
                           <a:solidFill>
-                            <a:schemeClr val="tx1"/>
+                            <a:srgbClr val="2E7D4F"/>
                           </a:solidFill>
                         </a:rPr>
-                        <a:t>0.695</a:t>
+                        <a:t>0.694</a:t>
                       </a:r>
-                      <a:endParaRPr lang="en-US" b="1" dirty="0">
-                        <a:solidFill>
-                          <a:schemeClr val="tx1"/>
-                        </a:solidFill>
-                      </a:endParaRPr>
                     </a:p>
                   </a:txBody>
-                  <a:tcPr>
+                  <a:tcPr anchor="ctr">
                     <a:solidFill>
-                      <a:schemeClr val="bg2"/>
+                      <a:srgbClr val="E8F0E8"/>
                     </a:solidFill>
                   </a:tcPr>
                 </a:tc>
@@ -5903,22 +6214,20 @@
                     <a:bodyPr/>
                     <a:lstStyle/>
                     <a:p>
-                      <a:pPr lvl="0" algn="r">
-                        <a:buNone/>
-                      </a:pPr>
+                      <a:pPr algn="ctr"/>
                       <a:r>
-                        <a:rPr lang="en-US" b="1">
+                        <a:rPr sz="1200" b="1">
                           <a:solidFill>
-                            <a:schemeClr val="tx1"/>
+                            <a:srgbClr val="2E7D4F"/>
                           </a:solidFill>
                         </a:rPr>
-                        <a:t>0.696</a:t>
+                        <a:t>0.694</a:t>
                       </a:r>
                     </a:p>
                   </a:txBody>
-                  <a:tcPr>
+                  <a:tcPr anchor="ctr">
                     <a:solidFill>
-                      <a:schemeClr val="bg2"/>
+                      <a:srgbClr val="E8F0E8"/>
                     </a:solidFill>
                   </a:tcPr>
                 </a:tc>
@@ -5927,27 +6236,20 @@
                     <a:bodyPr/>
                     <a:lstStyle/>
                     <a:p>
-                      <a:pPr lvl="0" algn="r">
-                        <a:buNone/>
-                      </a:pPr>
+                      <a:pPr algn="ctr"/>
                       <a:r>
-                        <a:rPr lang="en-US" b="1">
+                        <a:rPr sz="1200" b="1">
                           <a:solidFill>
-                            <a:schemeClr val="tx1"/>
+                            <a:srgbClr val="2E7D4F"/>
                           </a:solidFill>
                         </a:rPr>
                         <a:t>0.749</a:t>
                       </a:r>
-                      <a:endParaRPr lang="en-US" b="1" dirty="0">
-                        <a:solidFill>
-                          <a:schemeClr val="tx1"/>
-                        </a:solidFill>
-                      </a:endParaRPr>
                     </a:p>
                   </a:txBody>
-                  <a:tcPr>
+                  <a:tcPr anchor="ctr">
                     <a:solidFill>
-                      <a:schemeClr val="bg2"/>
+                      <a:srgbClr val="E8F0E8"/>
                     </a:solidFill>
                   </a:tcPr>
                 </a:tc>
@@ -5956,22 +6258,20 @@
                     <a:bodyPr/>
                     <a:lstStyle/>
                     <a:p>
-                      <a:pPr lvl="0" algn="r">
-                        <a:buNone/>
-                      </a:pPr>
+                      <a:pPr algn="ctr"/>
                       <a:r>
-                        <a:rPr lang="en-US" b="1">
+                        <a:rPr sz="1200" b="1">
                           <a:solidFill>
-                            <a:schemeClr val="tx1"/>
+                            <a:srgbClr val="2E7D4F"/>
                           </a:solidFill>
                         </a:rPr>
-                        <a:t>0.716</a:t>
+                        <a:t>0.722</a:t>
                       </a:r>
                     </a:p>
                   </a:txBody>
-                  <a:tcPr>
+                  <a:tcPr anchor="ctr">
                     <a:solidFill>
-                      <a:schemeClr val="bg2"/>
+                      <a:srgbClr val="E8F0E8"/>
                     </a:solidFill>
                   </a:tcPr>
                 </a:tc>
@@ -5980,22 +6280,20 @@
                     <a:bodyPr/>
                     <a:lstStyle/>
                     <a:p>
-                      <a:pPr lvl="0" algn="r">
-                        <a:buNone/>
-                      </a:pPr>
+                      <a:pPr algn="ctr"/>
                       <a:r>
-                        <a:rPr lang="en-US" b="1">
+                        <a:rPr sz="1200" b="1">
                           <a:solidFill>
-                            <a:schemeClr val="tx1"/>
+                            <a:srgbClr val="2E7D4F"/>
                           </a:solidFill>
                         </a:rPr>
-                        <a:t>0.201</a:t>
+                        <a:t>0.203</a:t>
                       </a:r>
                     </a:p>
                   </a:txBody>
-                  <a:tcPr>
+                  <a:tcPr anchor="ctr">
                     <a:solidFill>
-                      <a:schemeClr val="bg2"/>
+                      <a:srgbClr val="E8F0E8"/>
                     </a:solidFill>
                   </a:tcPr>
                 </a:tc>
@@ -6004,62 +6302,44 @@
                     <a:bodyPr/>
                     <a:lstStyle/>
                     <a:p>
-                      <a:pPr lvl="0" algn="r">
-                        <a:buNone/>
-                      </a:pPr>
+                      <a:pPr algn="ctr"/>
                       <a:r>
-                        <a:rPr lang="en-US" b="1">
+                        <a:rPr sz="1200" b="1">
                           <a:solidFill>
-                            <a:schemeClr val="tx1"/>
+                            <a:srgbClr val="2E7D4F"/>
                           </a:solidFill>
                         </a:rPr>
-                        <a:t>0.027</a:t>
+                        <a:t>0.052</a:t>
                       </a:r>
-                      <a:endParaRPr lang="en-US" b="1" dirty="0">
-                        <a:solidFill>
-                          <a:schemeClr val="tx1"/>
-                        </a:solidFill>
-                      </a:endParaRPr>
                     </a:p>
                   </a:txBody>
-                  <a:tcPr>
+                  <a:tcPr anchor="ctr">
                     <a:solidFill>
-                      <a:schemeClr val="bg2"/>
+                      <a:srgbClr val="E8F0E8"/>
                     </a:solidFill>
                   </a:tcPr>
                 </a:tc>
-                <a:extLst>
-                  <a:ext uri="{0D108BD9-81ED-4DB2-BD59-A6C34878D82A}">
-                    <a16:rowId xmlns:a16="http://schemas.microsoft.com/office/drawing/2014/main" val="2394982671"/>
-                  </a:ext>
-                </a:extLst>
               </a:tr>
-              <a:tr h="531910">
+              <a:tr h="502920">
                 <a:tc>
                   <a:txBody>
                     <a:bodyPr/>
                     <a:lstStyle/>
                     <a:p>
-                      <a:pPr lvl="0" algn="ctr">
-                        <a:buNone/>
-                      </a:pPr>
+                      <a:pPr algn="l"/>
                       <a:r>
-                        <a:rPr lang="en-US" sz="1800" b="0" i="0" u="none" strike="noStrike" noProof="0">
+                        <a:rPr sz="1200" i="1">
                           <a:solidFill>
-                            <a:schemeClr val="tx1"/>
+                            <a:srgbClr val="7A7A7A"/>
                           </a:solidFill>
                         </a:rPr>
-                        <a:t>Zero-shot (score)</a:t>
+                        <a:t>secondary · score elicitation, not matched</a:t>
                       </a:r>
-                      <a:endParaRPr lang="en-US"/>
                     </a:p>
                   </a:txBody>
-                  <a:tcPr>
+                  <a:tcPr anchor="ctr">
                     <a:solidFill>
-                      <a:schemeClr val="accent2">
-                        <a:lumMod val="40000"/>
-                        <a:lumOff val="60000"/>
-                      </a:schemeClr>
+                      <a:srgbClr val="EFEFEF"/>
                     </a:solidFill>
                   </a:tcPr>
                 </a:tc>
@@ -6068,27 +6348,20 @@
                     <a:bodyPr/>
                     <a:lstStyle/>
                     <a:p>
-                      <a:pPr lvl="0" algn="r">
-                        <a:buNone/>
-                      </a:pPr>
+                      <a:pPr algn="ctr"/>
                       <a:r>
-                        <a:rPr lang="en-US" sz="1800" b="0" i="0" u="none" strike="noStrike" noProof="0">
+                        <a:rPr sz="1200" i="1">
                           <a:solidFill>
-                            <a:schemeClr val="tx1"/>
+                            <a:srgbClr val="7A7A7A"/>
                           </a:solidFill>
-                          <a:latin typeface="Aptos"/>
                         </a:rPr>
                         <a:t>0.700</a:t>
                       </a:r>
-                      <a:endParaRPr lang="en-US"/>
                     </a:p>
                   </a:txBody>
-                  <a:tcPr>
+                  <a:tcPr anchor="ctr">
                     <a:solidFill>
-                      <a:schemeClr val="accent2">
-                        <a:lumMod val="40000"/>
-                        <a:lumOff val="60000"/>
-                      </a:schemeClr>
+                      <a:srgbClr val="EFEFEF"/>
                     </a:solidFill>
                   </a:tcPr>
                 </a:tc>
@@ -6097,27 +6370,20 @@
                     <a:bodyPr/>
                     <a:lstStyle/>
                     <a:p>
-                      <a:pPr lvl="0" algn="r">
-                        <a:buNone/>
-                      </a:pPr>
+                      <a:pPr algn="ctr"/>
                       <a:r>
-                        <a:rPr lang="en-US" sz="1800" b="0" i="0" u="none" strike="noStrike" noProof="0">
+                        <a:rPr sz="1200" i="1">
                           <a:solidFill>
-                            <a:schemeClr val="tx1"/>
+                            <a:srgbClr val="7A7A7A"/>
                           </a:solidFill>
-                          <a:latin typeface="Aptos"/>
                         </a:rPr>
                         <a:t>0.699</a:t>
                       </a:r>
-                      <a:endParaRPr lang="en-US"/>
                     </a:p>
                   </a:txBody>
-                  <a:tcPr>
+                  <a:tcPr anchor="ctr">
                     <a:solidFill>
-                      <a:schemeClr val="accent2">
-                        <a:lumMod val="40000"/>
-                        <a:lumOff val="60000"/>
-                      </a:schemeClr>
+                      <a:srgbClr val="EFEFEF"/>
                     </a:solidFill>
                   </a:tcPr>
                 </a:tc>
@@ -6126,27 +6392,20 @@
                     <a:bodyPr/>
                     <a:lstStyle/>
                     <a:p>
-                      <a:pPr lvl="0" algn="r">
-                        <a:buNone/>
-                      </a:pPr>
+                      <a:pPr algn="ctr"/>
                       <a:r>
-                        <a:rPr lang="en-US" sz="1800" b="0" i="0" u="none" strike="noStrike" noProof="0">
+                        <a:rPr sz="1200" i="1">
                           <a:solidFill>
-                            <a:schemeClr val="tx1"/>
+                            <a:srgbClr val="7A7A7A"/>
                           </a:solidFill>
-                          <a:latin typeface="Aptos"/>
                         </a:rPr>
                         <a:t>0.699</a:t>
                       </a:r>
-                      <a:endParaRPr lang="en-US"/>
                     </a:p>
                   </a:txBody>
-                  <a:tcPr>
+                  <a:tcPr anchor="ctr">
                     <a:solidFill>
-                      <a:schemeClr val="accent2">
-                        <a:lumMod val="40000"/>
-                        <a:lumOff val="60000"/>
-                      </a:schemeClr>
+                      <a:srgbClr val="EFEFEF"/>
                     </a:solidFill>
                   </a:tcPr>
                 </a:tc>
@@ -6155,52 +6414,20 @@
                     <a:bodyPr/>
                     <a:lstStyle/>
                     <a:p>
-                      <a:pPr lvl="0" algn="r">
-                        <a:lnSpc>
-                          <a:spcPct val="100000"/>
-                        </a:lnSpc>
-                        <a:spcBef>
-                          <a:spcPts val="0"/>
-                        </a:spcBef>
-                        <a:spcAft>
-                          <a:spcPts val="0"/>
-                        </a:spcAft>
-                        <a:buNone/>
-                      </a:pPr>
+                      <a:pPr algn="ctr"/>
                       <a:r>
-                        <a:rPr lang="en-US" sz="1800" b="0" i="0" u="none" strike="noStrike" noProof="0">
+                        <a:rPr sz="1200" i="1">
                           <a:solidFill>
-                            <a:schemeClr val="tx1"/>
+                            <a:srgbClr val="7A7A7A"/>
                           </a:solidFill>
-                          <a:latin typeface="Aptos"/>
                         </a:rPr>
                         <a:t>0.715</a:t>
                       </a:r>
-                      <a:endParaRPr lang="en-US" sz="1800" b="0" i="0" u="none" strike="noStrike" noProof="0">
-                        <a:solidFill>
-                          <a:srgbClr val="000000"/>
-                        </a:solidFill>
-                        <a:latin typeface="Aptos"/>
-                      </a:endParaRPr>
-                    </a:p>
-                    <a:p>
-                      <a:pPr lvl="0" algn="r">
-                        <a:buNone/>
-                      </a:pPr>
-                      <a:endParaRPr lang="en-US" sz="1800" b="0" i="0" u="none" strike="noStrike" noProof="0" dirty="0">
-                        <a:solidFill>
-                          <a:schemeClr val="tx1"/>
-                        </a:solidFill>
-                        <a:latin typeface="Aptos"/>
-                      </a:endParaRPr>
                     </a:p>
                   </a:txBody>
-                  <a:tcPr>
+                  <a:tcPr anchor="ctr">
                     <a:solidFill>
-                      <a:schemeClr val="accent2">
-                        <a:lumMod val="40000"/>
-                        <a:lumOff val="60000"/>
-                      </a:schemeClr>
+                      <a:srgbClr val="EFEFEF"/>
                     </a:solidFill>
                   </a:tcPr>
                 </a:tc>
@@ -6209,27 +6436,20 @@
                     <a:bodyPr/>
                     <a:lstStyle/>
                     <a:p>
-                      <a:pPr lvl="0" algn="r">
-                        <a:buNone/>
-                      </a:pPr>
+                      <a:pPr algn="ctr"/>
                       <a:r>
-                        <a:rPr lang="en-US" sz="1800" b="0" i="0" u="none" strike="noStrike" noProof="0">
+                        <a:rPr sz="1200" i="1">
                           <a:solidFill>
-                            <a:schemeClr val="tx1"/>
+                            <a:srgbClr val="7A7A7A"/>
                           </a:solidFill>
-                          <a:latin typeface="Aptos"/>
                         </a:rPr>
-                        <a:t>0.660</a:t>
+                        <a:t>0.680</a:t>
                       </a:r>
-                      <a:endParaRPr lang="en-US"/>
                     </a:p>
                   </a:txBody>
-                  <a:tcPr>
+                  <a:tcPr anchor="ctr">
                     <a:solidFill>
-                      <a:schemeClr val="accent2">
-                        <a:lumMod val="40000"/>
-                        <a:lumOff val="60000"/>
-                      </a:schemeClr>
+                      <a:srgbClr val="EFEFEF"/>
                     </a:solidFill>
                   </a:tcPr>
                 </a:tc>
@@ -6238,51 +6458,20 @@
                     <a:bodyPr/>
                     <a:lstStyle/>
                     <a:p>
-                      <a:pPr lvl="0" algn="r">
-                        <a:lnSpc>
-                          <a:spcPct val="100000"/>
-                        </a:lnSpc>
-                        <a:spcBef>
-                          <a:spcPts val="0"/>
-                        </a:spcBef>
-                        <a:spcAft>
-                          <a:spcPts val="0"/>
-                        </a:spcAft>
-                        <a:buNone/>
-                      </a:pPr>
+                      <a:pPr algn="ctr"/>
                       <a:r>
-                        <a:rPr lang="en-US" sz="1800" b="0" i="0" u="none" strike="noStrike" noProof="0">
+                        <a:rPr sz="1200" i="1">
                           <a:solidFill>
-                            <a:schemeClr val="tx1"/>
+                            <a:srgbClr val="7A7A7A"/>
                           </a:solidFill>
-                          <a:latin typeface="Aptos"/>
                         </a:rPr>
-                        <a:t>0.225</a:t>
+                        <a:t>0.227</a:t>
                       </a:r>
-                      <a:endParaRPr lang="en-US" sz="1800" b="0" i="0" u="none" strike="noStrike" noProof="0">
-                        <a:solidFill>
-                          <a:srgbClr val="000000"/>
-                        </a:solidFill>
-                        <a:latin typeface="Aptos"/>
-                      </a:endParaRPr>
-                    </a:p>
-                    <a:p>
-                      <a:pPr lvl="0" algn="r">
-                        <a:buNone/>
-                      </a:pPr>
-                      <a:endParaRPr lang="en-US" b="1" dirty="0">
-                        <a:solidFill>
-                          <a:schemeClr val="tx1"/>
-                        </a:solidFill>
-                      </a:endParaRPr>
                     </a:p>
                   </a:txBody>
-                  <a:tcPr>
+                  <a:tcPr anchor="ctr">
                     <a:solidFill>
-                      <a:schemeClr val="accent2">
-                        <a:lumMod val="40000"/>
-                        <a:lumOff val="60000"/>
-                      </a:schemeClr>
+                      <a:srgbClr val="EFEFEF"/>
                     </a:solidFill>
                   </a:tcPr>
                 </a:tc>
@@ -6291,35 +6480,23 @@
                     <a:bodyPr/>
                     <a:lstStyle/>
                     <a:p>
-                      <a:pPr lvl="0" algn="r">
-                        <a:buNone/>
-                      </a:pPr>
+                      <a:pPr algn="ctr"/>
                       <a:r>
-                        <a:rPr lang="en-US" sz="1800" b="0" i="0" u="none" strike="noStrike" noProof="0">
+                        <a:rPr sz="1200" i="1">
                           <a:solidFill>
-                            <a:schemeClr val="tx1"/>
+                            <a:srgbClr val="7A7A7A"/>
                           </a:solidFill>
-                          <a:latin typeface="Aptos"/>
                         </a:rPr>
-                        <a:t>0.117</a:t>
+                        <a:t>0.108</a:t>
                       </a:r>
-                      <a:endParaRPr lang="en-US"/>
                     </a:p>
                   </a:txBody>
-                  <a:tcPr>
+                  <a:tcPr anchor="ctr">
                     <a:solidFill>
-                      <a:schemeClr val="accent2">
-                        <a:lumMod val="40000"/>
-                        <a:lumOff val="60000"/>
-                      </a:schemeClr>
+                      <a:srgbClr val="EFEFEF"/>
                     </a:solidFill>
                   </a:tcPr>
                 </a:tc>
-                <a:extLst>
-                  <a:ext uri="{0D108BD9-81ED-4DB2-BD59-A6C34878D82A}">
-                    <a16:rowId xmlns:a16="http://schemas.microsoft.com/office/drawing/2014/main" val="500252350"/>
-                  </a:ext>
-                </a:extLst>
               </a:tr>
             </a:tbl>
           </a:graphicData>
@@ -6327,264 +6504,82 @@
       </p:graphicFrame>
       <p:sp>
         <p:nvSpPr>
-          <p:cNvPr id="6" name="Content Placeholder 2">
-            <a:extLst>
-              <a:ext uri="{FF2B5EF4-FFF2-40B4-BE49-F238E27FC236}">
-                <a16:creationId xmlns:a16="http://schemas.microsoft.com/office/drawing/2014/main" id="{8BECF270-D79D-A102-60A7-EBFD35D98732}"/>
-              </a:ext>
-            </a:extLst>
-          </p:cNvPr>
-          <p:cNvSpPr txBox="1">
-            <a:spLocks/>
-          </p:cNvSpPr>
+          <p:cNvPr id="6" name="TextBox 5"/>
+          <p:cNvSpPr txBox="1"/>
           <p:nvPr/>
         </p:nvSpPr>
         <p:spPr>
           <a:xfrm>
-            <a:off x="838200" y="4706711"/>
-            <a:ext cx="10515600" cy="1013053"/>
+            <a:off x="502920" y="4251960"/>
+            <a:ext cx="11155680" cy="1280160"/>
           </a:xfrm>
           <a:prstGeom prst="rect">
             <a:avLst/>
           </a:prstGeom>
+          <a:noFill/>
         </p:spPr>
         <p:txBody>
-          <a:bodyPr vert="horz" lIns="91440" tIns="45720" rIns="91440" bIns="45720" rtlCol="0" anchor="t">
-            <a:normAutofit fontScale="62500" lnSpcReduction="20000"/>
+          <a:bodyPr wrap="square">
+            <a:spAutoFit/>
           </a:bodyPr>
-          <a:lstStyle>
-            <a:lvl1pPr marL="228600" indent="-228600" algn="l" defTabSz="914400" rtl="0" eaLnBrk="1" latinLnBrk="0" hangingPunct="1">
-              <a:lnSpc>
-                <a:spcPct val="90000"/>
-              </a:lnSpc>
-              <a:spcBef>
-                <a:spcPts val="1000"/>
-              </a:spcBef>
-              <a:buFont typeface="Arial" panose="020B0604020202020204" pitchFamily="34" charset="0"/>
-              <a:buChar char="•"/>
-              <a:defRPr sz="2800" kern="1200">
-                <a:solidFill>
-                  <a:schemeClr val="tx1"/>
-                </a:solidFill>
-                <a:latin typeface="+mn-lt"/>
-                <a:ea typeface="+mn-ea"/>
-                <a:cs typeface="+mn-cs"/>
-              </a:defRPr>
-            </a:lvl1pPr>
-            <a:lvl2pPr marL="685800" indent="-228600" algn="l" defTabSz="914400" rtl="0" eaLnBrk="1" latinLnBrk="0" hangingPunct="1">
-              <a:lnSpc>
-                <a:spcPct val="90000"/>
-              </a:lnSpc>
-              <a:spcBef>
-                <a:spcPts val="500"/>
-              </a:spcBef>
-              <a:buFont typeface="Arial" panose="020B0604020202020204" pitchFamily="34" charset="0"/>
-              <a:buChar char="•"/>
-              <a:defRPr sz="2400" kern="1200">
-                <a:solidFill>
-                  <a:schemeClr val="tx1"/>
-                </a:solidFill>
-                <a:latin typeface="+mn-lt"/>
-                <a:ea typeface="+mn-ea"/>
-                <a:cs typeface="+mn-cs"/>
-              </a:defRPr>
-            </a:lvl2pPr>
-            <a:lvl3pPr marL="1143000" indent="-228600" algn="l" defTabSz="914400" rtl="0" eaLnBrk="1" latinLnBrk="0" hangingPunct="1">
-              <a:lnSpc>
-                <a:spcPct val="90000"/>
-              </a:lnSpc>
-              <a:spcBef>
-                <a:spcPts val="500"/>
-              </a:spcBef>
-              <a:buFont typeface="Arial" panose="020B0604020202020204" pitchFamily="34" charset="0"/>
-              <a:buChar char="•"/>
-              <a:defRPr sz="2000" kern="1200">
-                <a:solidFill>
-                  <a:schemeClr val="tx1"/>
-                </a:solidFill>
-                <a:latin typeface="+mn-lt"/>
-                <a:ea typeface="+mn-ea"/>
-                <a:cs typeface="+mn-cs"/>
-              </a:defRPr>
-            </a:lvl3pPr>
-            <a:lvl4pPr marL="1600200" indent="-228600" algn="l" defTabSz="914400" rtl="0" eaLnBrk="1" latinLnBrk="0" hangingPunct="1">
-              <a:lnSpc>
-                <a:spcPct val="90000"/>
-              </a:lnSpc>
-              <a:spcBef>
-                <a:spcPts val="500"/>
-              </a:spcBef>
-              <a:buFont typeface="Arial" panose="020B0604020202020204" pitchFamily="34" charset="0"/>
-              <a:buChar char="•"/>
-              <a:defRPr sz="1800" kern="1200">
-                <a:solidFill>
-                  <a:schemeClr val="tx1"/>
-                </a:solidFill>
-                <a:latin typeface="+mn-lt"/>
-                <a:ea typeface="+mn-ea"/>
-                <a:cs typeface="+mn-cs"/>
-              </a:defRPr>
-            </a:lvl4pPr>
-            <a:lvl5pPr marL="2057400" indent="-228600" algn="l" defTabSz="914400" rtl="0" eaLnBrk="1" latinLnBrk="0" hangingPunct="1">
-              <a:lnSpc>
-                <a:spcPct val="90000"/>
-              </a:lnSpc>
-              <a:spcBef>
-                <a:spcPts val="500"/>
-              </a:spcBef>
-              <a:buFont typeface="Arial" panose="020B0604020202020204" pitchFamily="34" charset="0"/>
-              <a:buChar char="•"/>
-              <a:defRPr sz="1800" kern="1200">
-                <a:solidFill>
-                  <a:schemeClr val="tx1"/>
-                </a:solidFill>
-                <a:latin typeface="+mn-lt"/>
-                <a:ea typeface="+mn-ea"/>
-                <a:cs typeface="+mn-cs"/>
-              </a:defRPr>
-            </a:lvl5pPr>
-            <a:lvl6pPr marL="2514600" indent="-228600" algn="l" defTabSz="914400" rtl="0" eaLnBrk="1" latinLnBrk="0" hangingPunct="1">
-              <a:lnSpc>
-                <a:spcPct val="90000"/>
-              </a:lnSpc>
-              <a:spcBef>
-                <a:spcPts val="500"/>
-              </a:spcBef>
-              <a:buFont typeface="Arial" panose="020B0604020202020204" pitchFamily="34" charset="0"/>
-              <a:buChar char="•"/>
-              <a:defRPr sz="1800" kern="1200">
-                <a:solidFill>
-                  <a:schemeClr val="tx1"/>
-                </a:solidFill>
-                <a:latin typeface="+mn-lt"/>
-                <a:ea typeface="+mn-ea"/>
-                <a:cs typeface="+mn-cs"/>
-              </a:defRPr>
-            </a:lvl6pPr>
-            <a:lvl7pPr marL="2971800" indent="-228600" algn="l" defTabSz="914400" rtl="0" eaLnBrk="1" latinLnBrk="0" hangingPunct="1">
-              <a:lnSpc>
-                <a:spcPct val="90000"/>
-              </a:lnSpc>
-              <a:spcBef>
-                <a:spcPts val="500"/>
-              </a:spcBef>
-              <a:buFont typeface="Arial" panose="020B0604020202020204" pitchFamily="34" charset="0"/>
-              <a:buChar char="•"/>
-              <a:defRPr sz="1800" kern="1200">
-                <a:solidFill>
-                  <a:schemeClr val="tx1"/>
-                </a:solidFill>
-                <a:latin typeface="+mn-lt"/>
-                <a:ea typeface="+mn-ea"/>
-                <a:cs typeface="+mn-cs"/>
-              </a:defRPr>
-            </a:lvl7pPr>
-            <a:lvl8pPr marL="3429000" indent="-228600" algn="l" defTabSz="914400" rtl="0" eaLnBrk="1" latinLnBrk="0" hangingPunct="1">
-              <a:lnSpc>
-                <a:spcPct val="90000"/>
-              </a:lnSpc>
-              <a:spcBef>
-                <a:spcPts val="500"/>
-              </a:spcBef>
-              <a:buFont typeface="Arial" panose="020B0604020202020204" pitchFamily="34" charset="0"/>
-              <a:buChar char="•"/>
-              <a:defRPr sz="1800" kern="1200">
-                <a:solidFill>
-                  <a:schemeClr val="tx1"/>
-                </a:solidFill>
-                <a:latin typeface="+mn-lt"/>
-                <a:ea typeface="+mn-ea"/>
-                <a:cs typeface="+mn-cs"/>
-              </a:defRPr>
-            </a:lvl8pPr>
-            <a:lvl9pPr marL="3886200" indent="-228600" algn="l" defTabSz="914400" rtl="0" eaLnBrk="1" latinLnBrk="0" hangingPunct="1">
-              <a:lnSpc>
-                <a:spcPct val="90000"/>
-              </a:lnSpc>
-              <a:spcBef>
-                <a:spcPts val="500"/>
-              </a:spcBef>
-              <a:buFont typeface="Arial" panose="020B0604020202020204" pitchFamily="34" charset="0"/>
-              <a:buChar char="•"/>
-              <a:defRPr sz="1800" kern="1200">
-                <a:solidFill>
-                  <a:schemeClr val="tx1"/>
-                </a:solidFill>
-                <a:latin typeface="+mn-lt"/>
-                <a:ea typeface="+mn-ea"/>
-                <a:cs typeface="+mn-cs"/>
-              </a:defRPr>
-            </a:lvl9pPr>
-          </a:lstStyle>
-          <a:p>
-            <a:r>
-              <a:rPr lang="en-US" b="1" dirty="0">
-                <a:ea typeface="+mn-lt"/>
-                <a:cs typeface="+mn-lt"/>
+          <a:lstStyle/>
+          <a:p>
+            <a:r>
+              <a:rPr sz="1400" b="1">
+                <a:solidFill>
+                  <a:srgbClr val="1F3A5F"/>
+                </a:solidFill>
               </a:rPr>
-              <a:t>Clean fine-tuning effect (matched elicitation):</a:t>
-            </a:r>
-            <a:r>
-              <a:rPr lang="en-US" dirty="0">
-                <a:ea typeface="+mn-lt"/>
-                <a:cs typeface="+mn-lt"/>
+              <a:t>Clean fine-tuning effect (matched elicitation): Δacc +0.031 [+0.019, +0.043], McNemar p &lt; 0.001. Calibration: ECE 0.061 → 0.052.</a:t>
+            </a:r>
+          </a:p>
+          <a:p>
+            <a:r>
+              <a:rPr sz="1200" i="1">
+                <a:solidFill>
+                  <a:srgbClr val="7A7A7A"/>
+                </a:solidFill>
               </a:rPr>
-              <a:t> </a:t>
-            </a:r>
-            <a:r>
-              <a:rPr lang="en-US" dirty="0" err="1">
-                <a:ea typeface="+mn-lt"/>
-                <a:cs typeface="+mn-lt"/>
+              <a:t>Secondary (score-mode): highest accuracy yet ~4× worse calibrated (ECE 0.108 vs 0.052) — accuracy ≠ trustworthiness.</a:t>
+            </a:r>
+          </a:p>
+        </p:txBody>
+      </p:sp>
+      <p:sp>
+        <p:nvSpPr>
+          <p:cNvPr id="7" name="TextBox 6"/>
+          <p:cNvSpPr txBox="1"/>
+          <p:nvPr/>
+        </p:nvSpPr>
+        <p:spPr>
+          <a:xfrm>
+            <a:off x="502920" y="6446520"/>
+            <a:ext cx="11185855" cy="320040"/>
+          </a:xfrm>
+          <a:prstGeom prst="rect">
+            <a:avLst/>
+          </a:prstGeom>
+          <a:noFill/>
+        </p:spPr>
+        <p:txBody>
+          <a:bodyPr wrap="none">
+            <a:spAutoFit/>
+          </a:bodyPr>
+          <a:lstStyle/>
+          <a:p>
+            <a:pPr algn="r"/>
+            <a:r>
+              <a:rPr sz="900">
+                <a:solidFill>
+                  <a:srgbClr val="7A7A7A"/>
+                </a:solidFill>
               </a:rPr>
-              <a:t>Δacc</a:t>
-            </a:r>
-            <a:r>
-              <a:rPr lang="en-US" dirty="0">
-                <a:ea typeface="+mn-lt"/>
-                <a:cs typeface="+mn-lt"/>
-              </a:rPr>
-              <a:t> +0.033 [+0.021, +0.045], McNemar p &lt; 0.001. Calibration: ECE 0.053 → 0.027.</a:t>
-            </a:r>
-          </a:p>
-          <a:p>
-            <a:r>
-              <a:rPr lang="en-US" b="1">
-                <a:ea typeface="+mn-lt"/>
-                <a:cs typeface="+mn-lt"/>
-              </a:rPr>
-              <a:t>Secondary (score-mode):</a:t>
-            </a:r>
-            <a:r>
-              <a:rPr lang="en-US">
-                <a:ea typeface="+mn-lt"/>
-                <a:cs typeface="+mn-lt"/>
-              </a:rPr>
-              <a:t> highest accuracy yet ~4x </a:t>
-            </a:r>
-            <a:r>
-              <a:rPr lang="en-US" dirty="0">
-                <a:ea typeface="+mn-lt"/>
-                <a:cs typeface="+mn-lt"/>
-              </a:rPr>
-              <a:t>worse calibrated (ECE 0.117 vs 0.027) — accuracy </a:t>
-            </a:r>
-            <a:r>
-              <a:rPr lang="en-US">
-                <a:ea typeface="+mn-lt"/>
-                <a:cs typeface="+mn-lt"/>
-              </a:rPr>
-              <a:t>≠ trustworthiness </a:t>
-            </a:r>
-            <a:endParaRPr lang="en-US"/>
+              <a:t>Private &amp; Confidential</a:t>
+            </a:r>
           </a:p>
         </p:txBody>
       </p:sp>
     </p:spTree>
-    <p:extLst>
-      <p:ext uri="{BB962C8B-B14F-4D97-AF65-F5344CB8AC3E}">
-        <p14:creationId xmlns:p14="http://schemas.microsoft.com/office/powerpoint/2010/main" val="2238718144"/>
-      </p:ext>
-    </p:extLst>
   </p:cSld>
   <p:clrMapOvr>
     <a:masterClrMapping/>
@@ -6593,7 +6588,7 @@
 </file>
 
 <file path=ppt/slides/slide8.xml><?xml version="1.0" encoding="utf-8"?>
-<p:sld xmlns:a="http://schemas.openxmlformats.org/drawingml/2006/main" xmlns:r="http://schemas.openxmlformats.org/officeDocument/2006/relationships" xmlns:p="http://schemas.openxmlformats.org/presentationml/2006/main">
+<p:sld xmlns:a="http://schemas.openxmlformats.org/drawingml/2006/main" xmlns:p="http://schemas.openxmlformats.org/presentationml/2006/main" xmlns:r="http://schemas.openxmlformats.org/officeDocument/2006/relationships">
   <p:cSld>
     <p:spTree>
       <p:nvGrpSpPr>
@@ -6601,126 +6596,428 @@
         <p:cNvGrpSpPr/>
         <p:nvPr/>
       </p:nvGrpSpPr>
-      <p:grpSpPr>
-        <a:xfrm>
-          <a:off x="0" y="0"/>
-          <a:ext cx="0" cy="0"/>
-          <a:chOff x="0" y="0"/>
-          <a:chExt cx="0" cy="0"/>
-        </a:xfrm>
-      </p:grpSpPr>
-      <p:sp>
-        <p:nvSpPr>
-          <p:cNvPr id="2" name="Title 1">
-            <a:extLst>
-              <a:ext uri="{FF2B5EF4-FFF2-40B4-BE49-F238E27FC236}">
-                <a16:creationId xmlns:a16="http://schemas.microsoft.com/office/drawing/2014/main" id="{A40A6CEB-89FE-A899-0506-26CEC1BB1E7C}"/>
-              </a:ext>
-            </a:extLst>
-          </p:cNvPr>
-          <p:cNvSpPr>
-            <a:spLocks noGrp="1"/>
-          </p:cNvSpPr>
-          <p:nvPr>
-            <p:ph type="title"/>
-          </p:nvPr>
-        </p:nvSpPr>
-        <p:spPr/>
-        <p:txBody>
-          <a:bodyPr/>
-          <a:lstStyle/>
-          <a:p>
-            <a:r>
-              <a:rPr lang="en-US">
-                <a:ea typeface="+mj-lt"/>
-                <a:cs typeface="+mj-lt"/>
+      <p:grpSpPr/>
+      <p:sp>
+        <p:nvSpPr>
+          <p:cNvPr id="2" name="TextBox 1"/>
+          <p:cNvSpPr txBox="1"/>
+          <p:nvPr/>
+        </p:nvSpPr>
+        <p:spPr>
+          <a:xfrm>
+            <a:off x="502920" y="320040"/>
+            <a:ext cx="11185855" cy="914400"/>
+          </a:xfrm>
+          <a:prstGeom prst="rect">
+            <a:avLst/>
+          </a:prstGeom>
+          <a:noFill/>
+        </p:spPr>
+        <p:txBody>
+          <a:bodyPr wrap="square">
+            <a:spAutoFit/>
+          </a:bodyPr>
+          <a:lstStyle/>
+          <a:p>
+            <a:r>
+              <a:rPr sz="2800" b="1">
+                <a:solidFill>
+                  <a:srgbClr val="1F3A5F"/>
+                </a:solidFill>
               </a:rPr>
               <a:t>Calibration: The Real Win</a:t>
             </a:r>
-            <a:endParaRPr lang="en-US"/>
-          </a:p>
-        </p:txBody>
-      </p:sp>
-      <p:sp>
-        <p:nvSpPr>
-          <p:cNvPr id="3" name="Content Placeholder 2">
-            <a:extLst>
-              <a:ext uri="{FF2B5EF4-FFF2-40B4-BE49-F238E27FC236}">
-                <a16:creationId xmlns:a16="http://schemas.microsoft.com/office/drawing/2014/main" id="{3B076F62-4D74-1D4D-11F6-2C5009EDD0C7}"/>
-              </a:ext>
-            </a:extLst>
-          </p:cNvPr>
-          <p:cNvSpPr>
-            <a:spLocks noGrp="1"/>
-          </p:cNvSpPr>
-          <p:nvPr>
-            <p:ph idx="1"/>
-          </p:nvPr>
+          </a:p>
+        </p:txBody>
+      </p:sp>
+      <p:sp>
+        <p:nvSpPr>
+          <p:cNvPr id="3" name="Rectangle 2"/>
+          <p:cNvSpPr/>
+          <p:nvPr/>
         </p:nvSpPr>
         <p:spPr>
           <a:xfrm>
-            <a:off x="838200" y="1825625"/>
-            <a:ext cx="5261429" cy="4351338"/>
+            <a:off x="502920" y="1207008"/>
+            <a:ext cx="2194560" cy="38100"/>
           </a:xfrm>
+          <a:prstGeom prst="rect">
+            <a:avLst/>
+          </a:prstGeom>
+          <a:solidFill>
+            <a:srgbClr val="2E6DA4"/>
+          </a:solidFill>
+          <a:ln>
+            <a:noFill/>
+          </a:ln>
         </p:spPr>
-        <p:txBody>
-          <a:bodyPr vert="horz" lIns="91440" tIns="45720" rIns="91440" bIns="45720" rtlCol="0" anchor="t">
-            <a:noAutofit/>
+        <p:style>
+          <a:lnRef idx="1">
+            <a:schemeClr val="accent1"/>
+          </a:lnRef>
+          <a:fillRef idx="3">
+            <a:schemeClr val="accent1"/>
+          </a:fillRef>
+          <a:effectRef idx="2">
+            <a:schemeClr val="accent1"/>
+          </a:effectRef>
+          <a:fontRef idx="minor">
+            <a:schemeClr val="lt1"/>
+          </a:fontRef>
+        </p:style>
+        <p:txBody>
+          <a:bodyPr rtlCol="0" anchor="ctr"/>
+          <a:lstStyle/>
+          <a:p>
+            <a:pPr algn="ctr"/>
+          </a:p>
+        </p:txBody>
+      </p:sp>
+      <p:sp>
+        <p:nvSpPr>
+          <p:cNvPr id="4" name="TextBox 3"/>
+          <p:cNvSpPr txBox="1"/>
+          <p:nvPr/>
+        </p:nvSpPr>
+        <p:spPr>
+          <a:xfrm>
+            <a:off x="502920" y="1417320"/>
+            <a:ext cx="5669280" cy="4480560"/>
+          </a:xfrm>
+          <a:prstGeom prst="rect">
+            <a:avLst/>
+          </a:prstGeom>
+          <a:noFill/>
+        </p:spPr>
+        <p:txBody>
+          <a:bodyPr wrap="square">
+            <a:spAutoFit/>
           </a:bodyPr>
           <a:lstStyle/>
           <a:p>
-            <a:r>
-              <a:rPr lang="en-US" sz="2400" dirty="0"/>
-              <a:t>Raw fine-tuned confidence is badly overconfident (SFT pushes probabilities toward 0/1); temperature scaling, fit on validation, corrects it: fine-tuned ECE 0.280 → 0.027 on test (~10× reduction); reliability curve moves onto the diagonal.</a:t>
-            </a:r>
-            <a:r>
-              <a:rPr lang="en-US" sz="2400" dirty="0" err="1"/>
-              <a:t/>
-            </a:r>
-            <a:r>
-              <a:rPr lang="en-US" sz="2400" dirty="0"/>
-              <a:t/>
-            </a:r>
-          </a:p>
-          <a:p>
-            <a:endParaRPr lang="en-US" sz="2400" dirty="0"/>
-          </a:p>
-          <a:p>
-            <a:r>
-              <a:rPr lang="en-US" sz="2400" dirty="0"/>
-              <a:t>For a tool that acts on confidence (abstain, escalate, flag), trustworthy probabilities are the operationally useful property.</a:t>
-            </a:r>
-            <a:r>
-              <a:rPr lang="en-US" sz="2400"/>
-              <a:t/>
-            </a:r>
-            <a:r>
-              <a:rPr lang="en-US" sz="2400" dirty="0"/>
-              <a:t/>
-            </a:r>
-          </a:p>
-          <a:p>
-            <a:endParaRPr lang="en-US" sz="2400" dirty="0"/>
-          </a:p>
-          <a:p>
-            <a:r>
-              <a:rPr lang="en-US" sz="1200" i="1">
-                <a:solidFill>
-                  <a:srgbClr val="7A7A7A"/>
+            <a:pPr>
+              <a:spcAft>
+                <a:spcPts val="1000"/>
+              </a:spcAft>
+            </a:pPr>
+            <a:r>
+              <a:rPr sz="1600">
+                <a:solidFill>
+                  <a:srgbClr val="222222"/>
                 </a:solidFill>
               </a:rPr>
-              <a:t>Secondary: even after both are calibrated, the fine-tuned model is better calibrated than the zero-shot baseline (ECE 0.027 vs 0.053).</a:t>
-            </a:r>
-            <a:endParaRPr lang="en-US" sz="2400" dirty="0"/>
-          </a:p>
-          <a:p>
-            <a:endParaRPr lang="en-US" sz="2400" dirty="0"/>
+              <a:t>•  Raw confidence is miscalibrated → temperature/Platt scaling, fit on validation, corrects it.</a:t>
+            </a:r>
+          </a:p>
+          <a:p>
+            <a:pPr>
+              <a:spcAft>
+                <a:spcPts val="1000"/>
+              </a:spcAft>
+            </a:pPr>
+            <a:r>
+              <a:rPr sz="1600">
+                <a:solidFill>
+                  <a:srgbClr val="222222"/>
+                </a:solidFill>
+              </a:rPr>
+              <a:t>•  Calibration cuts ECE 0.316 → 0.061 (+0.255 [+0.213, +0.279]); fine-tuning does not improve calibration (+0.010, CI straddles zero).</a:t>
+            </a:r>
+          </a:p>
+          <a:p>
+            <a:pPr>
+              <a:spcAft>
+                <a:spcPts val="1000"/>
+              </a:spcAft>
+            </a:pPr>
+            <a:r>
+              <a:rPr sz="1600">
+                <a:solidFill>
+                  <a:srgbClr val="222222"/>
+                </a:solidFill>
+              </a:rPr>
+              <a:t>•  For a tool that acts on confidence (abstain, escalate, flag), trustworthy probabilities are the operationally useful property.</a:t>
+            </a:r>
           </a:p>
         </p:txBody>
       </p:sp>
       <p:pic>
         <p:nvPicPr>
-          <p:cNvPr id="4" name="Picture 3" descr="reliability_ft_rawcal.png"/>
+          <p:cNvPr id="5" name="Picture 4" descr="reliability.png"/>
+          <p:cNvPicPr>
+            <a:picLocks noChangeAspect="1"/>
+          </p:cNvPicPr>
+          <p:nvPr/>
+        </p:nvPicPr>
+        <p:blipFill>
+          <a:blip r:embed="rId2"/>
+          <a:stretch>
+            <a:fillRect/>
+          </a:stretch>
+        </p:blipFill>
+        <p:spPr>
+          <a:xfrm>
+            <a:off x="6766560" y="1554480"/>
+            <a:ext cx="4754880" cy="3845763"/>
+          </a:xfrm>
+          <a:prstGeom prst="rect">
+            <a:avLst/>
+          </a:prstGeom>
+        </p:spPr>
+      </p:pic>
+      <p:sp>
+        <p:nvSpPr>
+          <p:cNvPr id="6" name="TextBox 5"/>
+          <p:cNvSpPr txBox="1"/>
+          <p:nvPr/>
+        </p:nvSpPr>
+        <p:spPr>
+          <a:xfrm>
+            <a:off x="502920" y="6446520"/>
+            <a:ext cx="11185855" cy="320040"/>
+          </a:xfrm>
+          <a:prstGeom prst="rect">
+            <a:avLst/>
+          </a:prstGeom>
+          <a:noFill/>
+        </p:spPr>
+        <p:txBody>
+          <a:bodyPr wrap="none">
+            <a:spAutoFit/>
+          </a:bodyPr>
+          <a:lstStyle/>
+          <a:p>
+            <a:pPr algn="r"/>
+            <a:r>
+              <a:rPr sz="900">
+                <a:solidFill>
+                  <a:srgbClr val="7A7A7A"/>
+                </a:solidFill>
+              </a:rPr>
+              <a:t>Private &amp; Confidential</a:t>
+            </a:r>
+          </a:p>
+        </p:txBody>
+      </p:sp>
+    </p:spTree>
+  </p:cSld>
+  <p:clrMapOvr>
+    <a:masterClrMapping/>
+  </p:clrMapOvr>
+</p:sld>
+</file>
+
+<file path=ppt/slides/slide9.xml><?xml version="1.0" encoding="utf-8"?>
+<p:sld xmlns:a="http://schemas.openxmlformats.org/drawingml/2006/main" xmlns:p="http://schemas.openxmlformats.org/presentationml/2006/main" xmlns:r="http://schemas.openxmlformats.org/officeDocument/2006/relationships">
+  <p:cSld>
+    <p:spTree>
+      <p:nvGrpSpPr>
+        <p:cNvPr id="1" name=""/>
+        <p:cNvGrpSpPr/>
+        <p:nvPr/>
+      </p:nvGrpSpPr>
+      <p:grpSpPr/>
+      <p:sp>
+        <p:nvSpPr>
+          <p:cNvPr id="2" name="TextBox 1"/>
+          <p:cNvSpPr txBox="1"/>
+          <p:nvPr/>
+        </p:nvSpPr>
+        <p:spPr>
+          <a:xfrm>
+            <a:off x="502920" y="320040"/>
+            <a:ext cx="11185855" cy="914400"/>
+          </a:xfrm>
+          <a:prstGeom prst="rect">
+            <a:avLst/>
+          </a:prstGeom>
+          <a:noFill/>
+        </p:spPr>
+        <p:txBody>
+          <a:bodyPr wrap="none">
+            <a:spAutoFit/>
+          </a:bodyPr>
+          <a:lstStyle/>
+          <a:p>
+            <a:r>
+              <a:rPr sz="2600" b="1">
+                <a:solidFill>
+                  <a:srgbClr val="1F3A5F"/>
+                </a:solidFill>
+              </a:rPr>
+              <a:t>Explainer: Faithful Attribution Beats Plausible Stories</a:t>
+            </a:r>
+          </a:p>
+        </p:txBody>
+      </p:sp>
+      <p:sp>
+        <p:nvSpPr>
+          <p:cNvPr id="3" name="Rectangle 2"/>
+          <p:cNvSpPr/>
+          <p:nvPr/>
+        </p:nvSpPr>
+        <p:spPr>
+          <a:xfrm>
+            <a:off x="502920" y="1170432"/>
+            <a:ext cx="2194560" cy="38100"/>
+          </a:xfrm>
+          <a:prstGeom prst="rect">
+            <a:avLst/>
+          </a:prstGeom>
+          <a:solidFill>
+            <a:srgbClr val="2E6DA4"/>
+          </a:solidFill>
+          <a:ln>
+            <a:noFill/>
+          </a:ln>
+        </p:spPr>
+        <p:style>
+          <a:lnRef idx="1">
+            <a:schemeClr val="accent1"/>
+          </a:lnRef>
+          <a:fillRef idx="3">
+            <a:schemeClr val="accent1"/>
+          </a:fillRef>
+          <a:effectRef idx="2">
+            <a:schemeClr val="accent1"/>
+          </a:effectRef>
+          <a:fontRef idx="minor">
+            <a:schemeClr val="lt1"/>
+          </a:fontRef>
+        </p:style>
+        <p:txBody>
+          <a:bodyPr rtlCol="0" anchor="ctr"/>
+          <a:lstStyle/>
+          <a:p>
+            <a:pPr algn="ctr"/>
+          </a:p>
+        </p:txBody>
+      </p:sp>
+      <p:sp>
+        <p:nvSpPr>
+          <p:cNvPr id="4" name="TextBox 3"/>
+          <p:cNvSpPr txBox="1"/>
+          <p:nvPr/>
+        </p:nvSpPr>
+        <p:spPr>
+          <a:xfrm>
+            <a:off x="502920" y="1325880"/>
+            <a:ext cx="11247120" cy="1554480"/>
+          </a:xfrm>
+          <a:prstGeom prst="rect">
+            <a:avLst/>
+          </a:prstGeom>
+          <a:noFill/>
+        </p:spPr>
+        <p:txBody>
+          <a:bodyPr wrap="square">
+            <a:spAutoFit/>
+          </a:bodyPr>
+          <a:lstStyle/>
+          <a:p>
+            <a:pPr>
+              <a:spcAft>
+                <a:spcPts val="800"/>
+              </a:spcAft>
+            </a:pPr>
+            <a:r>
+              <a:rPr sz="1500">
+                <a:solidFill>
+                  <a:srgbClr val="222222"/>
+                </a:solidFill>
+              </a:rPr>
+              <a:t>•  explain(model, points, labels) — model-agnostic, either predictor.</a:t>
+            </a:r>
+          </a:p>
+          <a:p>
+            <a:pPr>
+              <a:spcAft>
+                <a:spcPts val="800"/>
+              </a:spcAft>
+            </a:pPr>
+            <a:r>
+              <a:rPr sz="1500">
+                <a:solidFill>
+                  <a:srgbClr val="222222"/>
+                </a:solidFill>
+              </a:rPr>
+              <a:t>•  Two layers: leave-one-field-out occlusion (faithful by construction) + model's own rationale (plausible, not necessarily faithful).</a:t>
+            </a:r>
+          </a:p>
+          <a:p>
+            <a:pPr>
+              <a:spcAft>
+                <a:spcPts val="800"/>
+              </a:spcAft>
+            </a:pPr>
+            <a:r>
+              <a:rPr sz="1500">
+                <a:solidFill>
+                  <a:srgbClr val="222222"/>
+                </a:solidFill>
+              </a:rPr>
+              <a:t>•  Removing speaker flips 10% of predictions, all metadata 13.3%.</a:t>
+            </a:r>
+          </a:p>
+          <a:p>
+            <a:pPr>
+              <a:spcAft>
+                <a:spcPts val="800"/>
+              </a:spcAft>
+            </a:pPr>
+            <a:r>
+              <a:rPr sz="1500">
+                <a:solidFill>
+                  <a:srgbClr val="222222"/>
+                </a:solidFill>
+              </a:rPr>
+              <a:t>•  Speaker-driven predictions sit at the majority-class baseline of their subset (0.564 vs 0.564, Δ = +0.000 [-0.141, +0.128]); statement-driven are +0.215 [+0.108, +0.285] above theirs.</a:t>
+            </a:r>
+          </a:p>
+          <a:p>
+            <a:pPr>
+              <a:spcAft>
+                <a:spcPts val="800"/>
+              </a:spcAft>
+            </a:pPr>
+            <a:r>
+              <a:rPr sz="1500">
+                <a:solidFill>
+                  <a:srgbClr val="222222"/>
+                </a:solidFill>
+              </a:rPr>
+              <a:t>•  Rationale-occlusion agreement 0.457 is indistinguishable from chance (permutation p = 0.19): the model's self-explanations carry no detectable information about what actually drove the prediction.</a:t>
+            </a:r>
+          </a:p>
+        </p:txBody>
+      </p:sp>
+      <p:pic>
+        <p:nvPicPr>
+          <p:cNvPr id="5" name="Picture 4" descr="fields.png"/>
+          <p:cNvPicPr>
+            <a:picLocks noChangeAspect="1"/>
+          </p:cNvPicPr>
+          <p:nvPr/>
+        </p:nvPicPr>
+        <p:blipFill>
+          <a:blip r:embed="rId2"/>
+          <a:stretch>
+            <a:fillRect/>
+          </a:stretch>
+        </p:blipFill>
+        <p:spPr>
+          <a:xfrm>
+            <a:off x="502920" y="3200400"/>
+            <a:ext cx="5577840" cy="3423366"/>
+          </a:xfrm>
+          <a:prstGeom prst="rect">
+            <a:avLst/>
+          </a:prstGeom>
+        </p:spPr>
+      </p:pic>
+      <p:pic>
+        <p:nvPicPr>
+          <p:cNvPr id="6" name="Picture 5" descr="drivers.png"/>
           <p:cNvPicPr>
             <a:picLocks noChangeAspect="1"/>
           </p:cNvPicPr>
@@ -6734,369 +7031,49 @@
         </p:blipFill>
         <p:spPr>
           <a:xfrm>
-            <a:off x="6588579" y="1823130"/>
-            <a:ext cx="4769770" cy="4314825"/>
+            <a:off x="6309360" y="3200400"/>
+            <a:ext cx="5577840" cy="3308456"/>
           </a:xfrm>
           <a:prstGeom prst="rect">
             <a:avLst/>
           </a:prstGeom>
         </p:spPr>
       </p:pic>
-    </p:spTree>
-    <p:extLst>
-      <p:ext uri="{BB962C8B-B14F-4D97-AF65-F5344CB8AC3E}">
-        <p14:creationId xmlns:p14="http://schemas.microsoft.com/office/powerpoint/2010/main" val="957249956"/>
-      </p:ext>
-    </p:extLst>
-  </p:cSld>
-  <p:clrMapOvr>
-    <a:masterClrMapping/>
-  </p:clrMapOvr>
-</p:sld>
-</file>
-
-<file path=ppt/slides/slide9.xml><?xml version="1.0" encoding="utf-8"?>
-<p:sld xmlns:a="http://schemas.openxmlformats.org/drawingml/2006/main" xmlns:r="http://schemas.openxmlformats.org/officeDocument/2006/relationships" xmlns:p="http://schemas.openxmlformats.org/presentationml/2006/main">
-  <p:cSld>
-    <p:spTree>
-      <p:nvGrpSpPr>
-        <p:cNvPr id="1" name=""/>
-        <p:cNvGrpSpPr/>
-        <p:nvPr/>
-      </p:nvGrpSpPr>
-      <p:grpSpPr>
-        <a:xfrm>
-          <a:off x="0" y="0"/>
-          <a:ext cx="0" cy="0"/>
-          <a:chOff x="0" y="0"/>
-          <a:chExt cx="0" cy="0"/>
-        </a:xfrm>
-      </p:grpSpPr>
-      <p:sp>
-        <p:nvSpPr>
-          <p:cNvPr id="2" name="Title 1">
-            <a:extLst>
-              <a:ext uri="{FF2B5EF4-FFF2-40B4-BE49-F238E27FC236}">
-                <a16:creationId xmlns:a16="http://schemas.microsoft.com/office/drawing/2014/main" id="{57E65361-4B7B-CE4B-CE99-514C5F785C3D}"/>
-              </a:ext>
-            </a:extLst>
-          </p:cNvPr>
-          <p:cNvSpPr>
-            <a:spLocks noGrp="1"/>
-          </p:cNvSpPr>
-          <p:nvPr>
-            <p:ph type="title"/>
-          </p:nvPr>
-        </p:nvSpPr>
-        <p:spPr/>
-        <p:txBody>
-          <a:bodyPr>
-            <a:normAutofit/>
-          </a:bodyPr>
-          <a:lstStyle/>
-          <a:p>
-            <a:r>
-              <a:rPr lang="en-US" sz="3600">
-                <a:ea typeface="+mj-lt"/>
-                <a:cs typeface="+mj-lt"/>
-              </a:rPr>
-              <a:t>Explainer: Faithful Attribution Beats Plausible Stories</a:t>
-            </a:r>
-            <a:endParaRPr lang="en-US" sz="3600"/>
-          </a:p>
-        </p:txBody>
-      </p:sp>
-      <p:sp>
-        <p:nvSpPr>
-          <p:cNvPr id="3" name="Content Placeholder 2">
-            <a:extLst>
-              <a:ext uri="{FF2B5EF4-FFF2-40B4-BE49-F238E27FC236}">
-                <a16:creationId xmlns:a16="http://schemas.microsoft.com/office/drawing/2014/main" id="{F55AD656-5C41-CAC7-0629-DD494988E357}"/>
-              </a:ext>
-            </a:extLst>
-          </p:cNvPr>
-          <p:cNvSpPr>
-            <a:spLocks noGrp="1"/>
-          </p:cNvSpPr>
-          <p:nvPr>
-            <p:ph idx="1"/>
-          </p:nvPr>
+      <p:sp>
+        <p:nvSpPr>
+          <p:cNvPr id="7" name="TextBox 6"/>
+          <p:cNvSpPr txBox="1"/>
+          <p:nvPr/>
         </p:nvSpPr>
         <p:spPr>
           <a:xfrm>
-            <a:off x="838200" y="1825625"/>
-            <a:ext cx="6030686" cy="4351338"/>
-          </a:xfrm>
-        </p:spPr>
-        <p:txBody>
-          <a:bodyPr vert="horz" lIns="91440" tIns="45720" rIns="91440" bIns="45720" rtlCol="0" anchor="t">
-            <a:noAutofit/>
-          </a:bodyPr>
-          <a:lstStyle/>
-          <a:p>
-            <a:r>
-              <a:rPr lang="en-US" sz="1600" b="1">
-                <a:ea typeface="+mn-lt"/>
-                <a:cs typeface="+mn-lt"/>
-              </a:rPr>
-              <a:t>explain</a:t>
-            </a:r>
-            <a:r>
-              <a:rPr lang="en-US" sz="1600">
-                <a:ea typeface="+mn-lt"/>
-                <a:cs typeface="+mn-lt"/>
-              </a:rPr>
-              <a:t>(model, points, labels): model-agnostic, either predictor</a:t>
-            </a:r>
-            <a:endParaRPr lang="en-US" sz="1600" dirty="0"/>
-          </a:p>
-          <a:p>
-            <a:endParaRPr lang="en-US" sz="1600" dirty="0">
-              <a:ea typeface="+mn-lt"/>
-              <a:cs typeface="+mn-lt"/>
-            </a:endParaRPr>
-          </a:p>
-          <a:p>
-            <a:r>
-              <a:rPr lang="en-US" sz="1600" b="1" dirty="0">
-                <a:ea typeface="+mn-lt"/>
-                <a:cs typeface="+mn-lt"/>
-              </a:rPr>
-              <a:t>Two </a:t>
-            </a:r>
-            <a:r>
-              <a:rPr lang="en-US" sz="1600" b="1">
-                <a:ea typeface="+mn-lt"/>
-                <a:cs typeface="+mn-lt"/>
-              </a:rPr>
-              <a:t>layers </a:t>
-            </a:r>
-            <a:br>
-              <a:rPr lang="en-US" sz="1600" b="1" dirty="0">
-                <a:ea typeface="+mn-lt"/>
-                <a:cs typeface="+mn-lt"/>
-              </a:rPr>
-            </a:br>
-            <a:r>
-              <a:rPr lang="en-US" sz="1600" i="1">
-                <a:ea typeface="+mn-lt"/>
-                <a:cs typeface="+mn-lt"/>
-              </a:rPr>
-              <a:t>1) leave-one-field-out occlusion</a:t>
-            </a:r>
-            <a:r>
-              <a:rPr lang="en-US" sz="1600">
-                <a:ea typeface="+mn-lt"/>
-                <a:cs typeface="+mn-lt"/>
-              </a:rPr>
-              <a:t> (faithful by construction)  </a:t>
-            </a:r>
-            <a:br>
-              <a:rPr lang="en-US" sz="1600" dirty="0">
-                <a:ea typeface="+mn-lt"/>
-                <a:cs typeface="+mn-lt"/>
-              </a:rPr>
-            </a:br>
-            <a:r>
-              <a:rPr lang="en-US" sz="1600">
-                <a:ea typeface="+mn-lt"/>
-                <a:cs typeface="+mn-lt"/>
-              </a:rPr>
-              <a:t>2) </a:t>
-            </a:r>
-            <a:r>
-              <a:rPr lang="en-US" sz="1600" i="1">
-                <a:ea typeface="+mn-lt"/>
-                <a:cs typeface="+mn-lt"/>
-              </a:rPr>
-              <a:t>model's </a:t>
-            </a:r>
-            <a:r>
-              <a:rPr lang="en-US" sz="1600" i="1" dirty="0">
-                <a:ea typeface="+mn-lt"/>
-                <a:cs typeface="+mn-lt"/>
-              </a:rPr>
-              <a:t>own rationale</a:t>
-            </a:r>
-            <a:r>
-              <a:rPr lang="en-US" sz="1600" dirty="0">
-                <a:ea typeface="+mn-lt"/>
-                <a:cs typeface="+mn-lt"/>
-              </a:rPr>
-              <a:t> (plausible, not necessarily faithful)</a:t>
-            </a:r>
-            <a:endParaRPr lang="en-US" sz="1600" dirty="0"/>
-          </a:p>
-          <a:p>
-            <a:endParaRPr lang="en-US" sz="1600" dirty="0">
-              <a:ea typeface="+mn-lt"/>
-              <a:cs typeface="+mn-lt"/>
-            </a:endParaRPr>
-          </a:p>
-          <a:p>
-            <a:r>
-              <a:rPr lang="en-US" sz="1600" b="1">
-                <a:ea typeface="+mn-lt"/>
-                <a:cs typeface="+mn-lt"/>
-              </a:rPr>
-              <a:t>Findings</a:t>
-            </a:r>
-            <a:endParaRPr lang="en-US" sz="1600" dirty="0">
-              <a:ea typeface="+mn-lt"/>
-              <a:cs typeface="+mn-lt"/>
-            </a:endParaRPr>
-          </a:p>
-          <a:p>
-            <a:pPr lvl="1">
-              <a:buFont typeface="Courier New" panose="020B0604020202020204" pitchFamily="34" charset="0"/>
-              <a:buChar char="o"/>
-            </a:pPr>
-            <a:r>
-              <a:rPr lang="en-US" sz="1600">
-                <a:ea typeface="+mn-lt"/>
-                <a:cs typeface="+mn-lt"/>
-              </a:rPr>
-              <a:t>removing speaker flips 8.3% of predictions</a:t>
-            </a:r>
-            <a:endParaRPr lang="en-US" sz="1600" dirty="0">
-              <a:ea typeface="+mn-lt"/>
-              <a:cs typeface="+mn-lt"/>
-            </a:endParaRPr>
-          </a:p>
-          <a:p>
-            <a:pPr lvl="1">
-              <a:buFont typeface="Courier New" panose="020B0604020202020204" pitchFamily="34" charset="0"/>
-              <a:buChar char="o"/>
-            </a:pPr>
-            <a:r>
-              <a:rPr lang="en-US" sz="1600">
-                <a:ea typeface="+mn-lt"/>
-                <a:cs typeface="+mn-lt"/>
-              </a:rPr>
-              <a:t>removing all metadata 12.3% </a:t>
-            </a:r>
-            <a:endParaRPr lang="en-US" sz="1600" dirty="0">
-              <a:ea typeface="+mn-lt"/>
-              <a:cs typeface="+mn-lt"/>
-            </a:endParaRPr>
-          </a:p>
-          <a:p>
-            <a:pPr lvl="1">
-              <a:buFont typeface="Courier New" panose="020B0604020202020204" pitchFamily="34" charset="0"/>
-              <a:buChar char="o"/>
-            </a:pPr>
-            <a:r>
-              <a:rPr lang="en-US" sz="1600">
-                <a:ea typeface="+mn-lt"/>
-                <a:cs typeface="+mn-lt"/>
-              </a:rPr>
-              <a:t>rationales only ~46% faithful to the true driver</a:t>
-            </a:r>
-            <a:endParaRPr lang="en-US" sz="1600" dirty="0">
-              <a:ea typeface="+mn-lt"/>
-              <a:cs typeface="+mn-lt"/>
-            </a:endParaRPr>
-          </a:p>
-          <a:p>
-            <a:pPr lvl="1">
-              <a:buFont typeface="Courier New" panose="020B0604020202020204" pitchFamily="34" charset="0"/>
-              <a:buChar char="o"/>
-            </a:pPr>
-            <a:r>
-              <a:rPr lang="en-US" sz="1600">
-                <a:ea typeface="+mn-lt"/>
-                <a:cs typeface="+mn-lt"/>
-              </a:rPr>
-              <a:t>speaker-driven predictions less accurate </a:t>
-            </a:r>
-            <a:br>
-              <a:rPr lang="en-US" sz="1600" dirty="0">
-                <a:ea typeface="+mn-lt"/>
-                <a:cs typeface="+mn-lt"/>
-              </a:rPr>
-            </a:br>
-            <a:r>
-              <a:rPr lang="en-US" sz="1600">
-                <a:ea typeface="+mn-lt"/>
-                <a:cs typeface="+mn-lt"/>
-              </a:rPr>
-              <a:t>(statement-driven 0.752 vs speaker-driven 0.625)</a:t>
-            </a:r>
-            <a:endParaRPr lang="en-US" sz="1600" dirty="0"/>
-          </a:p>
-          <a:p>
-            <a:endParaRPr lang="en-US" sz="1600" dirty="0"/>
-          </a:p>
-        </p:txBody>
-      </p:sp>
-      <p:pic>
-        <p:nvPicPr>
-          <p:cNvPr id="4" name="Picture 3" descr="fields.png">
-            <a:extLst>
-              <a:ext uri="{FF2B5EF4-FFF2-40B4-BE49-F238E27FC236}">
-                <a16:creationId xmlns:a16="http://schemas.microsoft.com/office/drawing/2014/main" id="{6ED506D0-FC32-335F-02FB-133738EB4F71}"/>
-              </a:ext>
-            </a:extLst>
-          </p:cNvPr>
-          <p:cNvPicPr>
-            <a:picLocks noChangeAspect="1"/>
-          </p:cNvPicPr>
-          <p:nvPr/>
-        </p:nvPicPr>
-        <p:blipFill>
-          <a:blip r:embed="rId2"/>
-          <a:srcRect r="-130"/>
-          <a:stretch>
-            <a:fillRect/>
-          </a:stretch>
-        </p:blipFill>
-        <p:spPr>
-          <a:xfrm>
-            <a:off x="6875689" y="1341892"/>
-            <a:ext cx="4340689" cy="2657475"/>
+            <a:off x="502920" y="6446520"/>
+            <a:ext cx="11185855" cy="320040"/>
           </a:xfrm>
           <a:prstGeom prst="rect">
             <a:avLst/>
           </a:prstGeom>
+          <a:noFill/>
         </p:spPr>
-      </p:pic>
-      <p:pic>
-        <p:nvPicPr>
-          <p:cNvPr id="5" name="Picture 4" descr="drivers.png">
-            <a:extLst>
-              <a:ext uri="{FF2B5EF4-FFF2-40B4-BE49-F238E27FC236}">
-                <a16:creationId xmlns:a16="http://schemas.microsoft.com/office/drawing/2014/main" id="{2EF86B9B-9B99-01A8-0C7A-9ECADC0F282D}"/>
-              </a:ext>
-            </a:extLst>
-          </p:cNvPr>
-          <p:cNvPicPr>
-            <a:picLocks noChangeAspect="1"/>
-          </p:cNvPicPr>
-          <p:nvPr/>
-        </p:nvPicPr>
-        <p:blipFill>
-          <a:blip r:embed="rId3"/>
-          <a:srcRect b="-191"/>
-          <a:stretch>
-            <a:fillRect/>
-          </a:stretch>
-        </p:blipFill>
-        <p:spPr>
-          <a:xfrm>
-            <a:off x="6875690" y="4085771"/>
-            <a:ext cx="4340679" cy="2554529"/>
-          </a:xfrm>
-          <a:prstGeom prst="rect">
-            <a:avLst/>
-          </a:prstGeom>
-        </p:spPr>
-      </p:pic>
+        <p:txBody>
+          <a:bodyPr wrap="none">
+            <a:spAutoFit/>
+          </a:bodyPr>
+          <a:lstStyle/>
+          <a:p>
+            <a:pPr algn="r"/>
+            <a:r>
+              <a:rPr sz="900">
+                <a:solidFill>
+                  <a:srgbClr val="7A7A7A"/>
+                </a:solidFill>
+              </a:rPr>
+              <a:t>Private &amp; Confidential</a:t>
+            </a:r>
+          </a:p>
+        </p:txBody>
+      </p:sp>
     </p:spTree>
-    <p:extLst>
-      <p:ext uri="{BB962C8B-B14F-4D97-AF65-F5344CB8AC3E}">
-        <p14:creationId xmlns:p14="http://schemas.microsoft.com/office/powerpoint/2010/main" val="3208398695"/>
-      </p:ext>
-    </p:extLst>
   </p:cSld>
   <p:clrMapOvr>
     <a:masterClrMapping/>
@@ -7105,7 +7082,7 @@
 </file>
 
 <file path=ppt/theme/theme1.xml><?xml version="1.0" encoding="utf-8"?>
-<a:theme xmlns:a="http://schemas.openxmlformats.org/drawingml/2006/main" name="office theme">
+<a:theme xmlns:a="http://schemas.openxmlformats.org/drawingml/2006/main" name="Office Theme">
   <a:themeElements>
     <a:clrScheme name="Office">
       <a:dk1>
@@ -7115,39 +7092,39 @@
         <a:sysClr val="window" lastClr="FFFFFF"/>
       </a:lt1>
       <a:dk2>
-        <a:srgbClr val="0E2841"/>
+        <a:srgbClr val="1F497D"/>
       </a:dk2>
       <a:lt2>
-        <a:srgbClr val="E8E8E8"/>
+        <a:srgbClr val="EEECE1"/>
       </a:lt2>
       <a:accent1>
-        <a:srgbClr val="156082"/>
+        <a:srgbClr val="4F81BD"/>
       </a:accent1>
       <a:accent2>
-        <a:srgbClr val="E97132"/>
+        <a:srgbClr val="C0504D"/>
       </a:accent2>
       <a:accent3>
-        <a:srgbClr val="196B24"/>
+        <a:srgbClr val="9BBB59"/>
       </a:accent3>
       <a:accent4>
-        <a:srgbClr val="0F9ED5"/>
+        <a:srgbClr val="8064A2"/>
       </a:accent4>
       <a:accent5>
-        <a:srgbClr val="A02B93"/>
+        <a:srgbClr val="4BACC6"/>
       </a:accent5>
       <a:accent6>
-        <a:srgbClr val="4EA72E"/>
+        <a:srgbClr val="F79646"/>
       </a:accent6>
       <a:hlink>
-        <a:srgbClr val="467886"/>
+        <a:srgbClr val="0000FF"/>
       </a:hlink>
       <a:folHlink>
-        <a:srgbClr val="96607D"/>
+        <a:srgbClr val="800080"/>
       </a:folHlink>
     </a:clrScheme>
-    <a:fontScheme name="Office Theme">
+    <a:fontScheme name="Office">
       <a:majorFont>
-        <a:latin typeface="Aptos Display" panose="020F0302020204030204"/>
+        <a:latin typeface="Calibri"/>
         <a:ea typeface=""/>
         <a:cs typeface=""/>
         <a:font script="Jpan" typeface="ＭＳ Ｐゴシック"/>
@@ -7182,7 +7159,7 @@
         <a:font script="Geor" typeface="Sylfaen"/>
       </a:majorFont>
       <a:minorFont>
-        <a:latin typeface="Aptos" panose="020B0004020202020204"/>
+        <a:latin typeface="Calibri"/>
         <a:ea typeface=""/>
         <a:cs typeface=""/>
         <a:font script="Jpan" typeface="ＭＳ Ｐゴシック"/>
@@ -7217,7 +7194,7 @@
         <a:font script="Geor" typeface="Sylfaen"/>
       </a:minorFont>
     </a:fontScheme>
-    <a:fmtScheme name="Office Theme">
+    <a:fmtScheme name="Office">
       <a:fillStyleLst>
         <a:solidFill>
           <a:schemeClr val="phClr"/>
@@ -7226,136 +7203,180 @@
           <a:gsLst>
             <a:gs pos="0">
               <a:schemeClr val="phClr">
-                <a:lumMod val="110000"/>
-                <a:satMod val="105000"/>
-                <a:tint val="67000"/>
+                <a:tint val="50000"/>
+                <a:satMod val="300000"/>
               </a:schemeClr>
             </a:gs>
-            <a:gs pos="50000">
+            <a:gs pos="35000">
               <a:schemeClr val="phClr">
-                <a:lumMod val="105000"/>
-                <a:satMod val="103000"/>
-                <a:tint val="73000"/>
+                <a:tint val="37000"/>
+                <a:satMod val="300000"/>
               </a:schemeClr>
             </a:gs>
             <a:gs pos="100000">
               <a:schemeClr val="phClr">
-                <a:lumMod val="105000"/>
-                <a:satMod val="109000"/>
-                <a:tint val="81000"/>
+                <a:tint val="15000"/>
+                <a:satMod val="350000"/>
               </a:schemeClr>
             </a:gs>
           </a:gsLst>
-          <a:lin ang="5400000" scaled="0"/>
+          <a:lin ang="16200000" scaled="1"/>
         </a:gradFill>
         <a:gradFill rotWithShape="1">
           <a:gsLst>
             <a:gs pos="0">
               <a:schemeClr val="phClr">
-                <a:satMod val="103000"/>
-                <a:lumMod val="102000"/>
-                <a:tint val="94000"/>
-              </a:schemeClr>
-            </a:gs>
-            <a:gs pos="50000">
-              <a:schemeClr val="phClr">
-                <a:satMod val="110000"/>
-                <a:lumMod val="100000"/>
+                <a:tint val="100000"/>
                 <a:shade val="100000"/>
+                <a:satMod val="130000"/>
               </a:schemeClr>
             </a:gs>
             <a:gs pos="100000">
               <a:schemeClr val="phClr">
-                <a:lumMod val="99000"/>
-                <a:satMod val="120000"/>
-                <a:shade val="78000"/>
+                <a:tint val="50000"/>
+                <a:shade val="100000"/>
+                <a:satMod val="350000"/>
               </a:schemeClr>
             </a:gs>
           </a:gsLst>
-          <a:lin ang="5400000" scaled="0"/>
+          <a:lin ang="16200000" scaled="0"/>
         </a:gradFill>
       </a:fillStyleLst>
       <a:lnStyleLst>
-        <a:ln w="12700" cap="flat" cmpd="sng" algn="ctr">
+        <a:ln w="9525" cap="flat" cmpd="sng" algn="ctr">
           <a:solidFill>
-            <a:schemeClr val="phClr"/>
+            <a:schemeClr val="phClr">
+              <a:shade val="95000"/>
+              <a:satMod val="105000"/>
+            </a:schemeClr>
           </a:solidFill>
           <a:prstDash val="solid"/>
-          <a:miter lim="800000"/>
-        </a:ln>
-        <a:ln w="19050" cap="flat" cmpd="sng" algn="ctr">
-          <a:solidFill>
-            <a:schemeClr val="phClr"/>
-          </a:solidFill>
-          <a:prstDash val="solid"/>
-          <a:miter lim="800000"/>
         </a:ln>
         <a:ln w="25400" cap="flat" cmpd="sng" algn="ctr">
           <a:solidFill>
             <a:schemeClr val="phClr"/>
           </a:solidFill>
           <a:prstDash val="solid"/>
-          <a:miter lim="800000"/>
+        </a:ln>
+        <a:ln w="38100" cap="flat" cmpd="sng" algn="ctr">
+          <a:solidFill>
+            <a:schemeClr val="phClr"/>
+          </a:solidFill>
+          <a:prstDash val="solid"/>
         </a:ln>
       </a:lnStyleLst>
       <a:effectStyleLst>
         <a:effectStyle>
-          <a:effectLst/>
-        </a:effectStyle>
-        <a:effectStyle>
-          <a:effectLst/>
+          <a:effectLst>
+            <a:outerShdw blurRad="40000" dist="20000" dir="5400000" rotWithShape="0">
+              <a:srgbClr val="000000">
+                <a:alpha val="38000"/>
+              </a:srgbClr>
+            </a:outerShdw>
+          </a:effectLst>
         </a:effectStyle>
         <a:effectStyle>
           <a:effectLst>
-            <a:outerShdw blurRad="57150" dist="19050" dir="5400000" algn="ctr" rotWithShape="0">
+            <a:outerShdw blurRad="40000" dist="23000" dir="5400000" rotWithShape="0">
               <a:srgbClr val="000000">
-                <a:alpha val="63000"/>
+                <a:alpha val="35000"/>
               </a:srgbClr>
             </a:outerShdw>
           </a:effectLst>
+        </a:effectStyle>
+        <a:effectStyle>
+          <a:effectLst>
+            <a:outerShdw blurRad="40000" dist="23000" dir="5400000" rotWithShape="0">
+              <a:srgbClr val="000000">
+                <a:alpha val="35000"/>
+              </a:srgbClr>
+            </a:outerShdw>
+          </a:effectLst>
+          <a:scene3d>
+            <a:camera prst="orthographicFront">
+              <a:rot lat="0" lon="0" rev="0"/>
+            </a:camera>
+            <a:lightRig rig="threePt" dir="t">
+              <a:rot lat="0" lon="0" rev="1200000"/>
+            </a:lightRig>
+          </a:scene3d>
+          <a:sp3d>
+            <a:bevelT w="63500" h="25400"/>
+          </a:sp3d>
         </a:effectStyle>
       </a:effectStyleLst>
       <a:bgFillStyleLst>
         <a:solidFill>
           <a:schemeClr val="phClr"/>
         </a:solidFill>
-        <a:solidFill>
-          <a:schemeClr val="phClr">
-            <a:tint val="95000"/>
-            <a:satMod val="170000"/>
-          </a:schemeClr>
-        </a:solidFill>
         <a:gradFill rotWithShape="1">
           <a:gsLst>
             <a:gs pos="0">
               <a:schemeClr val="phClr">
-                <a:tint val="93000"/>
-                <a:satMod val="150000"/>
-                <a:shade val="98000"/>
-                <a:lumMod val="102000"/>
+                <a:tint val="40000"/>
+                <a:satMod val="350000"/>
               </a:schemeClr>
             </a:gs>
-            <a:gs pos="50000">
+            <a:gs pos="40000">
               <a:schemeClr val="phClr">
-                <a:tint val="98000"/>
-                <a:satMod val="130000"/>
-                <a:shade val="90000"/>
-                <a:lumMod val="103000"/>
+                <a:tint val="45000"/>
+                <a:shade val="99000"/>
+                <a:satMod val="350000"/>
               </a:schemeClr>
             </a:gs>
             <a:gs pos="100000">
               <a:schemeClr val="phClr">
-                <a:shade val="63000"/>
-                <a:satMod val="120000"/>
+                <a:shade val="20000"/>
+                <a:satMod val="255000"/>
               </a:schemeClr>
             </a:gs>
           </a:gsLst>
-          <a:lin ang="5400000" scaled="0"/>
+          <a:path path="circle">
+            <a:fillToRect l="50000" t="-80000" r="50000" b="180000"/>
+          </a:path>
+        </a:gradFill>
+        <a:gradFill rotWithShape="1">
+          <a:gsLst>
+            <a:gs pos="0">
+              <a:schemeClr val="phClr">
+                <a:tint val="80000"/>
+                <a:satMod val="300000"/>
+              </a:schemeClr>
+            </a:gs>
+            <a:gs pos="100000">
+              <a:schemeClr val="phClr">
+                <a:shade val="30000"/>
+                <a:satMod val="200000"/>
+              </a:schemeClr>
+            </a:gs>
+          </a:gsLst>
+          <a:path path="circle">
+            <a:fillToRect l="50000" t="50000" r="50000" b="50000"/>
+          </a:path>
         </a:gradFill>
       </a:bgFillStyleLst>
     </a:fmtScheme>
   </a:themeElements>
   <a:objectDefaults>
+    <a:spDef>
+      <a:spPr/>
+      <a:bodyPr/>
+      <a:lstStyle/>
+      <a:style>
+        <a:lnRef idx="1">
+          <a:schemeClr val="accent1"/>
+        </a:lnRef>
+        <a:fillRef idx="3">
+          <a:schemeClr val="accent1"/>
+        </a:fillRef>
+        <a:effectRef idx="2">
+          <a:schemeClr val="accent1"/>
+        </a:effectRef>
+        <a:fontRef idx="minor">
+          <a:schemeClr val="lt1"/>
+        </a:fontRef>
+      </a:style>
+    </a:spDef>
     <a:lnDef>
       <a:spPr/>
       <a:bodyPr/>
@@ -7377,11 +7398,6 @@
     </a:lnDef>
   </a:objectDefaults>
   <a:extraClrSchemeLst/>
-  <a:extLst>
-    <a:ext uri="{05A4C25C-085E-4340-85A3-A5531E510DB2}">
-      <thm15:themeFamily xmlns:thm15="http://schemas.microsoft.com/office/thememl/2012/main" name="Office Theme" id="{2E142A2C-CD16-42D6-873A-C26D2A0506FA}" vid="{1BDDFF52-6CD6-40A5-AB3C-68EB2F1E4D0A}"/>
-    </a:ext>
-  </a:extLst>
 </a:theme>
 </file>
 
